--- a/03-课件PPT/讲次版/第4章-4-讲次 4-4 · 现代 RAG 全链路.pptx
+++ b/03-课件PPT/讲次版/第4章-4-讲次 4-4 · 现代 RAG 全链路.pptx
@@ -12514,14 +12514,1495 @@
       </p:sp>
       <p:sp>
         <p:nvSpPr>
-          <p:cNvPr id="5" name="TextBox 4"/>
+          <p:cNvPr id="5" name="Rounded Rectangle 4"/>
+          <p:cNvSpPr/>
+          <p:nvPr/>
+        </p:nvSpPr>
+        <p:spPr>
+          <a:xfrm>
+            <a:off x="857250" y="2667000"/>
+            <a:ext cx="1607820" cy="1143000"/>
+          </a:xfrm>
+          <a:prstGeom prst="roundRect">
+            <a:avLst>
+              <a:gd name="adj" fmla="val 8000"/>
+            </a:avLst>
+          </a:prstGeom>
+          <a:solidFill>
+            <a:srgbClr val="FFFFFF"/>
+          </a:solidFill>
+          <a:ln w="12700">
+            <a:solidFill>
+              <a:srgbClr val="2563EB"/>
+            </a:solidFill>
+          </a:ln>
+          <a:effectLst/>
+        </p:spPr>
+        <p:style>
+          <a:lnRef idx="1">
+            <a:schemeClr val="accent1"/>
+          </a:lnRef>
+          <a:fillRef idx="3">
+            <a:schemeClr val="accent1"/>
+          </a:fillRef>
+          <a:effectRef idx="2">
+            <a:schemeClr val="accent1"/>
+          </a:effectRef>
+          <a:fontRef idx="minor">
+            <a:schemeClr val="lt1"/>
+          </a:fontRef>
+        </p:style>
+        <p:txBody>
+          <a:bodyPr rtlCol="0" anchor="ctr"/>
+          <a:lstStyle/>
+          <a:p>
+            <a:pPr algn="ctr"/>
+          </a:p>
+        </p:txBody>
+      </p:sp>
+      <p:sp>
+        <p:nvSpPr>
+          <p:cNvPr id="6" name="Rectangle 5"/>
+          <p:cNvSpPr/>
+          <p:nvPr/>
+        </p:nvSpPr>
+        <p:spPr>
+          <a:xfrm>
+            <a:off x="857250" y="2667000"/>
+            <a:ext cx="1607820" cy="57150"/>
+          </a:xfrm>
+          <a:prstGeom prst="rect">
+            <a:avLst/>
+          </a:prstGeom>
+          <a:solidFill>
+            <a:srgbClr val="2563EB"/>
+          </a:solidFill>
+          <a:ln>
+            <a:noFill/>
+          </a:ln>
+          <a:effectLst/>
+        </p:spPr>
+        <p:style>
+          <a:lnRef idx="1">
+            <a:schemeClr val="accent1"/>
+          </a:lnRef>
+          <a:fillRef idx="3">
+            <a:schemeClr val="accent1"/>
+          </a:fillRef>
+          <a:effectRef idx="2">
+            <a:schemeClr val="accent1"/>
+          </a:effectRef>
+          <a:fontRef idx="minor">
+            <a:schemeClr val="lt1"/>
+          </a:fontRef>
+        </p:style>
+        <p:txBody>
+          <a:bodyPr rtlCol="0" anchor="ctr"/>
+          <a:lstStyle/>
+          <a:p>
+            <a:pPr algn="ctr"/>
+          </a:p>
+        </p:txBody>
+      </p:sp>
+      <p:sp>
+        <p:nvSpPr>
+          <p:cNvPr id="7" name="Rounded Rectangle 6"/>
+          <p:cNvSpPr/>
+          <p:nvPr/>
+        </p:nvSpPr>
+        <p:spPr>
+          <a:xfrm>
+            <a:off x="1518285" y="2524125"/>
+            <a:ext cx="285750" cy="285750"/>
+          </a:xfrm>
+          <a:prstGeom prst="roundRect">
+            <a:avLst>
+              <a:gd name="adj" fmla="val 8000"/>
+            </a:avLst>
+          </a:prstGeom>
+          <a:solidFill>
+            <a:srgbClr val="2563EB"/>
+          </a:solidFill>
+          <a:ln>
+            <a:noFill/>
+          </a:ln>
+          <a:effectLst/>
+        </p:spPr>
+        <p:style>
+          <a:lnRef idx="1">
+            <a:schemeClr val="accent1"/>
+          </a:lnRef>
+          <a:fillRef idx="3">
+            <a:schemeClr val="accent1"/>
+          </a:fillRef>
+          <a:effectRef idx="2">
+            <a:schemeClr val="accent1"/>
+          </a:effectRef>
+          <a:fontRef idx="minor">
+            <a:schemeClr val="lt1"/>
+          </a:fontRef>
+        </p:style>
+        <p:txBody>
+          <a:bodyPr rtlCol="0" anchor="ctr"/>
+          <a:lstStyle/>
+          <a:p>
+            <a:pPr algn="ctr"/>
+          </a:p>
+        </p:txBody>
+      </p:sp>
+      <p:sp>
+        <p:nvSpPr>
+          <p:cNvPr id="8" name="TextBox 7"/>
           <p:cNvSpPr txBox="1"/>
           <p:nvPr/>
         </p:nvSpPr>
         <p:spPr>
           <a:xfrm>
-            <a:off x="9334500" y="0"/>
-            <a:ext cx="2667000" cy="704850"/>
+            <a:off x="1518285" y="2514600"/>
+            <a:ext cx="285750" cy="285750"/>
+          </a:xfrm>
+          <a:prstGeom prst="rect">
+            <a:avLst/>
+          </a:prstGeom>
+          <a:noFill/>
+        </p:spPr>
+        <p:txBody>
+          <a:bodyPr wrap="square" anchor="ctr">
+            <a:spAutoFit/>
+          </a:bodyPr>
+          <a:lstStyle/>
+          <a:p>
+            <a:pPr algn="ctr">
+              <a:lnSpc>
+                <a:spcPct val="100000"/>
+              </a:lnSpc>
+            </a:pPr>
+            <a:r>
+              <a:rPr sz="1300" b="1">
+                <a:solidFill>
+                  <a:srgbClr val="FFFFFF"/>
+                </a:solidFill>
+                <a:latin typeface="PingFang SC"/>
+              </a:rPr>
+              <a:t>1</a:t>
+            </a:r>
+          </a:p>
+        </p:txBody>
+      </p:sp>
+      <p:sp>
+        <p:nvSpPr>
+          <p:cNvPr id="9" name="TextBox 8"/>
+          <p:cNvSpPr txBox="1"/>
+          <p:nvPr/>
+        </p:nvSpPr>
+        <p:spPr>
+          <a:xfrm>
+            <a:off x="933450" y="2800350"/>
+            <a:ext cx="1455420" cy="952500"/>
+          </a:xfrm>
+          <a:prstGeom prst="rect">
+            <a:avLst/>
+          </a:prstGeom>
+          <a:noFill/>
+        </p:spPr>
+        <p:txBody>
+          <a:bodyPr wrap="square" anchor="ctr">
+            <a:spAutoFit/>
+          </a:bodyPr>
+          <a:lstStyle/>
+          <a:p>
+            <a:pPr algn="ctr">
+              <a:lnSpc>
+                <a:spcPct val="100000"/>
+              </a:lnSpc>
+            </a:pPr>
+            <a:r>
+              <a:rPr sz="1200" b="1">
+                <a:solidFill>
+                  <a:srgbClr val="475569"/>
+                </a:solidFill>
+                <a:latin typeface="PingFang SC"/>
+              </a:rPr>
+              <a:t>口语问题</a:t>
+            </a:r>
+          </a:p>
+        </p:txBody>
+      </p:sp>
+      <p:sp>
+        <p:nvSpPr>
+          <p:cNvPr id="10" name="Rounded Rectangle 9"/>
+          <p:cNvSpPr/>
+          <p:nvPr/>
+        </p:nvSpPr>
+        <p:spPr>
+          <a:xfrm>
+            <a:off x="3074670" y="2667000"/>
+            <a:ext cx="1607820" cy="1143000"/>
+          </a:xfrm>
+          <a:prstGeom prst="roundRect">
+            <a:avLst>
+              <a:gd name="adj" fmla="val 8000"/>
+            </a:avLst>
+          </a:prstGeom>
+          <a:solidFill>
+            <a:srgbClr val="FFFFFF"/>
+          </a:solidFill>
+          <a:ln w="12700">
+            <a:solidFill>
+              <a:srgbClr val="14B8A6"/>
+            </a:solidFill>
+          </a:ln>
+          <a:effectLst/>
+        </p:spPr>
+        <p:style>
+          <a:lnRef idx="1">
+            <a:schemeClr val="accent1"/>
+          </a:lnRef>
+          <a:fillRef idx="3">
+            <a:schemeClr val="accent1"/>
+          </a:fillRef>
+          <a:effectRef idx="2">
+            <a:schemeClr val="accent1"/>
+          </a:effectRef>
+          <a:fontRef idx="minor">
+            <a:schemeClr val="lt1"/>
+          </a:fontRef>
+        </p:style>
+        <p:txBody>
+          <a:bodyPr rtlCol="0" anchor="ctr"/>
+          <a:lstStyle/>
+          <a:p>
+            <a:pPr algn="ctr"/>
+          </a:p>
+        </p:txBody>
+      </p:sp>
+      <p:sp>
+        <p:nvSpPr>
+          <p:cNvPr id="11" name="Rectangle 10"/>
+          <p:cNvSpPr/>
+          <p:nvPr/>
+        </p:nvSpPr>
+        <p:spPr>
+          <a:xfrm>
+            <a:off x="3074670" y="2667000"/>
+            <a:ext cx="1607820" cy="57150"/>
+          </a:xfrm>
+          <a:prstGeom prst="rect">
+            <a:avLst/>
+          </a:prstGeom>
+          <a:solidFill>
+            <a:srgbClr val="14B8A6"/>
+          </a:solidFill>
+          <a:ln>
+            <a:noFill/>
+          </a:ln>
+          <a:effectLst/>
+        </p:spPr>
+        <p:style>
+          <a:lnRef idx="1">
+            <a:schemeClr val="accent1"/>
+          </a:lnRef>
+          <a:fillRef idx="3">
+            <a:schemeClr val="accent1"/>
+          </a:fillRef>
+          <a:effectRef idx="2">
+            <a:schemeClr val="accent1"/>
+          </a:effectRef>
+          <a:fontRef idx="minor">
+            <a:schemeClr val="lt1"/>
+          </a:fontRef>
+        </p:style>
+        <p:txBody>
+          <a:bodyPr rtlCol="0" anchor="ctr"/>
+          <a:lstStyle/>
+          <a:p>
+            <a:pPr algn="ctr"/>
+          </a:p>
+        </p:txBody>
+      </p:sp>
+      <p:sp>
+        <p:nvSpPr>
+          <p:cNvPr id="12" name="Rounded Rectangle 11"/>
+          <p:cNvSpPr/>
+          <p:nvPr/>
+        </p:nvSpPr>
+        <p:spPr>
+          <a:xfrm>
+            <a:off x="3735705" y="2524125"/>
+            <a:ext cx="285750" cy="285750"/>
+          </a:xfrm>
+          <a:prstGeom prst="roundRect">
+            <a:avLst>
+              <a:gd name="adj" fmla="val 8000"/>
+            </a:avLst>
+          </a:prstGeom>
+          <a:solidFill>
+            <a:srgbClr val="14B8A6"/>
+          </a:solidFill>
+          <a:ln>
+            <a:noFill/>
+          </a:ln>
+          <a:effectLst/>
+        </p:spPr>
+        <p:style>
+          <a:lnRef idx="1">
+            <a:schemeClr val="accent1"/>
+          </a:lnRef>
+          <a:fillRef idx="3">
+            <a:schemeClr val="accent1"/>
+          </a:fillRef>
+          <a:effectRef idx="2">
+            <a:schemeClr val="accent1"/>
+          </a:effectRef>
+          <a:fontRef idx="minor">
+            <a:schemeClr val="lt1"/>
+          </a:fontRef>
+        </p:style>
+        <p:txBody>
+          <a:bodyPr rtlCol="0" anchor="ctr"/>
+          <a:lstStyle/>
+          <a:p>
+            <a:pPr algn="ctr"/>
+          </a:p>
+        </p:txBody>
+      </p:sp>
+      <p:sp>
+        <p:nvSpPr>
+          <p:cNvPr id="13" name="TextBox 12"/>
+          <p:cNvSpPr txBox="1"/>
+          <p:nvPr/>
+        </p:nvSpPr>
+        <p:spPr>
+          <a:xfrm>
+            <a:off x="3735705" y="2514600"/>
+            <a:ext cx="285750" cy="285750"/>
+          </a:xfrm>
+          <a:prstGeom prst="rect">
+            <a:avLst/>
+          </a:prstGeom>
+          <a:noFill/>
+        </p:spPr>
+        <p:txBody>
+          <a:bodyPr wrap="square" anchor="ctr">
+            <a:spAutoFit/>
+          </a:bodyPr>
+          <a:lstStyle/>
+          <a:p>
+            <a:pPr algn="ctr">
+              <a:lnSpc>
+                <a:spcPct val="100000"/>
+              </a:lnSpc>
+            </a:pPr>
+            <a:r>
+              <a:rPr sz="1300" b="1">
+                <a:solidFill>
+                  <a:srgbClr val="FFFFFF"/>
+                </a:solidFill>
+                <a:latin typeface="PingFang SC"/>
+              </a:rPr>
+              <a:t>2</a:t>
+            </a:r>
+          </a:p>
+        </p:txBody>
+      </p:sp>
+      <p:sp>
+        <p:nvSpPr>
+          <p:cNvPr id="14" name="TextBox 13"/>
+          <p:cNvSpPr txBox="1"/>
+          <p:nvPr/>
+        </p:nvSpPr>
+        <p:spPr>
+          <a:xfrm>
+            <a:off x="3150870" y="2800350"/>
+            <a:ext cx="1455420" cy="952500"/>
+          </a:xfrm>
+          <a:prstGeom prst="rect">
+            <a:avLst/>
+          </a:prstGeom>
+          <a:noFill/>
+        </p:spPr>
+        <p:txBody>
+          <a:bodyPr wrap="square" anchor="ctr">
+            <a:spAutoFit/>
+          </a:bodyPr>
+          <a:lstStyle/>
+          <a:p>
+            <a:pPr algn="ctr">
+              <a:lnSpc>
+                <a:spcPct val="100000"/>
+              </a:lnSpc>
+            </a:pPr>
+            <a:r>
+              <a:rPr sz="1200" b="1">
+                <a:solidFill>
+                  <a:srgbClr val="475569"/>
+                </a:solidFill>
+                <a:latin typeface="PingFang SC"/>
+              </a:rPr>
+              <a:t>补全省略成分</a:t>
+            </a:r>
+          </a:p>
+        </p:txBody>
+      </p:sp>
+      <p:cxnSp>
+        <p:nvCxnSpPr>
+          <p:cNvPr id="15" name="Connector 14"/>
+          <p:cNvCxnSpPr/>
+          <p:nvPr/>
+        </p:nvCxnSpPr>
+        <p:spPr>
+          <a:xfrm>
+            <a:off x="2522220" y="3238500"/>
+            <a:ext cx="476250" cy="0"/>
+          </a:xfrm>
+          <a:prstGeom prst="line">
+            <a:avLst/>
+          </a:prstGeom>
+          <a:ln w="20320">
+            <a:solidFill>
+              <a:srgbClr val="475569"/>
+            </a:solidFill>
+          </a:ln>
+        </p:spPr>
+        <p:style>
+          <a:lnRef idx="2">
+            <a:schemeClr val="accent1"/>
+          </a:lnRef>
+          <a:fillRef idx="0">
+            <a:schemeClr val="accent1"/>
+          </a:fillRef>
+          <a:effectRef idx="1">
+            <a:schemeClr val="accent1"/>
+          </a:effectRef>
+          <a:fontRef idx="minor">
+            <a:schemeClr val="tx1"/>
+          </a:fontRef>
+        </p:style>
+      </p:cxnSp>
+      <p:sp>
+        <p:nvSpPr>
+          <p:cNvPr id="16" name="Isosceles Triangle 15"/>
+          <p:cNvSpPr/>
+          <p:nvPr/>
+        </p:nvSpPr>
+        <p:spPr>
+          <a:xfrm rot="5400000">
+            <a:off x="2912746" y="3195638"/>
+            <a:ext cx="85725" cy="85725"/>
+          </a:xfrm>
+          <a:prstGeom prst="triangle">
+            <a:avLst/>
+          </a:prstGeom>
+          <a:solidFill>
+            <a:srgbClr val="475569"/>
+          </a:solidFill>
+          <a:ln>
+            <a:noFill/>
+          </a:ln>
+          <a:effectLst/>
+        </p:spPr>
+        <p:style>
+          <a:lnRef idx="1">
+            <a:schemeClr val="accent1"/>
+          </a:lnRef>
+          <a:fillRef idx="3">
+            <a:schemeClr val="accent1"/>
+          </a:fillRef>
+          <a:effectRef idx="2">
+            <a:schemeClr val="accent1"/>
+          </a:effectRef>
+          <a:fontRef idx="minor">
+            <a:schemeClr val="lt1"/>
+          </a:fontRef>
+        </p:style>
+        <p:txBody>
+          <a:bodyPr rtlCol="0" anchor="ctr"/>
+          <a:lstStyle/>
+          <a:p>
+            <a:pPr algn="ctr"/>
+          </a:p>
+        </p:txBody>
+      </p:sp>
+      <p:sp>
+        <p:nvSpPr>
+          <p:cNvPr id="17" name="Rounded Rectangle 16"/>
+          <p:cNvSpPr/>
+          <p:nvPr/>
+        </p:nvSpPr>
+        <p:spPr>
+          <a:xfrm>
+            <a:off x="5292090" y="2667000"/>
+            <a:ext cx="1607820" cy="1143000"/>
+          </a:xfrm>
+          <a:prstGeom prst="roundRect">
+            <a:avLst>
+              <a:gd name="adj" fmla="val 8000"/>
+            </a:avLst>
+          </a:prstGeom>
+          <a:solidFill>
+            <a:srgbClr val="FFFFFF"/>
+          </a:solidFill>
+          <a:ln w="12700">
+            <a:solidFill>
+              <a:srgbClr val="8B5CF6"/>
+            </a:solidFill>
+          </a:ln>
+          <a:effectLst/>
+        </p:spPr>
+        <p:style>
+          <a:lnRef idx="1">
+            <a:schemeClr val="accent1"/>
+          </a:lnRef>
+          <a:fillRef idx="3">
+            <a:schemeClr val="accent1"/>
+          </a:fillRef>
+          <a:effectRef idx="2">
+            <a:schemeClr val="accent1"/>
+          </a:effectRef>
+          <a:fontRef idx="minor">
+            <a:schemeClr val="lt1"/>
+          </a:fontRef>
+        </p:style>
+        <p:txBody>
+          <a:bodyPr rtlCol="0" anchor="ctr"/>
+          <a:lstStyle/>
+          <a:p>
+            <a:pPr algn="ctr"/>
+          </a:p>
+        </p:txBody>
+      </p:sp>
+      <p:sp>
+        <p:nvSpPr>
+          <p:cNvPr id="18" name="Rectangle 17"/>
+          <p:cNvSpPr/>
+          <p:nvPr/>
+        </p:nvSpPr>
+        <p:spPr>
+          <a:xfrm>
+            <a:off x="5292090" y="2667000"/>
+            <a:ext cx="1607820" cy="57150"/>
+          </a:xfrm>
+          <a:prstGeom prst="rect">
+            <a:avLst/>
+          </a:prstGeom>
+          <a:solidFill>
+            <a:srgbClr val="8B5CF6"/>
+          </a:solidFill>
+          <a:ln>
+            <a:noFill/>
+          </a:ln>
+          <a:effectLst/>
+        </p:spPr>
+        <p:style>
+          <a:lnRef idx="1">
+            <a:schemeClr val="accent1"/>
+          </a:lnRef>
+          <a:fillRef idx="3">
+            <a:schemeClr val="accent1"/>
+          </a:fillRef>
+          <a:effectRef idx="2">
+            <a:schemeClr val="accent1"/>
+          </a:effectRef>
+          <a:fontRef idx="minor">
+            <a:schemeClr val="lt1"/>
+          </a:fontRef>
+        </p:style>
+        <p:txBody>
+          <a:bodyPr rtlCol="0" anchor="ctr"/>
+          <a:lstStyle/>
+          <a:p>
+            <a:pPr algn="ctr"/>
+          </a:p>
+        </p:txBody>
+      </p:sp>
+      <p:sp>
+        <p:nvSpPr>
+          <p:cNvPr id="19" name="Rounded Rectangle 18"/>
+          <p:cNvSpPr/>
+          <p:nvPr/>
+        </p:nvSpPr>
+        <p:spPr>
+          <a:xfrm>
+            <a:off x="5953125" y="2524125"/>
+            <a:ext cx="285750" cy="285750"/>
+          </a:xfrm>
+          <a:prstGeom prst="roundRect">
+            <a:avLst>
+              <a:gd name="adj" fmla="val 8000"/>
+            </a:avLst>
+          </a:prstGeom>
+          <a:solidFill>
+            <a:srgbClr val="8B5CF6"/>
+          </a:solidFill>
+          <a:ln>
+            <a:noFill/>
+          </a:ln>
+          <a:effectLst/>
+        </p:spPr>
+        <p:style>
+          <a:lnRef idx="1">
+            <a:schemeClr val="accent1"/>
+          </a:lnRef>
+          <a:fillRef idx="3">
+            <a:schemeClr val="accent1"/>
+          </a:fillRef>
+          <a:effectRef idx="2">
+            <a:schemeClr val="accent1"/>
+          </a:effectRef>
+          <a:fontRef idx="minor">
+            <a:schemeClr val="lt1"/>
+          </a:fontRef>
+        </p:style>
+        <p:txBody>
+          <a:bodyPr rtlCol="0" anchor="ctr"/>
+          <a:lstStyle/>
+          <a:p>
+            <a:pPr algn="ctr"/>
+          </a:p>
+        </p:txBody>
+      </p:sp>
+      <p:sp>
+        <p:nvSpPr>
+          <p:cNvPr id="20" name="TextBox 19"/>
+          <p:cNvSpPr txBox="1"/>
+          <p:nvPr/>
+        </p:nvSpPr>
+        <p:spPr>
+          <a:xfrm>
+            <a:off x="5953125" y="2514600"/>
+            <a:ext cx="285750" cy="285750"/>
+          </a:xfrm>
+          <a:prstGeom prst="rect">
+            <a:avLst/>
+          </a:prstGeom>
+          <a:noFill/>
+        </p:spPr>
+        <p:txBody>
+          <a:bodyPr wrap="square" anchor="ctr">
+            <a:spAutoFit/>
+          </a:bodyPr>
+          <a:lstStyle/>
+          <a:p>
+            <a:pPr algn="ctr">
+              <a:lnSpc>
+                <a:spcPct val="100000"/>
+              </a:lnSpc>
+            </a:pPr>
+            <a:r>
+              <a:rPr sz="1300" b="1">
+                <a:solidFill>
+                  <a:srgbClr val="FFFFFF"/>
+                </a:solidFill>
+                <a:latin typeface="PingFang SC"/>
+              </a:rPr>
+              <a:t>3</a:t>
+            </a:r>
+          </a:p>
+        </p:txBody>
+      </p:sp>
+      <p:sp>
+        <p:nvSpPr>
+          <p:cNvPr id="21" name="TextBox 20"/>
+          <p:cNvSpPr txBox="1"/>
+          <p:nvPr/>
+        </p:nvSpPr>
+        <p:spPr>
+          <a:xfrm>
+            <a:off x="5368290" y="2800350"/>
+            <a:ext cx="1455420" cy="952500"/>
+          </a:xfrm>
+          <a:prstGeom prst="rect">
+            <a:avLst/>
+          </a:prstGeom>
+          <a:noFill/>
+        </p:spPr>
+        <p:txBody>
+          <a:bodyPr wrap="square" anchor="ctr">
+            <a:spAutoFit/>
+          </a:bodyPr>
+          <a:lstStyle/>
+          <a:p>
+            <a:pPr algn="ctr">
+              <a:lnSpc>
+                <a:spcPct val="100000"/>
+              </a:lnSpc>
+            </a:pPr>
+            <a:r>
+              <a:rPr sz="1200" b="1">
+                <a:solidFill>
+                  <a:srgbClr val="475569"/>
+                </a:solidFill>
+                <a:latin typeface="PingFang SC"/>
+              </a:rPr>
+              <a:t>规范检索表达</a:t>
+            </a:r>
+          </a:p>
+        </p:txBody>
+      </p:sp>
+      <p:cxnSp>
+        <p:nvCxnSpPr>
+          <p:cNvPr id="22" name="Connector 21"/>
+          <p:cNvCxnSpPr/>
+          <p:nvPr/>
+        </p:nvCxnSpPr>
+        <p:spPr>
+          <a:xfrm>
+            <a:off x="4739640" y="3238500"/>
+            <a:ext cx="476250" cy="0"/>
+          </a:xfrm>
+          <a:prstGeom prst="line">
+            <a:avLst/>
+          </a:prstGeom>
+          <a:ln w="20320">
+            <a:solidFill>
+              <a:srgbClr val="475569"/>
+            </a:solidFill>
+          </a:ln>
+        </p:spPr>
+        <p:style>
+          <a:lnRef idx="2">
+            <a:schemeClr val="accent1"/>
+          </a:lnRef>
+          <a:fillRef idx="0">
+            <a:schemeClr val="accent1"/>
+          </a:fillRef>
+          <a:effectRef idx="1">
+            <a:schemeClr val="accent1"/>
+          </a:effectRef>
+          <a:fontRef idx="minor">
+            <a:schemeClr val="tx1"/>
+          </a:fontRef>
+        </p:style>
+      </p:cxnSp>
+      <p:sp>
+        <p:nvSpPr>
+          <p:cNvPr id="23" name="Isosceles Triangle 22"/>
+          <p:cNvSpPr/>
+          <p:nvPr/>
+        </p:nvSpPr>
+        <p:spPr>
+          <a:xfrm rot="5400000">
+            <a:off x="5130166" y="3195638"/>
+            <a:ext cx="85725" cy="85725"/>
+          </a:xfrm>
+          <a:prstGeom prst="triangle">
+            <a:avLst/>
+          </a:prstGeom>
+          <a:solidFill>
+            <a:srgbClr val="475569"/>
+          </a:solidFill>
+          <a:ln>
+            <a:noFill/>
+          </a:ln>
+          <a:effectLst/>
+        </p:spPr>
+        <p:style>
+          <a:lnRef idx="1">
+            <a:schemeClr val="accent1"/>
+          </a:lnRef>
+          <a:fillRef idx="3">
+            <a:schemeClr val="accent1"/>
+          </a:fillRef>
+          <a:effectRef idx="2">
+            <a:schemeClr val="accent1"/>
+          </a:effectRef>
+          <a:fontRef idx="minor">
+            <a:schemeClr val="lt1"/>
+          </a:fontRef>
+        </p:style>
+        <p:txBody>
+          <a:bodyPr rtlCol="0" anchor="ctr"/>
+          <a:lstStyle/>
+          <a:p>
+            <a:pPr algn="ctr"/>
+          </a:p>
+        </p:txBody>
+      </p:sp>
+      <p:sp>
+        <p:nvSpPr>
+          <p:cNvPr id="24" name="Rounded Rectangle 23"/>
+          <p:cNvSpPr/>
+          <p:nvPr/>
+        </p:nvSpPr>
+        <p:spPr>
+          <a:xfrm>
+            <a:off x="7509510" y="2667000"/>
+            <a:ext cx="1607820" cy="1143000"/>
+          </a:xfrm>
+          <a:prstGeom prst="roundRect">
+            <a:avLst>
+              <a:gd name="adj" fmla="val 8000"/>
+            </a:avLst>
+          </a:prstGeom>
+          <a:solidFill>
+            <a:srgbClr val="FFFFFF"/>
+          </a:solidFill>
+          <a:ln w="12700">
+            <a:solidFill>
+              <a:srgbClr val="F59E0B"/>
+            </a:solidFill>
+          </a:ln>
+          <a:effectLst/>
+        </p:spPr>
+        <p:style>
+          <a:lnRef idx="1">
+            <a:schemeClr val="accent1"/>
+          </a:lnRef>
+          <a:fillRef idx="3">
+            <a:schemeClr val="accent1"/>
+          </a:fillRef>
+          <a:effectRef idx="2">
+            <a:schemeClr val="accent1"/>
+          </a:effectRef>
+          <a:fontRef idx="minor">
+            <a:schemeClr val="lt1"/>
+          </a:fontRef>
+        </p:style>
+        <p:txBody>
+          <a:bodyPr rtlCol="0" anchor="ctr"/>
+          <a:lstStyle/>
+          <a:p>
+            <a:pPr algn="ctr"/>
+          </a:p>
+        </p:txBody>
+      </p:sp>
+      <p:sp>
+        <p:nvSpPr>
+          <p:cNvPr id="25" name="Rectangle 24"/>
+          <p:cNvSpPr/>
+          <p:nvPr/>
+        </p:nvSpPr>
+        <p:spPr>
+          <a:xfrm>
+            <a:off x="7509510" y="2667000"/>
+            <a:ext cx="1607820" cy="57150"/>
+          </a:xfrm>
+          <a:prstGeom prst="rect">
+            <a:avLst/>
+          </a:prstGeom>
+          <a:solidFill>
+            <a:srgbClr val="F59E0B"/>
+          </a:solidFill>
+          <a:ln>
+            <a:noFill/>
+          </a:ln>
+          <a:effectLst/>
+        </p:spPr>
+        <p:style>
+          <a:lnRef idx="1">
+            <a:schemeClr val="accent1"/>
+          </a:lnRef>
+          <a:fillRef idx="3">
+            <a:schemeClr val="accent1"/>
+          </a:fillRef>
+          <a:effectRef idx="2">
+            <a:schemeClr val="accent1"/>
+          </a:effectRef>
+          <a:fontRef idx="minor">
+            <a:schemeClr val="lt1"/>
+          </a:fontRef>
+        </p:style>
+        <p:txBody>
+          <a:bodyPr rtlCol="0" anchor="ctr"/>
+          <a:lstStyle/>
+          <a:p>
+            <a:pPr algn="ctr"/>
+          </a:p>
+        </p:txBody>
+      </p:sp>
+      <p:sp>
+        <p:nvSpPr>
+          <p:cNvPr id="26" name="Rounded Rectangle 25"/>
+          <p:cNvSpPr/>
+          <p:nvPr/>
+        </p:nvSpPr>
+        <p:spPr>
+          <a:xfrm>
+            <a:off x="8170545" y="2524125"/>
+            <a:ext cx="285750" cy="285750"/>
+          </a:xfrm>
+          <a:prstGeom prst="roundRect">
+            <a:avLst>
+              <a:gd name="adj" fmla="val 8000"/>
+            </a:avLst>
+          </a:prstGeom>
+          <a:solidFill>
+            <a:srgbClr val="F59E0B"/>
+          </a:solidFill>
+          <a:ln>
+            <a:noFill/>
+          </a:ln>
+          <a:effectLst/>
+        </p:spPr>
+        <p:style>
+          <a:lnRef idx="1">
+            <a:schemeClr val="accent1"/>
+          </a:lnRef>
+          <a:fillRef idx="3">
+            <a:schemeClr val="accent1"/>
+          </a:fillRef>
+          <a:effectRef idx="2">
+            <a:schemeClr val="accent1"/>
+          </a:effectRef>
+          <a:fontRef idx="minor">
+            <a:schemeClr val="lt1"/>
+          </a:fontRef>
+        </p:style>
+        <p:txBody>
+          <a:bodyPr rtlCol="0" anchor="ctr"/>
+          <a:lstStyle/>
+          <a:p>
+            <a:pPr algn="ctr"/>
+          </a:p>
+        </p:txBody>
+      </p:sp>
+      <p:sp>
+        <p:nvSpPr>
+          <p:cNvPr id="27" name="TextBox 26"/>
+          <p:cNvSpPr txBox="1"/>
+          <p:nvPr/>
+        </p:nvSpPr>
+        <p:spPr>
+          <a:xfrm>
+            <a:off x="8170545" y="2514600"/>
+            <a:ext cx="285750" cy="285750"/>
+          </a:xfrm>
+          <a:prstGeom prst="rect">
+            <a:avLst/>
+          </a:prstGeom>
+          <a:noFill/>
+        </p:spPr>
+        <p:txBody>
+          <a:bodyPr wrap="square" anchor="ctr">
+            <a:spAutoFit/>
+          </a:bodyPr>
+          <a:lstStyle/>
+          <a:p>
+            <a:pPr algn="ctr">
+              <a:lnSpc>
+                <a:spcPct val="100000"/>
+              </a:lnSpc>
+            </a:pPr>
+            <a:r>
+              <a:rPr sz="1300" b="1">
+                <a:solidFill>
+                  <a:srgbClr val="FFFFFF"/>
+                </a:solidFill>
+                <a:latin typeface="PingFang SC"/>
+              </a:rPr>
+              <a:t>4</a:t>
+            </a:r>
+          </a:p>
+        </p:txBody>
+      </p:sp>
+      <p:sp>
+        <p:nvSpPr>
+          <p:cNvPr id="28" name="TextBox 27"/>
+          <p:cNvSpPr txBox="1"/>
+          <p:nvPr/>
+        </p:nvSpPr>
+        <p:spPr>
+          <a:xfrm>
+            <a:off x="7585710" y="2800350"/>
+            <a:ext cx="1455420" cy="952500"/>
+          </a:xfrm>
+          <a:prstGeom prst="rect">
+            <a:avLst/>
+          </a:prstGeom>
+          <a:noFill/>
+        </p:spPr>
+        <p:txBody>
+          <a:bodyPr wrap="square" anchor="ctr">
+            <a:spAutoFit/>
+          </a:bodyPr>
+          <a:lstStyle/>
+          <a:p>
+            <a:pPr algn="ctr">
+              <a:lnSpc>
+                <a:spcPct val="100000"/>
+              </a:lnSpc>
+            </a:pPr>
+            <a:r>
+              <a:rPr sz="1200" b="1">
+                <a:solidFill>
+                  <a:srgbClr val="475569"/>
+                </a:solidFill>
+                <a:latin typeface="PingFang SC"/>
+              </a:rPr>
+              <a:t>同义扩展</a:t>
+            </a:r>
+          </a:p>
+        </p:txBody>
+      </p:sp>
+      <p:cxnSp>
+        <p:nvCxnSpPr>
+          <p:cNvPr id="29" name="Connector 28"/>
+          <p:cNvCxnSpPr/>
+          <p:nvPr/>
+        </p:nvCxnSpPr>
+        <p:spPr>
+          <a:xfrm>
+            <a:off x="6957060" y="3238500"/>
+            <a:ext cx="476250" cy="0"/>
+          </a:xfrm>
+          <a:prstGeom prst="line">
+            <a:avLst/>
+          </a:prstGeom>
+          <a:ln w="20320">
+            <a:solidFill>
+              <a:srgbClr val="475569"/>
+            </a:solidFill>
+          </a:ln>
+        </p:spPr>
+        <p:style>
+          <a:lnRef idx="2">
+            <a:schemeClr val="accent1"/>
+          </a:lnRef>
+          <a:fillRef idx="0">
+            <a:schemeClr val="accent1"/>
+          </a:fillRef>
+          <a:effectRef idx="1">
+            <a:schemeClr val="accent1"/>
+          </a:effectRef>
+          <a:fontRef idx="minor">
+            <a:schemeClr val="tx1"/>
+          </a:fontRef>
+        </p:style>
+      </p:cxnSp>
+      <p:sp>
+        <p:nvSpPr>
+          <p:cNvPr id="30" name="Isosceles Triangle 29"/>
+          <p:cNvSpPr/>
+          <p:nvPr/>
+        </p:nvSpPr>
+        <p:spPr>
+          <a:xfrm rot="5400000">
+            <a:off x="7347586" y="3195638"/>
+            <a:ext cx="85725" cy="85725"/>
+          </a:xfrm>
+          <a:prstGeom prst="triangle">
+            <a:avLst/>
+          </a:prstGeom>
+          <a:solidFill>
+            <a:srgbClr val="475569"/>
+          </a:solidFill>
+          <a:ln>
+            <a:noFill/>
+          </a:ln>
+          <a:effectLst/>
+        </p:spPr>
+        <p:style>
+          <a:lnRef idx="1">
+            <a:schemeClr val="accent1"/>
+          </a:lnRef>
+          <a:fillRef idx="3">
+            <a:schemeClr val="accent1"/>
+          </a:fillRef>
+          <a:effectRef idx="2">
+            <a:schemeClr val="accent1"/>
+          </a:effectRef>
+          <a:fontRef idx="minor">
+            <a:schemeClr val="lt1"/>
+          </a:fontRef>
+        </p:style>
+        <p:txBody>
+          <a:bodyPr rtlCol="0" anchor="ctr"/>
+          <a:lstStyle/>
+          <a:p>
+            <a:pPr algn="ctr"/>
+          </a:p>
+        </p:txBody>
+      </p:sp>
+      <p:sp>
+        <p:nvSpPr>
+          <p:cNvPr id="31" name="Rounded Rectangle 30"/>
+          <p:cNvSpPr/>
+          <p:nvPr/>
+        </p:nvSpPr>
+        <p:spPr>
+          <a:xfrm>
+            <a:off x="9726930" y="2667000"/>
+            <a:ext cx="1607820" cy="1143000"/>
+          </a:xfrm>
+          <a:prstGeom prst="roundRect">
+            <a:avLst>
+              <a:gd name="adj" fmla="val 8000"/>
+            </a:avLst>
+          </a:prstGeom>
+          <a:solidFill>
+            <a:srgbClr val="FFFFFF"/>
+          </a:solidFill>
+          <a:ln w="12700">
+            <a:solidFill>
+              <a:srgbClr val="34D399"/>
+            </a:solidFill>
+          </a:ln>
+          <a:effectLst/>
+        </p:spPr>
+        <p:style>
+          <a:lnRef idx="1">
+            <a:schemeClr val="accent1"/>
+          </a:lnRef>
+          <a:fillRef idx="3">
+            <a:schemeClr val="accent1"/>
+          </a:fillRef>
+          <a:effectRef idx="2">
+            <a:schemeClr val="accent1"/>
+          </a:effectRef>
+          <a:fontRef idx="minor">
+            <a:schemeClr val="lt1"/>
+          </a:fontRef>
+        </p:style>
+        <p:txBody>
+          <a:bodyPr rtlCol="0" anchor="ctr"/>
+          <a:lstStyle/>
+          <a:p>
+            <a:pPr algn="ctr"/>
+          </a:p>
+        </p:txBody>
+      </p:sp>
+      <p:sp>
+        <p:nvSpPr>
+          <p:cNvPr id="32" name="Rectangle 31"/>
+          <p:cNvSpPr/>
+          <p:nvPr/>
+        </p:nvSpPr>
+        <p:spPr>
+          <a:xfrm>
+            <a:off x="9726930" y="2667000"/>
+            <a:ext cx="1607820" cy="57150"/>
+          </a:xfrm>
+          <a:prstGeom prst="rect">
+            <a:avLst/>
+          </a:prstGeom>
+          <a:solidFill>
+            <a:srgbClr val="34D399"/>
+          </a:solidFill>
+          <a:ln>
+            <a:noFill/>
+          </a:ln>
+          <a:effectLst/>
+        </p:spPr>
+        <p:style>
+          <a:lnRef idx="1">
+            <a:schemeClr val="accent1"/>
+          </a:lnRef>
+          <a:fillRef idx="3">
+            <a:schemeClr val="accent1"/>
+          </a:fillRef>
+          <a:effectRef idx="2">
+            <a:schemeClr val="accent1"/>
+          </a:effectRef>
+          <a:fontRef idx="minor">
+            <a:schemeClr val="lt1"/>
+          </a:fontRef>
+        </p:style>
+        <p:txBody>
+          <a:bodyPr rtlCol="0" anchor="ctr"/>
+          <a:lstStyle/>
+          <a:p>
+            <a:pPr algn="ctr"/>
+          </a:p>
+        </p:txBody>
+      </p:sp>
+      <p:sp>
+        <p:nvSpPr>
+          <p:cNvPr id="33" name="Rounded Rectangle 32"/>
+          <p:cNvSpPr/>
+          <p:nvPr/>
+        </p:nvSpPr>
+        <p:spPr>
+          <a:xfrm>
+            <a:off x="10387965" y="2524125"/>
+            <a:ext cx="285750" cy="285750"/>
+          </a:xfrm>
+          <a:prstGeom prst="roundRect">
+            <a:avLst>
+              <a:gd name="adj" fmla="val 8000"/>
+            </a:avLst>
+          </a:prstGeom>
+          <a:solidFill>
+            <a:srgbClr val="34D399"/>
+          </a:solidFill>
+          <a:ln>
+            <a:noFill/>
+          </a:ln>
+          <a:effectLst/>
+        </p:spPr>
+        <p:style>
+          <a:lnRef idx="1">
+            <a:schemeClr val="accent1"/>
+          </a:lnRef>
+          <a:fillRef idx="3">
+            <a:schemeClr val="accent1"/>
+          </a:fillRef>
+          <a:effectRef idx="2">
+            <a:schemeClr val="accent1"/>
+          </a:effectRef>
+          <a:fontRef idx="minor">
+            <a:schemeClr val="lt1"/>
+          </a:fontRef>
+        </p:style>
+        <p:txBody>
+          <a:bodyPr rtlCol="0" anchor="ctr"/>
+          <a:lstStyle/>
+          <a:p>
+            <a:pPr algn="ctr"/>
+          </a:p>
+        </p:txBody>
+      </p:sp>
+      <p:sp>
+        <p:nvSpPr>
+          <p:cNvPr id="34" name="TextBox 33"/>
+          <p:cNvSpPr txBox="1"/>
+          <p:nvPr/>
+        </p:nvSpPr>
+        <p:spPr>
+          <a:xfrm>
+            <a:off x="10387965" y="2514600"/>
+            <a:ext cx="285750" cy="285750"/>
+          </a:xfrm>
+          <a:prstGeom prst="rect">
+            <a:avLst/>
+          </a:prstGeom>
+          <a:noFill/>
+        </p:spPr>
+        <p:txBody>
+          <a:bodyPr wrap="square" anchor="ctr">
+            <a:spAutoFit/>
+          </a:bodyPr>
+          <a:lstStyle/>
+          <a:p>
+            <a:pPr algn="ctr">
+              <a:lnSpc>
+                <a:spcPct val="100000"/>
+              </a:lnSpc>
+            </a:pPr>
+            <a:r>
+              <a:rPr sz="1300" b="1">
+                <a:solidFill>
+                  <a:srgbClr val="FFFFFF"/>
+                </a:solidFill>
+                <a:latin typeface="PingFang SC"/>
+              </a:rPr>
+              <a:t>5</a:t>
+            </a:r>
+          </a:p>
+        </p:txBody>
+      </p:sp>
+      <p:sp>
+        <p:nvSpPr>
+          <p:cNvPr id="35" name="TextBox 34"/>
+          <p:cNvSpPr txBox="1"/>
+          <p:nvPr/>
+        </p:nvSpPr>
+        <p:spPr>
+          <a:xfrm>
+            <a:off x="9803130" y="2800350"/>
+            <a:ext cx="1455420" cy="952500"/>
+          </a:xfrm>
+          <a:prstGeom prst="rect">
+            <a:avLst/>
+          </a:prstGeom>
+          <a:noFill/>
+        </p:spPr>
+        <p:txBody>
+          <a:bodyPr wrap="square" anchor="ctr">
+            <a:spAutoFit/>
+          </a:bodyPr>
+          <a:lstStyle/>
+          <a:p>
+            <a:pPr algn="ctr">
+              <a:lnSpc>
+                <a:spcPct val="100000"/>
+              </a:lnSpc>
+            </a:pPr>
+            <a:r>
+              <a:rPr sz="1200" b="1">
+                <a:solidFill>
+                  <a:srgbClr val="475569"/>
+                </a:solidFill>
+                <a:latin typeface="PingFang SC"/>
+              </a:rPr>
+              <a:t>双通道检索</a:t>
+            </a:r>
+          </a:p>
+        </p:txBody>
+      </p:sp>
+      <p:cxnSp>
+        <p:nvCxnSpPr>
+          <p:cNvPr id="36" name="Connector 35"/>
+          <p:cNvCxnSpPr/>
+          <p:nvPr/>
+        </p:nvCxnSpPr>
+        <p:spPr>
+          <a:xfrm>
+            <a:off x="9174480" y="3238500"/>
+            <a:ext cx="476250" cy="0"/>
+          </a:xfrm>
+          <a:prstGeom prst="line">
+            <a:avLst/>
+          </a:prstGeom>
+          <a:ln w="20320">
+            <a:solidFill>
+              <a:srgbClr val="475569"/>
+            </a:solidFill>
+          </a:ln>
+        </p:spPr>
+        <p:style>
+          <a:lnRef idx="2">
+            <a:schemeClr val="accent1"/>
+          </a:lnRef>
+          <a:fillRef idx="0">
+            <a:schemeClr val="accent1"/>
+          </a:fillRef>
+          <a:effectRef idx="1">
+            <a:schemeClr val="accent1"/>
+          </a:effectRef>
+          <a:fontRef idx="minor">
+            <a:schemeClr val="tx1"/>
+          </a:fontRef>
+        </p:style>
+      </p:cxnSp>
+      <p:sp>
+        <p:nvSpPr>
+          <p:cNvPr id="37" name="Isosceles Triangle 36"/>
+          <p:cNvSpPr/>
+          <p:nvPr/>
+        </p:nvSpPr>
+        <p:spPr>
+          <a:xfrm rot="5400000">
+            <a:off x="9565006" y="3195638"/>
+            <a:ext cx="85725" cy="85725"/>
+          </a:xfrm>
+          <a:prstGeom prst="triangle">
+            <a:avLst/>
+          </a:prstGeom>
+          <a:solidFill>
+            <a:srgbClr val="475569"/>
+          </a:solidFill>
+          <a:ln>
+            <a:noFill/>
+          </a:ln>
+          <a:effectLst/>
+        </p:spPr>
+        <p:style>
+          <a:lnRef idx="1">
+            <a:schemeClr val="accent1"/>
+          </a:lnRef>
+          <a:fillRef idx="3">
+            <a:schemeClr val="accent1"/>
+          </a:fillRef>
+          <a:effectRef idx="2">
+            <a:schemeClr val="accent1"/>
+          </a:effectRef>
+          <a:fontRef idx="minor">
+            <a:schemeClr val="lt1"/>
+          </a:fontRef>
+        </p:style>
+        <p:txBody>
+          <a:bodyPr rtlCol="0" anchor="ctr"/>
+          <a:lstStyle/>
+          <a:p>
+            <a:pPr algn="ctr"/>
+          </a:p>
+        </p:txBody>
+      </p:sp>
+      <p:sp>
+        <p:nvSpPr>
+          <p:cNvPr id="38" name="Rounded Rectangle 37"/>
+          <p:cNvSpPr/>
+          <p:nvPr/>
+        </p:nvSpPr>
+        <p:spPr>
+          <a:xfrm>
+            <a:off x="857250" y="5715000"/>
+            <a:ext cx="10477500" cy="419100"/>
+          </a:xfrm>
+          <a:prstGeom prst="roundRect">
+            <a:avLst>
+              <a:gd name="adj" fmla="val 8000"/>
+            </a:avLst>
+          </a:prstGeom>
+          <a:solidFill>
+            <a:srgbClr val="F1F5F9"/>
+          </a:solidFill>
+          <a:ln>
+            <a:noFill/>
+          </a:ln>
+          <a:effectLst/>
+        </p:spPr>
+        <p:style>
+          <a:lnRef idx="1">
+            <a:schemeClr val="accent1"/>
+          </a:lnRef>
+          <a:fillRef idx="3">
+            <a:schemeClr val="accent1"/>
+          </a:fillRef>
+          <a:effectRef idx="2">
+            <a:schemeClr val="accent1"/>
+          </a:effectRef>
+          <a:fontRef idx="minor">
+            <a:schemeClr val="lt1"/>
+          </a:fontRef>
+        </p:style>
+        <p:txBody>
+          <a:bodyPr rtlCol="0" anchor="ctr"/>
+          <a:lstStyle/>
+          <a:p>
+            <a:pPr algn="ctr"/>
+          </a:p>
+        </p:txBody>
+      </p:sp>
+      <p:sp>
+        <p:nvSpPr>
+          <p:cNvPr id="39" name="TextBox 38"/>
+          <p:cNvSpPr txBox="1"/>
+          <p:nvPr/>
+        </p:nvSpPr>
+        <p:spPr>
+          <a:xfrm>
+            <a:off x="1009650" y="5715000"/>
+            <a:ext cx="10172700" cy="419100"/>
+          </a:xfrm>
+          <a:prstGeom prst="rect">
+            <a:avLst/>
+          </a:prstGeom>
+          <a:noFill/>
+        </p:spPr>
+        <p:txBody>
+          <a:bodyPr wrap="square" anchor="ctr">
+            <a:spAutoFit/>
+          </a:bodyPr>
+          <a:lstStyle/>
+          <a:p>
+            <a:pPr algn="l">
+              <a:lnSpc>
+                <a:spcPct val="100000"/>
+              </a:lnSpc>
+            </a:pPr>
+            <a:r>
+              <a:rPr sz="1200" b="0">
+                <a:solidFill>
+                  <a:srgbClr val="2563EB"/>
+                </a:solidFill>
+                <a:latin typeface="PingFang SC"/>
+              </a:rPr>
+              <a:t>▶ 改写质量直接决定召回上限</a:t>
+            </a:r>
+          </a:p>
+        </p:txBody>
+      </p:sp>
+      <p:sp>
+        <p:nvSpPr>
+          <p:cNvPr id="40" name="TextBox 39"/>
+          <p:cNvSpPr txBox="1"/>
+          <p:nvPr/>
+        </p:nvSpPr>
+        <p:spPr>
+          <a:xfrm>
+            <a:off x="10287000" y="6534150"/>
+            <a:ext cx="1619250" cy="266700"/>
           </a:xfrm>
           <a:prstGeom prst="rect">
             <a:avLst/>
@@ -12540,1526 +14021,6 @@
               </a:lnSpc>
             </a:pPr>
             <a:r>
-              <a:rPr sz="1100" b="0">
-                <a:solidFill>
-                  <a:srgbClr val="94A3B8"/>
-                </a:solidFill>
-                <a:latin typeface="PingFang SC"/>
-              </a:rPr>
-              <a:t>RAG 入口第一环</a:t>
-            </a:r>
-          </a:p>
-        </p:txBody>
-      </p:sp>
-      <p:sp>
-        <p:nvSpPr>
-          <p:cNvPr id="6" name="Rounded Rectangle 5"/>
-          <p:cNvSpPr/>
-          <p:nvPr/>
-        </p:nvSpPr>
-        <p:spPr>
-          <a:xfrm>
-            <a:off x="857250" y="2667000"/>
-            <a:ext cx="1607820" cy="1143000"/>
-          </a:xfrm>
-          <a:prstGeom prst="roundRect">
-            <a:avLst>
-              <a:gd name="adj" fmla="val 8000"/>
-            </a:avLst>
-          </a:prstGeom>
-          <a:solidFill>
-            <a:srgbClr val="FFFFFF"/>
-          </a:solidFill>
-          <a:ln w="12700">
-            <a:solidFill>
-              <a:srgbClr val="2563EB"/>
-            </a:solidFill>
-          </a:ln>
-          <a:effectLst/>
-        </p:spPr>
-        <p:style>
-          <a:lnRef idx="1">
-            <a:schemeClr val="accent1"/>
-          </a:lnRef>
-          <a:fillRef idx="3">
-            <a:schemeClr val="accent1"/>
-          </a:fillRef>
-          <a:effectRef idx="2">
-            <a:schemeClr val="accent1"/>
-          </a:effectRef>
-          <a:fontRef idx="minor">
-            <a:schemeClr val="lt1"/>
-          </a:fontRef>
-        </p:style>
-        <p:txBody>
-          <a:bodyPr rtlCol="0" anchor="ctr"/>
-          <a:lstStyle/>
-          <a:p>
-            <a:pPr algn="ctr"/>
-          </a:p>
-        </p:txBody>
-      </p:sp>
-      <p:sp>
-        <p:nvSpPr>
-          <p:cNvPr id="7" name="Rectangle 6"/>
-          <p:cNvSpPr/>
-          <p:nvPr/>
-        </p:nvSpPr>
-        <p:spPr>
-          <a:xfrm>
-            <a:off x="857250" y="2667000"/>
-            <a:ext cx="1607820" cy="57150"/>
-          </a:xfrm>
-          <a:prstGeom prst="rect">
-            <a:avLst/>
-          </a:prstGeom>
-          <a:solidFill>
-            <a:srgbClr val="2563EB"/>
-          </a:solidFill>
-          <a:ln>
-            <a:noFill/>
-          </a:ln>
-          <a:effectLst/>
-        </p:spPr>
-        <p:style>
-          <a:lnRef idx="1">
-            <a:schemeClr val="accent1"/>
-          </a:lnRef>
-          <a:fillRef idx="3">
-            <a:schemeClr val="accent1"/>
-          </a:fillRef>
-          <a:effectRef idx="2">
-            <a:schemeClr val="accent1"/>
-          </a:effectRef>
-          <a:fontRef idx="minor">
-            <a:schemeClr val="lt1"/>
-          </a:fontRef>
-        </p:style>
-        <p:txBody>
-          <a:bodyPr rtlCol="0" anchor="ctr"/>
-          <a:lstStyle/>
-          <a:p>
-            <a:pPr algn="ctr"/>
-          </a:p>
-        </p:txBody>
-      </p:sp>
-      <p:sp>
-        <p:nvSpPr>
-          <p:cNvPr id="8" name="Rounded Rectangle 7"/>
-          <p:cNvSpPr/>
-          <p:nvPr/>
-        </p:nvSpPr>
-        <p:spPr>
-          <a:xfrm>
-            <a:off x="1518285" y="2524125"/>
-            <a:ext cx="285750" cy="285750"/>
-          </a:xfrm>
-          <a:prstGeom prst="roundRect">
-            <a:avLst>
-              <a:gd name="adj" fmla="val 8000"/>
-            </a:avLst>
-          </a:prstGeom>
-          <a:solidFill>
-            <a:srgbClr val="2563EB"/>
-          </a:solidFill>
-          <a:ln>
-            <a:noFill/>
-          </a:ln>
-          <a:effectLst/>
-        </p:spPr>
-        <p:style>
-          <a:lnRef idx="1">
-            <a:schemeClr val="accent1"/>
-          </a:lnRef>
-          <a:fillRef idx="3">
-            <a:schemeClr val="accent1"/>
-          </a:fillRef>
-          <a:effectRef idx="2">
-            <a:schemeClr val="accent1"/>
-          </a:effectRef>
-          <a:fontRef idx="minor">
-            <a:schemeClr val="lt1"/>
-          </a:fontRef>
-        </p:style>
-        <p:txBody>
-          <a:bodyPr rtlCol="0" anchor="ctr"/>
-          <a:lstStyle/>
-          <a:p>
-            <a:pPr algn="ctr"/>
-          </a:p>
-        </p:txBody>
-      </p:sp>
-      <p:sp>
-        <p:nvSpPr>
-          <p:cNvPr id="9" name="TextBox 8"/>
-          <p:cNvSpPr txBox="1"/>
-          <p:nvPr/>
-        </p:nvSpPr>
-        <p:spPr>
-          <a:xfrm>
-            <a:off x="1518285" y="2514600"/>
-            <a:ext cx="285750" cy="285750"/>
-          </a:xfrm>
-          <a:prstGeom prst="rect">
-            <a:avLst/>
-          </a:prstGeom>
-          <a:noFill/>
-        </p:spPr>
-        <p:txBody>
-          <a:bodyPr wrap="square" anchor="ctr">
-            <a:spAutoFit/>
-          </a:bodyPr>
-          <a:lstStyle/>
-          <a:p>
-            <a:pPr algn="ctr">
-              <a:lnSpc>
-                <a:spcPct val="100000"/>
-              </a:lnSpc>
-            </a:pPr>
-            <a:r>
-              <a:rPr sz="1300" b="1">
-                <a:solidFill>
-                  <a:srgbClr val="FFFFFF"/>
-                </a:solidFill>
-                <a:latin typeface="PingFang SC"/>
-              </a:rPr>
-              <a:t>1</a:t>
-            </a:r>
-          </a:p>
-        </p:txBody>
-      </p:sp>
-      <p:sp>
-        <p:nvSpPr>
-          <p:cNvPr id="10" name="TextBox 9"/>
-          <p:cNvSpPr txBox="1"/>
-          <p:nvPr/>
-        </p:nvSpPr>
-        <p:spPr>
-          <a:xfrm>
-            <a:off x="933450" y="2800350"/>
-            <a:ext cx="1455420" cy="952500"/>
-          </a:xfrm>
-          <a:prstGeom prst="rect">
-            <a:avLst/>
-          </a:prstGeom>
-          <a:noFill/>
-        </p:spPr>
-        <p:txBody>
-          <a:bodyPr wrap="square" anchor="ctr">
-            <a:spAutoFit/>
-          </a:bodyPr>
-          <a:lstStyle/>
-          <a:p>
-            <a:pPr algn="ctr">
-              <a:lnSpc>
-                <a:spcPct val="100000"/>
-              </a:lnSpc>
-            </a:pPr>
-            <a:r>
-              <a:rPr sz="1200" b="1">
-                <a:solidFill>
-                  <a:srgbClr val="475569"/>
-                </a:solidFill>
-                <a:latin typeface="PingFang SC"/>
-              </a:rPr>
-              <a:t>口语问题</a:t>
-            </a:r>
-          </a:p>
-        </p:txBody>
-      </p:sp>
-      <p:sp>
-        <p:nvSpPr>
-          <p:cNvPr id="11" name="Rounded Rectangle 10"/>
-          <p:cNvSpPr/>
-          <p:nvPr/>
-        </p:nvSpPr>
-        <p:spPr>
-          <a:xfrm>
-            <a:off x="3074670" y="2667000"/>
-            <a:ext cx="1607820" cy="1143000"/>
-          </a:xfrm>
-          <a:prstGeom prst="roundRect">
-            <a:avLst>
-              <a:gd name="adj" fmla="val 8000"/>
-            </a:avLst>
-          </a:prstGeom>
-          <a:solidFill>
-            <a:srgbClr val="FFFFFF"/>
-          </a:solidFill>
-          <a:ln w="12700">
-            <a:solidFill>
-              <a:srgbClr val="14B8A6"/>
-            </a:solidFill>
-          </a:ln>
-          <a:effectLst/>
-        </p:spPr>
-        <p:style>
-          <a:lnRef idx="1">
-            <a:schemeClr val="accent1"/>
-          </a:lnRef>
-          <a:fillRef idx="3">
-            <a:schemeClr val="accent1"/>
-          </a:fillRef>
-          <a:effectRef idx="2">
-            <a:schemeClr val="accent1"/>
-          </a:effectRef>
-          <a:fontRef idx="minor">
-            <a:schemeClr val="lt1"/>
-          </a:fontRef>
-        </p:style>
-        <p:txBody>
-          <a:bodyPr rtlCol="0" anchor="ctr"/>
-          <a:lstStyle/>
-          <a:p>
-            <a:pPr algn="ctr"/>
-          </a:p>
-        </p:txBody>
-      </p:sp>
-      <p:sp>
-        <p:nvSpPr>
-          <p:cNvPr id="12" name="Rectangle 11"/>
-          <p:cNvSpPr/>
-          <p:nvPr/>
-        </p:nvSpPr>
-        <p:spPr>
-          <a:xfrm>
-            <a:off x="3074670" y="2667000"/>
-            <a:ext cx="1607820" cy="57150"/>
-          </a:xfrm>
-          <a:prstGeom prst="rect">
-            <a:avLst/>
-          </a:prstGeom>
-          <a:solidFill>
-            <a:srgbClr val="14B8A6"/>
-          </a:solidFill>
-          <a:ln>
-            <a:noFill/>
-          </a:ln>
-          <a:effectLst/>
-        </p:spPr>
-        <p:style>
-          <a:lnRef idx="1">
-            <a:schemeClr val="accent1"/>
-          </a:lnRef>
-          <a:fillRef idx="3">
-            <a:schemeClr val="accent1"/>
-          </a:fillRef>
-          <a:effectRef idx="2">
-            <a:schemeClr val="accent1"/>
-          </a:effectRef>
-          <a:fontRef idx="minor">
-            <a:schemeClr val="lt1"/>
-          </a:fontRef>
-        </p:style>
-        <p:txBody>
-          <a:bodyPr rtlCol="0" anchor="ctr"/>
-          <a:lstStyle/>
-          <a:p>
-            <a:pPr algn="ctr"/>
-          </a:p>
-        </p:txBody>
-      </p:sp>
-      <p:sp>
-        <p:nvSpPr>
-          <p:cNvPr id="13" name="Rounded Rectangle 12"/>
-          <p:cNvSpPr/>
-          <p:nvPr/>
-        </p:nvSpPr>
-        <p:spPr>
-          <a:xfrm>
-            <a:off x="3735705" y="2524125"/>
-            <a:ext cx="285750" cy="285750"/>
-          </a:xfrm>
-          <a:prstGeom prst="roundRect">
-            <a:avLst>
-              <a:gd name="adj" fmla="val 8000"/>
-            </a:avLst>
-          </a:prstGeom>
-          <a:solidFill>
-            <a:srgbClr val="14B8A6"/>
-          </a:solidFill>
-          <a:ln>
-            <a:noFill/>
-          </a:ln>
-          <a:effectLst/>
-        </p:spPr>
-        <p:style>
-          <a:lnRef idx="1">
-            <a:schemeClr val="accent1"/>
-          </a:lnRef>
-          <a:fillRef idx="3">
-            <a:schemeClr val="accent1"/>
-          </a:fillRef>
-          <a:effectRef idx="2">
-            <a:schemeClr val="accent1"/>
-          </a:effectRef>
-          <a:fontRef idx="minor">
-            <a:schemeClr val="lt1"/>
-          </a:fontRef>
-        </p:style>
-        <p:txBody>
-          <a:bodyPr rtlCol="0" anchor="ctr"/>
-          <a:lstStyle/>
-          <a:p>
-            <a:pPr algn="ctr"/>
-          </a:p>
-        </p:txBody>
-      </p:sp>
-      <p:sp>
-        <p:nvSpPr>
-          <p:cNvPr id="14" name="TextBox 13"/>
-          <p:cNvSpPr txBox="1"/>
-          <p:nvPr/>
-        </p:nvSpPr>
-        <p:spPr>
-          <a:xfrm>
-            <a:off x="3735705" y="2514600"/>
-            <a:ext cx="285750" cy="285750"/>
-          </a:xfrm>
-          <a:prstGeom prst="rect">
-            <a:avLst/>
-          </a:prstGeom>
-          <a:noFill/>
-        </p:spPr>
-        <p:txBody>
-          <a:bodyPr wrap="square" anchor="ctr">
-            <a:spAutoFit/>
-          </a:bodyPr>
-          <a:lstStyle/>
-          <a:p>
-            <a:pPr algn="ctr">
-              <a:lnSpc>
-                <a:spcPct val="100000"/>
-              </a:lnSpc>
-            </a:pPr>
-            <a:r>
-              <a:rPr sz="1300" b="1">
-                <a:solidFill>
-                  <a:srgbClr val="FFFFFF"/>
-                </a:solidFill>
-                <a:latin typeface="PingFang SC"/>
-              </a:rPr>
-              <a:t>2</a:t>
-            </a:r>
-          </a:p>
-        </p:txBody>
-      </p:sp>
-      <p:sp>
-        <p:nvSpPr>
-          <p:cNvPr id="15" name="TextBox 14"/>
-          <p:cNvSpPr txBox="1"/>
-          <p:nvPr/>
-        </p:nvSpPr>
-        <p:spPr>
-          <a:xfrm>
-            <a:off x="3150870" y="2800350"/>
-            <a:ext cx="1455420" cy="952500"/>
-          </a:xfrm>
-          <a:prstGeom prst="rect">
-            <a:avLst/>
-          </a:prstGeom>
-          <a:noFill/>
-        </p:spPr>
-        <p:txBody>
-          <a:bodyPr wrap="square" anchor="ctr">
-            <a:spAutoFit/>
-          </a:bodyPr>
-          <a:lstStyle/>
-          <a:p>
-            <a:pPr algn="ctr">
-              <a:lnSpc>
-                <a:spcPct val="100000"/>
-              </a:lnSpc>
-            </a:pPr>
-            <a:r>
-              <a:rPr sz="1200" b="1">
-                <a:solidFill>
-                  <a:srgbClr val="475569"/>
-                </a:solidFill>
-                <a:latin typeface="PingFang SC"/>
-              </a:rPr>
-              <a:t>补全省略成分</a:t>
-            </a:r>
-          </a:p>
-        </p:txBody>
-      </p:sp>
-      <p:cxnSp>
-        <p:nvCxnSpPr>
-          <p:cNvPr id="16" name="Connector 15"/>
-          <p:cNvCxnSpPr/>
-          <p:nvPr/>
-        </p:nvCxnSpPr>
-        <p:spPr>
-          <a:xfrm>
-            <a:off x="2522220" y="3238500"/>
-            <a:ext cx="476250" cy="0"/>
-          </a:xfrm>
-          <a:prstGeom prst="line">
-            <a:avLst/>
-          </a:prstGeom>
-          <a:ln w="20320">
-            <a:solidFill>
-              <a:srgbClr val="475569"/>
-            </a:solidFill>
-          </a:ln>
-        </p:spPr>
-        <p:style>
-          <a:lnRef idx="2">
-            <a:schemeClr val="accent1"/>
-          </a:lnRef>
-          <a:fillRef idx="0">
-            <a:schemeClr val="accent1"/>
-          </a:fillRef>
-          <a:effectRef idx="1">
-            <a:schemeClr val="accent1"/>
-          </a:effectRef>
-          <a:fontRef idx="minor">
-            <a:schemeClr val="tx1"/>
-          </a:fontRef>
-        </p:style>
-      </p:cxnSp>
-      <p:sp>
-        <p:nvSpPr>
-          <p:cNvPr id="17" name="Isosceles Triangle 16"/>
-          <p:cNvSpPr/>
-          <p:nvPr/>
-        </p:nvSpPr>
-        <p:spPr>
-          <a:xfrm rot="5400000">
-            <a:off x="2912746" y="3195638"/>
-            <a:ext cx="85725" cy="85725"/>
-          </a:xfrm>
-          <a:prstGeom prst="triangle">
-            <a:avLst/>
-          </a:prstGeom>
-          <a:solidFill>
-            <a:srgbClr val="475569"/>
-          </a:solidFill>
-          <a:ln>
-            <a:noFill/>
-          </a:ln>
-          <a:effectLst/>
-        </p:spPr>
-        <p:style>
-          <a:lnRef idx="1">
-            <a:schemeClr val="accent1"/>
-          </a:lnRef>
-          <a:fillRef idx="3">
-            <a:schemeClr val="accent1"/>
-          </a:fillRef>
-          <a:effectRef idx="2">
-            <a:schemeClr val="accent1"/>
-          </a:effectRef>
-          <a:fontRef idx="minor">
-            <a:schemeClr val="lt1"/>
-          </a:fontRef>
-        </p:style>
-        <p:txBody>
-          <a:bodyPr rtlCol="0" anchor="ctr"/>
-          <a:lstStyle/>
-          <a:p>
-            <a:pPr algn="ctr"/>
-          </a:p>
-        </p:txBody>
-      </p:sp>
-      <p:sp>
-        <p:nvSpPr>
-          <p:cNvPr id="18" name="Rounded Rectangle 17"/>
-          <p:cNvSpPr/>
-          <p:nvPr/>
-        </p:nvSpPr>
-        <p:spPr>
-          <a:xfrm>
-            <a:off x="5292090" y="2667000"/>
-            <a:ext cx="1607820" cy="1143000"/>
-          </a:xfrm>
-          <a:prstGeom prst="roundRect">
-            <a:avLst>
-              <a:gd name="adj" fmla="val 8000"/>
-            </a:avLst>
-          </a:prstGeom>
-          <a:solidFill>
-            <a:srgbClr val="FFFFFF"/>
-          </a:solidFill>
-          <a:ln w="12700">
-            <a:solidFill>
-              <a:srgbClr val="8B5CF6"/>
-            </a:solidFill>
-          </a:ln>
-          <a:effectLst/>
-        </p:spPr>
-        <p:style>
-          <a:lnRef idx="1">
-            <a:schemeClr val="accent1"/>
-          </a:lnRef>
-          <a:fillRef idx="3">
-            <a:schemeClr val="accent1"/>
-          </a:fillRef>
-          <a:effectRef idx="2">
-            <a:schemeClr val="accent1"/>
-          </a:effectRef>
-          <a:fontRef idx="minor">
-            <a:schemeClr val="lt1"/>
-          </a:fontRef>
-        </p:style>
-        <p:txBody>
-          <a:bodyPr rtlCol="0" anchor="ctr"/>
-          <a:lstStyle/>
-          <a:p>
-            <a:pPr algn="ctr"/>
-          </a:p>
-        </p:txBody>
-      </p:sp>
-      <p:sp>
-        <p:nvSpPr>
-          <p:cNvPr id="19" name="Rectangle 18"/>
-          <p:cNvSpPr/>
-          <p:nvPr/>
-        </p:nvSpPr>
-        <p:spPr>
-          <a:xfrm>
-            <a:off x="5292090" y="2667000"/>
-            <a:ext cx="1607820" cy="57150"/>
-          </a:xfrm>
-          <a:prstGeom prst="rect">
-            <a:avLst/>
-          </a:prstGeom>
-          <a:solidFill>
-            <a:srgbClr val="8B5CF6"/>
-          </a:solidFill>
-          <a:ln>
-            <a:noFill/>
-          </a:ln>
-          <a:effectLst/>
-        </p:spPr>
-        <p:style>
-          <a:lnRef idx="1">
-            <a:schemeClr val="accent1"/>
-          </a:lnRef>
-          <a:fillRef idx="3">
-            <a:schemeClr val="accent1"/>
-          </a:fillRef>
-          <a:effectRef idx="2">
-            <a:schemeClr val="accent1"/>
-          </a:effectRef>
-          <a:fontRef idx="minor">
-            <a:schemeClr val="lt1"/>
-          </a:fontRef>
-        </p:style>
-        <p:txBody>
-          <a:bodyPr rtlCol="0" anchor="ctr"/>
-          <a:lstStyle/>
-          <a:p>
-            <a:pPr algn="ctr"/>
-          </a:p>
-        </p:txBody>
-      </p:sp>
-      <p:sp>
-        <p:nvSpPr>
-          <p:cNvPr id="20" name="Rounded Rectangle 19"/>
-          <p:cNvSpPr/>
-          <p:nvPr/>
-        </p:nvSpPr>
-        <p:spPr>
-          <a:xfrm>
-            <a:off x="5953125" y="2524125"/>
-            <a:ext cx="285750" cy="285750"/>
-          </a:xfrm>
-          <a:prstGeom prst="roundRect">
-            <a:avLst>
-              <a:gd name="adj" fmla="val 8000"/>
-            </a:avLst>
-          </a:prstGeom>
-          <a:solidFill>
-            <a:srgbClr val="8B5CF6"/>
-          </a:solidFill>
-          <a:ln>
-            <a:noFill/>
-          </a:ln>
-          <a:effectLst/>
-        </p:spPr>
-        <p:style>
-          <a:lnRef idx="1">
-            <a:schemeClr val="accent1"/>
-          </a:lnRef>
-          <a:fillRef idx="3">
-            <a:schemeClr val="accent1"/>
-          </a:fillRef>
-          <a:effectRef idx="2">
-            <a:schemeClr val="accent1"/>
-          </a:effectRef>
-          <a:fontRef idx="minor">
-            <a:schemeClr val="lt1"/>
-          </a:fontRef>
-        </p:style>
-        <p:txBody>
-          <a:bodyPr rtlCol="0" anchor="ctr"/>
-          <a:lstStyle/>
-          <a:p>
-            <a:pPr algn="ctr"/>
-          </a:p>
-        </p:txBody>
-      </p:sp>
-      <p:sp>
-        <p:nvSpPr>
-          <p:cNvPr id="21" name="TextBox 20"/>
-          <p:cNvSpPr txBox="1"/>
-          <p:nvPr/>
-        </p:nvSpPr>
-        <p:spPr>
-          <a:xfrm>
-            <a:off x="5953125" y="2514600"/>
-            <a:ext cx="285750" cy="285750"/>
-          </a:xfrm>
-          <a:prstGeom prst="rect">
-            <a:avLst/>
-          </a:prstGeom>
-          <a:noFill/>
-        </p:spPr>
-        <p:txBody>
-          <a:bodyPr wrap="square" anchor="ctr">
-            <a:spAutoFit/>
-          </a:bodyPr>
-          <a:lstStyle/>
-          <a:p>
-            <a:pPr algn="ctr">
-              <a:lnSpc>
-                <a:spcPct val="100000"/>
-              </a:lnSpc>
-            </a:pPr>
-            <a:r>
-              <a:rPr sz="1300" b="1">
-                <a:solidFill>
-                  <a:srgbClr val="FFFFFF"/>
-                </a:solidFill>
-                <a:latin typeface="PingFang SC"/>
-              </a:rPr>
-              <a:t>3</a:t>
-            </a:r>
-          </a:p>
-        </p:txBody>
-      </p:sp>
-      <p:sp>
-        <p:nvSpPr>
-          <p:cNvPr id="22" name="TextBox 21"/>
-          <p:cNvSpPr txBox="1"/>
-          <p:nvPr/>
-        </p:nvSpPr>
-        <p:spPr>
-          <a:xfrm>
-            <a:off x="5368290" y="2800350"/>
-            <a:ext cx="1455420" cy="952500"/>
-          </a:xfrm>
-          <a:prstGeom prst="rect">
-            <a:avLst/>
-          </a:prstGeom>
-          <a:noFill/>
-        </p:spPr>
-        <p:txBody>
-          <a:bodyPr wrap="square" anchor="ctr">
-            <a:spAutoFit/>
-          </a:bodyPr>
-          <a:lstStyle/>
-          <a:p>
-            <a:pPr algn="ctr">
-              <a:lnSpc>
-                <a:spcPct val="100000"/>
-              </a:lnSpc>
-            </a:pPr>
-            <a:r>
-              <a:rPr sz="1200" b="1">
-                <a:solidFill>
-                  <a:srgbClr val="475569"/>
-                </a:solidFill>
-                <a:latin typeface="PingFang SC"/>
-              </a:rPr>
-              <a:t>规范检索表达</a:t>
-            </a:r>
-          </a:p>
-        </p:txBody>
-      </p:sp>
-      <p:cxnSp>
-        <p:nvCxnSpPr>
-          <p:cNvPr id="23" name="Connector 22"/>
-          <p:cNvCxnSpPr/>
-          <p:nvPr/>
-        </p:nvCxnSpPr>
-        <p:spPr>
-          <a:xfrm>
-            <a:off x="4739640" y="3238500"/>
-            <a:ext cx="476250" cy="0"/>
-          </a:xfrm>
-          <a:prstGeom prst="line">
-            <a:avLst/>
-          </a:prstGeom>
-          <a:ln w="20320">
-            <a:solidFill>
-              <a:srgbClr val="475569"/>
-            </a:solidFill>
-          </a:ln>
-        </p:spPr>
-        <p:style>
-          <a:lnRef idx="2">
-            <a:schemeClr val="accent1"/>
-          </a:lnRef>
-          <a:fillRef idx="0">
-            <a:schemeClr val="accent1"/>
-          </a:fillRef>
-          <a:effectRef idx="1">
-            <a:schemeClr val="accent1"/>
-          </a:effectRef>
-          <a:fontRef idx="minor">
-            <a:schemeClr val="tx1"/>
-          </a:fontRef>
-        </p:style>
-      </p:cxnSp>
-      <p:sp>
-        <p:nvSpPr>
-          <p:cNvPr id="24" name="Isosceles Triangle 23"/>
-          <p:cNvSpPr/>
-          <p:nvPr/>
-        </p:nvSpPr>
-        <p:spPr>
-          <a:xfrm rot="5400000">
-            <a:off x="5130166" y="3195638"/>
-            <a:ext cx="85725" cy="85725"/>
-          </a:xfrm>
-          <a:prstGeom prst="triangle">
-            <a:avLst/>
-          </a:prstGeom>
-          <a:solidFill>
-            <a:srgbClr val="475569"/>
-          </a:solidFill>
-          <a:ln>
-            <a:noFill/>
-          </a:ln>
-          <a:effectLst/>
-        </p:spPr>
-        <p:style>
-          <a:lnRef idx="1">
-            <a:schemeClr val="accent1"/>
-          </a:lnRef>
-          <a:fillRef idx="3">
-            <a:schemeClr val="accent1"/>
-          </a:fillRef>
-          <a:effectRef idx="2">
-            <a:schemeClr val="accent1"/>
-          </a:effectRef>
-          <a:fontRef idx="minor">
-            <a:schemeClr val="lt1"/>
-          </a:fontRef>
-        </p:style>
-        <p:txBody>
-          <a:bodyPr rtlCol="0" anchor="ctr"/>
-          <a:lstStyle/>
-          <a:p>
-            <a:pPr algn="ctr"/>
-          </a:p>
-        </p:txBody>
-      </p:sp>
-      <p:sp>
-        <p:nvSpPr>
-          <p:cNvPr id="25" name="Rounded Rectangle 24"/>
-          <p:cNvSpPr/>
-          <p:nvPr/>
-        </p:nvSpPr>
-        <p:spPr>
-          <a:xfrm>
-            <a:off x="7509510" y="2667000"/>
-            <a:ext cx="1607820" cy="1143000"/>
-          </a:xfrm>
-          <a:prstGeom prst="roundRect">
-            <a:avLst>
-              <a:gd name="adj" fmla="val 8000"/>
-            </a:avLst>
-          </a:prstGeom>
-          <a:solidFill>
-            <a:srgbClr val="FFFFFF"/>
-          </a:solidFill>
-          <a:ln w="12700">
-            <a:solidFill>
-              <a:srgbClr val="F59E0B"/>
-            </a:solidFill>
-          </a:ln>
-          <a:effectLst/>
-        </p:spPr>
-        <p:style>
-          <a:lnRef idx="1">
-            <a:schemeClr val="accent1"/>
-          </a:lnRef>
-          <a:fillRef idx="3">
-            <a:schemeClr val="accent1"/>
-          </a:fillRef>
-          <a:effectRef idx="2">
-            <a:schemeClr val="accent1"/>
-          </a:effectRef>
-          <a:fontRef idx="minor">
-            <a:schemeClr val="lt1"/>
-          </a:fontRef>
-        </p:style>
-        <p:txBody>
-          <a:bodyPr rtlCol="0" anchor="ctr"/>
-          <a:lstStyle/>
-          <a:p>
-            <a:pPr algn="ctr"/>
-          </a:p>
-        </p:txBody>
-      </p:sp>
-      <p:sp>
-        <p:nvSpPr>
-          <p:cNvPr id="26" name="Rectangle 25"/>
-          <p:cNvSpPr/>
-          <p:nvPr/>
-        </p:nvSpPr>
-        <p:spPr>
-          <a:xfrm>
-            <a:off x="7509510" y="2667000"/>
-            <a:ext cx="1607820" cy="57150"/>
-          </a:xfrm>
-          <a:prstGeom prst="rect">
-            <a:avLst/>
-          </a:prstGeom>
-          <a:solidFill>
-            <a:srgbClr val="F59E0B"/>
-          </a:solidFill>
-          <a:ln>
-            <a:noFill/>
-          </a:ln>
-          <a:effectLst/>
-        </p:spPr>
-        <p:style>
-          <a:lnRef idx="1">
-            <a:schemeClr val="accent1"/>
-          </a:lnRef>
-          <a:fillRef idx="3">
-            <a:schemeClr val="accent1"/>
-          </a:fillRef>
-          <a:effectRef idx="2">
-            <a:schemeClr val="accent1"/>
-          </a:effectRef>
-          <a:fontRef idx="minor">
-            <a:schemeClr val="lt1"/>
-          </a:fontRef>
-        </p:style>
-        <p:txBody>
-          <a:bodyPr rtlCol="0" anchor="ctr"/>
-          <a:lstStyle/>
-          <a:p>
-            <a:pPr algn="ctr"/>
-          </a:p>
-        </p:txBody>
-      </p:sp>
-      <p:sp>
-        <p:nvSpPr>
-          <p:cNvPr id="27" name="Rounded Rectangle 26"/>
-          <p:cNvSpPr/>
-          <p:nvPr/>
-        </p:nvSpPr>
-        <p:spPr>
-          <a:xfrm>
-            <a:off x="8170545" y="2524125"/>
-            <a:ext cx="285750" cy="285750"/>
-          </a:xfrm>
-          <a:prstGeom prst="roundRect">
-            <a:avLst>
-              <a:gd name="adj" fmla="val 8000"/>
-            </a:avLst>
-          </a:prstGeom>
-          <a:solidFill>
-            <a:srgbClr val="F59E0B"/>
-          </a:solidFill>
-          <a:ln>
-            <a:noFill/>
-          </a:ln>
-          <a:effectLst/>
-        </p:spPr>
-        <p:style>
-          <a:lnRef idx="1">
-            <a:schemeClr val="accent1"/>
-          </a:lnRef>
-          <a:fillRef idx="3">
-            <a:schemeClr val="accent1"/>
-          </a:fillRef>
-          <a:effectRef idx="2">
-            <a:schemeClr val="accent1"/>
-          </a:effectRef>
-          <a:fontRef idx="minor">
-            <a:schemeClr val="lt1"/>
-          </a:fontRef>
-        </p:style>
-        <p:txBody>
-          <a:bodyPr rtlCol="0" anchor="ctr"/>
-          <a:lstStyle/>
-          <a:p>
-            <a:pPr algn="ctr"/>
-          </a:p>
-        </p:txBody>
-      </p:sp>
-      <p:sp>
-        <p:nvSpPr>
-          <p:cNvPr id="28" name="TextBox 27"/>
-          <p:cNvSpPr txBox="1"/>
-          <p:nvPr/>
-        </p:nvSpPr>
-        <p:spPr>
-          <a:xfrm>
-            <a:off x="8170545" y="2514600"/>
-            <a:ext cx="285750" cy="285750"/>
-          </a:xfrm>
-          <a:prstGeom prst="rect">
-            <a:avLst/>
-          </a:prstGeom>
-          <a:noFill/>
-        </p:spPr>
-        <p:txBody>
-          <a:bodyPr wrap="square" anchor="ctr">
-            <a:spAutoFit/>
-          </a:bodyPr>
-          <a:lstStyle/>
-          <a:p>
-            <a:pPr algn="ctr">
-              <a:lnSpc>
-                <a:spcPct val="100000"/>
-              </a:lnSpc>
-            </a:pPr>
-            <a:r>
-              <a:rPr sz="1300" b="1">
-                <a:solidFill>
-                  <a:srgbClr val="FFFFFF"/>
-                </a:solidFill>
-                <a:latin typeface="PingFang SC"/>
-              </a:rPr>
-              <a:t>4</a:t>
-            </a:r>
-          </a:p>
-        </p:txBody>
-      </p:sp>
-      <p:sp>
-        <p:nvSpPr>
-          <p:cNvPr id="29" name="TextBox 28"/>
-          <p:cNvSpPr txBox="1"/>
-          <p:nvPr/>
-        </p:nvSpPr>
-        <p:spPr>
-          <a:xfrm>
-            <a:off x="7585710" y="2800350"/>
-            <a:ext cx="1455420" cy="952500"/>
-          </a:xfrm>
-          <a:prstGeom prst="rect">
-            <a:avLst/>
-          </a:prstGeom>
-          <a:noFill/>
-        </p:spPr>
-        <p:txBody>
-          <a:bodyPr wrap="square" anchor="ctr">
-            <a:spAutoFit/>
-          </a:bodyPr>
-          <a:lstStyle/>
-          <a:p>
-            <a:pPr algn="ctr">
-              <a:lnSpc>
-                <a:spcPct val="100000"/>
-              </a:lnSpc>
-            </a:pPr>
-            <a:r>
-              <a:rPr sz="1200" b="1">
-                <a:solidFill>
-                  <a:srgbClr val="475569"/>
-                </a:solidFill>
-                <a:latin typeface="PingFang SC"/>
-              </a:rPr>
-              <a:t>同义扩展</a:t>
-            </a:r>
-          </a:p>
-        </p:txBody>
-      </p:sp>
-      <p:cxnSp>
-        <p:nvCxnSpPr>
-          <p:cNvPr id="30" name="Connector 29"/>
-          <p:cNvCxnSpPr/>
-          <p:nvPr/>
-        </p:nvCxnSpPr>
-        <p:spPr>
-          <a:xfrm>
-            <a:off x="6957060" y="3238500"/>
-            <a:ext cx="476250" cy="0"/>
-          </a:xfrm>
-          <a:prstGeom prst="line">
-            <a:avLst/>
-          </a:prstGeom>
-          <a:ln w="20320">
-            <a:solidFill>
-              <a:srgbClr val="475569"/>
-            </a:solidFill>
-          </a:ln>
-        </p:spPr>
-        <p:style>
-          <a:lnRef idx="2">
-            <a:schemeClr val="accent1"/>
-          </a:lnRef>
-          <a:fillRef idx="0">
-            <a:schemeClr val="accent1"/>
-          </a:fillRef>
-          <a:effectRef idx="1">
-            <a:schemeClr val="accent1"/>
-          </a:effectRef>
-          <a:fontRef idx="minor">
-            <a:schemeClr val="tx1"/>
-          </a:fontRef>
-        </p:style>
-      </p:cxnSp>
-      <p:sp>
-        <p:nvSpPr>
-          <p:cNvPr id="31" name="Isosceles Triangle 30"/>
-          <p:cNvSpPr/>
-          <p:nvPr/>
-        </p:nvSpPr>
-        <p:spPr>
-          <a:xfrm rot="5400000">
-            <a:off x="7347586" y="3195638"/>
-            <a:ext cx="85725" cy="85725"/>
-          </a:xfrm>
-          <a:prstGeom prst="triangle">
-            <a:avLst/>
-          </a:prstGeom>
-          <a:solidFill>
-            <a:srgbClr val="475569"/>
-          </a:solidFill>
-          <a:ln>
-            <a:noFill/>
-          </a:ln>
-          <a:effectLst/>
-        </p:spPr>
-        <p:style>
-          <a:lnRef idx="1">
-            <a:schemeClr val="accent1"/>
-          </a:lnRef>
-          <a:fillRef idx="3">
-            <a:schemeClr val="accent1"/>
-          </a:fillRef>
-          <a:effectRef idx="2">
-            <a:schemeClr val="accent1"/>
-          </a:effectRef>
-          <a:fontRef idx="minor">
-            <a:schemeClr val="lt1"/>
-          </a:fontRef>
-        </p:style>
-        <p:txBody>
-          <a:bodyPr rtlCol="0" anchor="ctr"/>
-          <a:lstStyle/>
-          <a:p>
-            <a:pPr algn="ctr"/>
-          </a:p>
-        </p:txBody>
-      </p:sp>
-      <p:sp>
-        <p:nvSpPr>
-          <p:cNvPr id="32" name="Rounded Rectangle 31"/>
-          <p:cNvSpPr/>
-          <p:nvPr/>
-        </p:nvSpPr>
-        <p:spPr>
-          <a:xfrm>
-            <a:off x="9726930" y="2667000"/>
-            <a:ext cx="1607820" cy="1143000"/>
-          </a:xfrm>
-          <a:prstGeom prst="roundRect">
-            <a:avLst>
-              <a:gd name="adj" fmla="val 8000"/>
-            </a:avLst>
-          </a:prstGeom>
-          <a:solidFill>
-            <a:srgbClr val="FFFFFF"/>
-          </a:solidFill>
-          <a:ln w="12700">
-            <a:solidFill>
-              <a:srgbClr val="34D399"/>
-            </a:solidFill>
-          </a:ln>
-          <a:effectLst/>
-        </p:spPr>
-        <p:style>
-          <a:lnRef idx="1">
-            <a:schemeClr val="accent1"/>
-          </a:lnRef>
-          <a:fillRef idx="3">
-            <a:schemeClr val="accent1"/>
-          </a:fillRef>
-          <a:effectRef idx="2">
-            <a:schemeClr val="accent1"/>
-          </a:effectRef>
-          <a:fontRef idx="minor">
-            <a:schemeClr val="lt1"/>
-          </a:fontRef>
-        </p:style>
-        <p:txBody>
-          <a:bodyPr rtlCol="0" anchor="ctr"/>
-          <a:lstStyle/>
-          <a:p>
-            <a:pPr algn="ctr"/>
-          </a:p>
-        </p:txBody>
-      </p:sp>
-      <p:sp>
-        <p:nvSpPr>
-          <p:cNvPr id="33" name="Rectangle 32"/>
-          <p:cNvSpPr/>
-          <p:nvPr/>
-        </p:nvSpPr>
-        <p:spPr>
-          <a:xfrm>
-            <a:off x="9726930" y="2667000"/>
-            <a:ext cx="1607820" cy="57150"/>
-          </a:xfrm>
-          <a:prstGeom prst="rect">
-            <a:avLst/>
-          </a:prstGeom>
-          <a:solidFill>
-            <a:srgbClr val="34D399"/>
-          </a:solidFill>
-          <a:ln>
-            <a:noFill/>
-          </a:ln>
-          <a:effectLst/>
-        </p:spPr>
-        <p:style>
-          <a:lnRef idx="1">
-            <a:schemeClr val="accent1"/>
-          </a:lnRef>
-          <a:fillRef idx="3">
-            <a:schemeClr val="accent1"/>
-          </a:fillRef>
-          <a:effectRef idx="2">
-            <a:schemeClr val="accent1"/>
-          </a:effectRef>
-          <a:fontRef idx="minor">
-            <a:schemeClr val="lt1"/>
-          </a:fontRef>
-        </p:style>
-        <p:txBody>
-          <a:bodyPr rtlCol="0" anchor="ctr"/>
-          <a:lstStyle/>
-          <a:p>
-            <a:pPr algn="ctr"/>
-          </a:p>
-        </p:txBody>
-      </p:sp>
-      <p:sp>
-        <p:nvSpPr>
-          <p:cNvPr id="34" name="Rounded Rectangle 33"/>
-          <p:cNvSpPr/>
-          <p:nvPr/>
-        </p:nvSpPr>
-        <p:spPr>
-          <a:xfrm>
-            <a:off x="10387965" y="2524125"/>
-            <a:ext cx="285750" cy="285750"/>
-          </a:xfrm>
-          <a:prstGeom prst="roundRect">
-            <a:avLst>
-              <a:gd name="adj" fmla="val 8000"/>
-            </a:avLst>
-          </a:prstGeom>
-          <a:solidFill>
-            <a:srgbClr val="34D399"/>
-          </a:solidFill>
-          <a:ln>
-            <a:noFill/>
-          </a:ln>
-          <a:effectLst/>
-        </p:spPr>
-        <p:style>
-          <a:lnRef idx="1">
-            <a:schemeClr val="accent1"/>
-          </a:lnRef>
-          <a:fillRef idx="3">
-            <a:schemeClr val="accent1"/>
-          </a:fillRef>
-          <a:effectRef idx="2">
-            <a:schemeClr val="accent1"/>
-          </a:effectRef>
-          <a:fontRef idx="minor">
-            <a:schemeClr val="lt1"/>
-          </a:fontRef>
-        </p:style>
-        <p:txBody>
-          <a:bodyPr rtlCol="0" anchor="ctr"/>
-          <a:lstStyle/>
-          <a:p>
-            <a:pPr algn="ctr"/>
-          </a:p>
-        </p:txBody>
-      </p:sp>
-      <p:sp>
-        <p:nvSpPr>
-          <p:cNvPr id="35" name="TextBox 34"/>
-          <p:cNvSpPr txBox="1"/>
-          <p:nvPr/>
-        </p:nvSpPr>
-        <p:spPr>
-          <a:xfrm>
-            <a:off x="10387965" y="2514600"/>
-            <a:ext cx="285750" cy="285750"/>
-          </a:xfrm>
-          <a:prstGeom prst="rect">
-            <a:avLst/>
-          </a:prstGeom>
-          <a:noFill/>
-        </p:spPr>
-        <p:txBody>
-          <a:bodyPr wrap="square" anchor="ctr">
-            <a:spAutoFit/>
-          </a:bodyPr>
-          <a:lstStyle/>
-          <a:p>
-            <a:pPr algn="ctr">
-              <a:lnSpc>
-                <a:spcPct val="100000"/>
-              </a:lnSpc>
-            </a:pPr>
-            <a:r>
-              <a:rPr sz="1300" b="1">
-                <a:solidFill>
-                  <a:srgbClr val="FFFFFF"/>
-                </a:solidFill>
-                <a:latin typeface="PingFang SC"/>
-              </a:rPr>
-              <a:t>5</a:t>
-            </a:r>
-          </a:p>
-        </p:txBody>
-      </p:sp>
-      <p:sp>
-        <p:nvSpPr>
-          <p:cNvPr id="36" name="TextBox 35"/>
-          <p:cNvSpPr txBox="1"/>
-          <p:nvPr/>
-        </p:nvSpPr>
-        <p:spPr>
-          <a:xfrm>
-            <a:off x="9803130" y="2800350"/>
-            <a:ext cx="1455420" cy="952500"/>
-          </a:xfrm>
-          <a:prstGeom prst="rect">
-            <a:avLst/>
-          </a:prstGeom>
-          <a:noFill/>
-        </p:spPr>
-        <p:txBody>
-          <a:bodyPr wrap="square" anchor="ctr">
-            <a:spAutoFit/>
-          </a:bodyPr>
-          <a:lstStyle/>
-          <a:p>
-            <a:pPr algn="ctr">
-              <a:lnSpc>
-                <a:spcPct val="100000"/>
-              </a:lnSpc>
-            </a:pPr>
-            <a:r>
-              <a:rPr sz="1200" b="1">
-                <a:solidFill>
-                  <a:srgbClr val="475569"/>
-                </a:solidFill>
-                <a:latin typeface="PingFang SC"/>
-              </a:rPr>
-              <a:t>双通道检索|RAG 入口第一环</a:t>
-            </a:r>
-          </a:p>
-        </p:txBody>
-      </p:sp>
-      <p:cxnSp>
-        <p:nvCxnSpPr>
-          <p:cNvPr id="37" name="Connector 36"/>
-          <p:cNvCxnSpPr/>
-          <p:nvPr/>
-        </p:nvCxnSpPr>
-        <p:spPr>
-          <a:xfrm>
-            <a:off x="9174480" y="3238500"/>
-            <a:ext cx="476250" cy="0"/>
-          </a:xfrm>
-          <a:prstGeom prst="line">
-            <a:avLst/>
-          </a:prstGeom>
-          <a:ln w="20320">
-            <a:solidFill>
-              <a:srgbClr val="475569"/>
-            </a:solidFill>
-          </a:ln>
-        </p:spPr>
-        <p:style>
-          <a:lnRef idx="2">
-            <a:schemeClr val="accent1"/>
-          </a:lnRef>
-          <a:fillRef idx="0">
-            <a:schemeClr val="accent1"/>
-          </a:fillRef>
-          <a:effectRef idx="1">
-            <a:schemeClr val="accent1"/>
-          </a:effectRef>
-          <a:fontRef idx="minor">
-            <a:schemeClr val="tx1"/>
-          </a:fontRef>
-        </p:style>
-      </p:cxnSp>
-      <p:sp>
-        <p:nvSpPr>
-          <p:cNvPr id="38" name="Isosceles Triangle 37"/>
-          <p:cNvSpPr/>
-          <p:nvPr/>
-        </p:nvSpPr>
-        <p:spPr>
-          <a:xfrm rot="5400000">
-            <a:off x="9565006" y="3195638"/>
-            <a:ext cx="85725" cy="85725"/>
-          </a:xfrm>
-          <a:prstGeom prst="triangle">
-            <a:avLst/>
-          </a:prstGeom>
-          <a:solidFill>
-            <a:srgbClr val="475569"/>
-          </a:solidFill>
-          <a:ln>
-            <a:noFill/>
-          </a:ln>
-          <a:effectLst/>
-        </p:spPr>
-        <p:style>
-          <a:lnRef idx="1">
-            <a:schemeClr val="accent1"/>
-          </a:lnRef>
-          <a:fillRef idx="3">
-            <a:schemeClr val="accent1"/>
-          </a:fillRef>
-          <a:effectRef idx="2">
-            <a:schemeClr val="accent1"/>
-          </a:effectRef>
-          <a:fontRef idx="minor">
-            <a:schemeClr val="lt1"/>
-          </a:fontRef>
-        </p:style>
-        <p:txBody>
-          <a:bodyPr rtlCol="0" anchor="ctr"/>
-          <a:lstStyle/>
-          <a:p>
-            <a:pPr algn="ctr"/>
-          </a:p>
-        </p:txBody>
-      </p:sp>
-      <p:sp>
-        <p:nvSpPr>
-          <p:cNvPr id="39" name="Rounded Rectangle 38"/>
-          <p:cNvSpPr/>
-          <p:nvPr/>
-        </p:nvSpPr>
-        <p:spPr>
-          <a:xfrm>
-            <a:off x="857250" y="5715000"/>
-            <a:ext cx="10477500" cy="419100"/>
-          </a:xfrm>
-          <a:prstGeom prst="roundRect">
-            <a:avLst>
-              <a:gd name="adj" fmla="val 8000"/>
-            </a:avLst>
-          </a:prstGeom>
-          <a:solidFill>
-            <a:srgbClr val="F1F5F9"/>
-          </a:solidFill>
-          <a:ln>
-            <a:noFill/>
-          </a:ln>
-          <a:effectLst/>
-        </p:spPr>
-        <p:style>
-          <a:lnRef idx="1">
-            <a:schemeClr val="accent1"/>
-          </a:lnRef>
-          <a:fillRef idx="3">
-            <a:schemeClr val="accent1"/>
-          </a:fillRef>
-          <a:effectRef idx="2">
-            <a:schemeClr val="accent1"/>
-          </a:effectRef>
-          <a:fontRef idx="minor">
-            <a:schemeClr val="lt1"/>
-          </a:fontRef>
-        </p:style>
-        <p:txBody>
-          <a:bodyPr rtlCol="0" anchor="ctr"/>
-          <a:lstStyle/>
-          <a:p>
-            <a:pPr algn="ctr"/>
-          </a:p>
-        </p:txBody>
-      </p:sp>
-      <p:sp>
-        <p:nvSpPr>
-          <p:cNvPr id="40" name="TextBox 39"/>
-          <p:cNvSpPr txBox="1"/>
-          <p:nvPr/>
-        </p:nvSpPr>
-        <p:spPr>
-          <a:xfrm>
-            <a:off x="1009650" y="5715000"/>
-            <a:ext cx="10172700" cy="419100"/>
-          </a:xfrm>
-          <a:prstGeom prst="rect">
-            <a:avLst/>
-          </a:prstGeom>
-          <a:noFill/>
-        </p:spPr>
-        <p:txBody>
-          <a:bodyPr wrap="square" anchor="ctr">
-            <a:spAutoFit/>
-          </a:bodyPr>
-          <a:lstStyle/>
-          <a:p>
-            <a:pPr algn="l">
-              <a:lnSpc>
-                <a:spcPct val="100000"/>
-              </a:lnSpc>
-            </a:pPr>
-            <a:r>
-              <a:rPr sz="1200" b="0">
-                <a:solidFill>
-                  <a:srgbClr val="2563EB"/>
-                </a:solidFill>
-                <a:latin typeface="PingFang SC"/>
-              </a:rPr>
-              <a:t>▶ 改写质量直接决定召回上限</a:t>
-            </a:r>
-          </a:p>
-        </p:txBody>
-      </p:sp>
-      <p:sp>
-        <p:nvSpPr>
-          <p:cNvPr id="41" name="TextBox 40"/>
-          <p:cNvSpPr txBox="1"/>
-          <p:nvPr/>
-        </p:nvSpPr>
-        <p:spPr>
-          <a:xfrm>
-            <a:off x="10287000" y="6534150"/>
-            <a:ext cx="1619250" cy="266700"/>
-          </a:xfrm>
-          <a:prstGeom prst="rect">
-            <a:avLst/>
-          </a:prstGeom>
-          <a:noFill/>
-        </p:spPr>
-        <p:txBody>
-          <a:bodyPr wrap="square" anchor="ctr">
-            <a:spAutoFit/>
-          </a:bodyPr>
-          <a:lstStyle/>
-          <a:p>
-            <a:pPr algn="r">
-              <a:lnSpc>
-                <a:spcPct val="100000"/>
-              </a:lnSpc>
-            </a:pPr>
-            <a:r>
               <a:rPr sz="900" b="0">
                 <a:solidFill>
                   <a:srgbClr val="94A3B8"/>
@@ -14073,7 +14034,7 @@
       </p:sp>
       <p:sp>
         <p:nvSpPr>
-          <p:cNvPr id="42" name="TextBox 41"/>
+          <p:cNvPr id="41" name="TextBox 40"/>
           <p:cNvSpPr txBox="1"/>
           <p:nvPr/>
         </p:nvSpPr>
@@ -18616,7 +18577,7 @@
                 </a:solidFill>
                 <a:latin typeface="PingFang SC"/>
               </a:rPr>
-              <a:t>6. 检索回答|答非所问=最大浪费</a:t>
+              <a:t>6. 检索回答</a:t>
             </a:r>
           </a:p>
         </p:txBody>
@@ -21029,7 +20990,7 @@
                 </a:solidFill>
                 <a:latin typeface="PingFang SC"/>
               </a:rPr>
-              <a:t>5. 回答+文件行号引用|Citation 是红线:无证据=幻觉</a:t>
+              <a:t>5. 回答+文件行号引用</a:t>
             </a:r>
           </a:p>
         </p:txBody>
@@ -23033,14 +22994,384 @@
       </p:sp>
       <p:sp>
         <p:nvSpPr>
-          <p:cNvPr id="5" name="TextBox 4"/>
+          <p:cNvPr id="5" name="Rounded Rectangle 4"/>
+          <p:cNvSpPr/>
+          <p:nvPr/>
+        </p:nvSpPr>
+        <p:spPr>
+          <a:xfrm>
+            <a:off x="1333500" y="1047750"/>
+            <a:ext cx="9525000" cy="2667000"/>
+          </a:xfrm>
+          <a:prstGeom prst="roundRect">
+            <a:avLst>
+              <a:gd name="adj" fmla="val 8000"/>
+            </a:avLst>
+          </a:prstGeom>
+          <a:solidFill>
+            <a:srgbClr val="0D1117"/>
+          </a:solidFill>
+          <a:ln>
+            <a:noFill/>
+          </a:ln>
+          <a:effectLst/>
+        </p:spPr>
+        <p:style>
+          <a:lnRef idx="1">
+            <a:schemeClr val="accent1"/>
+          </a:lnRef>
+          <a:fillRef idx="3">
+            <a:schemeClr val="accent1"/>
+          </a:fillRef>
+          <a:effectRef idx="2">
+            <a:schemeClr val="accent1"/>
+          </a:effectRef>
+          <a:fontRef idx="minor">
+            <a:schemeClr val="lt1"/>
+          </a:fontRef>
+        </p:style>
+        <p:txBody>
+          <a:bodyPr rtlCol="0" anchor="ctr"/>
+          <a:lstStyle/>
+          <a:p>
+            <a:pPr algn="ctr"/>
+          </a:p>
+        </p:txBody>
+      </p:sp>
+      <p:sp>
+        <p:nvSpPr>
+          <p:cNvPr id="6" name="Rectangle 5"/>
+          <p:cNvSpPr/>
+          <p:nvPr/>
+        </p:nvSpPr>
+        <p:spPr>
+          <a:xfrm>
+            <a:off x="1333500" y="1047750"/>
+            <a:ext cx="9525000" cy="381000"/>
+          </a:xfrm>
+          <a:prstGeom prst="rect">
+            <a:avLst/>
+          </a:prstGeom>
+          <a:solidFill>
+            <a:srgbClr val="1F2937"/>
+          </a:solidFill>
+          <a:ln>
+            <a:noFill/>
+          </a:ln>
+          <a:effectLst/>
+        </p:spPr>
+        <p:style>
+          <a:lnRef idx="1">
+            <a:schemeClr val="accent1"/>
+          </a:lnRef>
+          <a:fillRef idx="3">
+            <a:schemeClr val="accent1"/>
+          </a:fillRef>
+          <a:effectRef idx="2">
+            <a:schemeClr val="accent1"/>
+          </a:effectRef>
+          <a:fontRef idx="minor">
+            <a:schemeClr val="lt1"/>
+          </a:fontRef>
+        </p:style>
+        <p:txBody>
+          <a:bodyPr rtlCol="0" anchor="ctr"/>
+          <a:lstStyle/>
+          <a:p>
+            <a:pPr algn="ctr"/>
+          </a:p>
+        </p:txBody>
+      </p:sp>
+      <p:sp>
+        <p:nvSpPr>
+          <p:cNvPr id="7" name="Rounded Rectangle 6"/>
+          <p:cNvSpPr/>
+          <p:nvPr/>
+        </p:nvSpPr>
+        <p:spPr>
+          <a:xfrm>
+            <a:off x="1504950" y="1181100"/>
+            <a:ext cx="123825" cy="123825"/>
+          </a:xfrm>
+          <a:prstGeom prst="roundRect">
+            <a:avLst>
+              <a:gd name="adj" fmla="val 8000"/>
+            </a:avLst>
+          </a:prstGeom>
+          <a:solidFill>
+            <a:srgbClr val="F87171"/>
+          </a:solidFill>
+          <a:ln>
+            <a:noFill/>
+          </a:ln>
+          <a:effectLst/>
+        </p:spPr>
+        <p:style>
+          <a:lnRef idx="1">
+            <a:schemeClr val="accent1"/>
+          </a:lnRef>
+          <a:fillRef idx="3">
+            <a:schemeClr val="accent1"/>
+          </a:fillRef>
+          <a:effectRef idx="2">
+            <a:schemeClr val="accent1"/>
+          </a:effectRef>
+          <a:fontRef idx="minor">
+            <a:schemeClr val="lt1"/>
+          </a:fontRef>
+        </p:style>
+        <p:txBody>
+          <a:bodyPr rtlCol="0" anchor="ctr"/>
+          <a:lstStyle/>
+          <a:p>
+            <a:pPr algn="ctr"/>
+          </a:p>
+        </p:txBody>
+      </p:sp>
+      <p:sp>
+        <p:nvSpPr>
+          <p:cNvPr id="8" name="Rounded Rectangle 7"/>
+          <p:cNvSpPr/>
+          <p:nvPr/>
+        </p:nvSpPr>
+        <p:spPr>
+          <a:xfrm>
+            <a:off x="1752600" y="1181100"/>
+            <a:ext cx="123825" cy="123825"/>
+          </a:xfrm>
+          <a:prstGeom prst="roundRect">
+            <a:avLst>
+              <a:gd name="adj" fmla="val 8000"/>
+            </a:avLst>
+          </a:prstGeom>
+          <a:solidFill>
+            <a:srgbClr val="F59E0B"/>
+          </a:solidFill>
+          <a:ln>
+            <a:noFill/>
+          </a:ln>
+          <a:effectLst/>
+        </p:spPr>
+        <p:style>
+          <a:lnRef idx="1">
+            <a:schemeClr val="accent1"/>
+          </a:lnRef>
+          <a:fillRef idx="3">
+            <a:schemeClr val="accent1"/>
+          </a:fillRef>
+          <a:effectRef idx="2">
+            <a:schemeClr val="accent1"/>
+          </a:effectRef>
+          <a:fontRef idx="minor">
+            <a:schemeClr val="lt1"/>
+          </a:fontRef>
+        </p:style>
+        <p:txBody>
+          <a:bodyPr rtlCol="0" anchor="ctr"/>
+          <a:lstStyle/>
+          <a:p>
+            <a:pPr algn="ctr"/>
+          </a:p>
+        </p:txBody>
+      </p:sp>
+      <p:sp>
+        <p:nvSpPr>
+          <p:cNvPr id="9" name="Rounded Rectangle 8"/>
+          <p:cNvSpPr/>
+          <p:nvPr/>
+        </p:nvSpPr>
+        <p:spPr>
+          <a:xfrm>
+            <a:off x="2000250" y="1181100"/>
+            <a:ext cx="123825" cy="123825"/>
+          </a:xfrm>
+          <a:prstGeom prst="roundRect">
+            <a:avLst>
+              <a:gd name="adj" fmla="val 8000"/>
+            </a:avLst>
+          </a:prstGeom>
+          <a:solidFill>
+            <a:srgbClr val="34D399"/>
+          </a:solidFill>
+          <a:ln>
+            <a:noFill/>
+          </a:ln>
+          <a:effectLst/>
+        </p:spPr>
+        <p:style>
+          <a:lnRef idx="1">
+            <a:schemeClr val="accent1"/>
+          </a:lnRef>
+          <a:fillRef idx="3">
+            <a:schemeClr val="accent1"/>
+          </a:fillRef>
+          <a:effectRef idx="2">
+            <a:schemeClr val="accent1"/>
+          </a:effectRef>
+          <a:fontRef idx="minor">
+            <a:schemeClr val="lt1"/>
+          </a:fontRef>
+        </p:style>
+        <p:txBody>
+          <a:bodyPr rtlCol="0" anchor="ctr"/>
+          <a:lstStyle/>
+          <a:p>
+            <a:pPr algn="ctr"/>
+          </a:p>
+        </p:txBody>
+      </p:sp>
+      <p:sp>
+        <p:nvSpPr>
+          <p:cNvPr id="10" name="TextBox 9"/>
           <p:cNvSpPr txBox="1"/>
           <p:nvPr/>
         </p:nvSpPr>
         <p:spPr>
           <a:xfrm>
-            <a:off x="9334500" y="0"/>
-            <a:ext cx="2667000" cy="704850"/>
+            <a:off x="2381250" y="1047750"/>
+            <a:ext cx="8286750" cy="381000"/>
+          </a:xfrm>
+          <a:prstGeom prst="rect">
+            <a:avLst/>
+          </a:prstGeom>
+          <a:noFill/>
+        </p:spPr>
+        <p:txBody>
+          <a:bodyPr wrap="square" anchor="ctr">
+            <a:spAutoFit/>
+          </a:bodyPr>
+          <a:lstStyle/>
+          <a:p>
+            <a:pPr algn="l">
+              <a:lnSpc>
+                <a:spcPct val="100000"/>
+              </a:lnSpc>
+            </a:pPr>
+            <a:r>
+              <a:rPr sz="1100" b="0">
+                <a:solidFill>
+                  <a:srgbClr val="94A3B8"/>
+                </a:solidFill>
+                <a:latin typeface="PingFang SC"/>
+              </a:rPr>
+              <a:t>terminal — 平台实测</a:t>
+            </a:r>
+          </a:p>
+        </p:txBody>
+      </p:sp>
+      <p:sp>
+        <p:nvSpPr>
+          <p:cNvPr id="11" name="TextBox 10"/>
+          <p:cNvSpPr txBox="1"/>
+          <p:nvPr/>
+        </p:nvSpPr>
+        <p:spPr>
+          <a:xfrm>
+            <a:off x="1562100" y="1581150"/>
+            <a:ext cx="9067800" cy="2000250"/>
+          </a:xfrm>
+          <a:prstGeom prst="rect">
+            <a:avLst/>
+          </a:prstGeom>
+          <a:noFill/>
+        </p:spPr>
+        <p:txBody>
+          <a:bodyPr wrap="square">
+            <a:spAutoFit/>
+          </a:bodyPr>
+          <a:lstStyle/>
+          <a:p>
+            <a:pPr>
+              <a:lnSpc>
+                <a:spcPct val="115000"/>
+              </a:lnSpc>
+            </a:pPr>
+            <a:r>
+              <a:rPr sz="1300" b="1">
+                <a:solidFill>
+                  <a:srgbClr val="34D399"/>
+                </a:solidFill>
+                <a:latin typeface="Menlo"/>
+              </a:rPr>
+              <a:t>$ retriever.search("鉴权 登录 auth", k=2)</a:t>
+            </a:r>
+          </a:p>
+          <a:p>
+            <a:pPr>
+              <a:lnSpc>
+                <a:spcPct val="115000"/>
+              </a:lnSpc>
+            </a:pPr>
+            <a:r>
+              <a:rPr sz="1300">
+                <a:solidFill>
+                  <a:srgbClr val="CBD5E1"/>
+                </a:solidFill>
+                <a:latin typeface="Menlo"/>
+              </a:rPr>
+              <a:t>ScoredChunk(id='auth-1', score=0.031, via='both')</a:t>
+            </a:r>
+          </a:p>
+          <a:p>
+            <a:pPr>
+              <a:lnSpc>
+                <a:spcPct val="115000"/>
+              </a:lnSpc>
+            </a:pPr>
+            <a:r>
+              <a:rPr sz="1300">
+                <a:solidFill>
+                  <a:srgbClr val="CBD5E1"/>
+                </a:solidFill>
+                <a:latin typeface="Menlo"/>
+              </a:rPr>
+              <a:t>ScoredChunk(id='auth-2', score=0.019, via='bm25')</a:t>
+            </a:r>
+          </a:p>
+          <a:p>
+            <a:pPr>
+              <a:lnSpc>
+                <a:spcPct val="115000"/>
+              </a:lnSpc>
+            </a:pPr>
+            <a:r>
+              <a:rPr sz="1300">
+                <a:solidFill>
+                  <a:srgbClr val="94A3B8"/>
+                </a:solidFill>
+                <a:latin typeface="Menlo"/>
+              </a:rPr>
+              <a:t># via=both:双通道同时命中,排序第一</a:t>
+            </a:r>
+          </a:p>
+          <a:p>
+            <a:pPr>
+              <a:lnSpc>
+                <a:spcPct val="115000"/>
+              </a:lnSpc>
+            </a:pPr>
+            <a:r>
+              <a:rPr sz="1300">
+                <a:solidFill>
+                  <a:srgbClr val="94A3B8"/>
+                </a:solidFill>
+                <a:latin typeface="Menlo"/>
+              </a:rPr>
+              <a:t># 引用输出:auth.py + 行号</a:t>
+            </a:r>
+          </a:p>
+        </p:txBody>
+      </p:sp>
+      <p:sp>
+        <p:nvSpPr>
+          <p:cNvPr id="12" name="TextBox 11"/>
+          <p:cNvSpPr txBox="1"/>
+          <p:nvPr/>
+        </p:nvSpPr>
+        <p:spPr>
+          <a:xfrm>
+            <a:off x="10287000" y="6534150"/>
+            <a:ext cx="1619250" cy="266700"/>
           </a:xfrm>
           <a:prstGeom prst="rect">
             <a:avLst/>
@@ -23059,415 +23390,6 @@
               </a:lnSpc>
             </a:pPr>
             <a:r>
-              <a:rPr sz="1100" b="0">
-                <a:solidFill>
-                  <a:srgbClr val="94A3B8"/>
-                </a:solidFill>
-                <a:latin typeface="PingFang SC"/>
-              </a:rPr>
-              <a:t>$ retriever.search("鉴权 登录 auth", k=2);ScoredChunk(id='auth-1', score=0.031, via='both');ScoredChunk(id='auth-2', score=0.019, via='bm25');# via=both:双通道同时命中,排序第一;# 引用输出:auth.py + 行号|tests 真实断言</a:t>
-            </a:r>
-          </a:p>
-        </p:txBody>
-      </p:sp>
-      <p:sp>
-        <p:nvSpPr>
-          <p:cNvPr id="6" name="Rounded Rectangle 5"/>
-          <p:cNvSpPr/>
-          <p:nvPr/>
-        </p:nvSpPr>
-        <p:spPr>
-          <a:xfrm>
-            <a:off x="1333500" y="952500"/>
-            <a:ext cx="9525000" cy="5048250"/>
-          </a:xfrm>
-          <a:prstGeom prst="roundRect">
-            <a:avLst>
-              <a:gd name="adj" fmla="val 8000"/>
-            </a:avLst>
-          </a:prstGeom>
-          <a:solidFill>
-            <a:srgbClr val="0D1117"/>
-          </a:solidFill>
-          <a:ln>
-            <a:noFill/>
-          </a:ln>
-          <a:effectLst/>
-        </p:spPr>
-        <p:style>
-          <a:lnRef idx="1">
-            <a:schemeClr val="accent1"/>
-          </a:lnRef>
-          <a:fillRef idx="3">
-            <a:schemeClr val="accent1"/>
-          </a:fillRef>
-          <a:effectRef idx="2">
-            <a:schemeClr val="accent1"/>
-          </a:effectRef>
-          <a:fontRef idx="minor">
-            <a:schemeClr val="lt1"/>
-          </a:fontRef>
-        </p:style>
-        <p:txBody>
-          <a:bodyPr rtlCol="0" anchor="ctr"/>
-          <a:lstStyle/>
-          <a:p>
-            <a:pPr algn="ctr"/>
-          </a:p>
-        </p:txBody>
-      </p:sp>
-      <p:sp>
-        <p:nvSpPr>
-          <p:cNvPr id="7" name="Rectangle 6"/>
-          <p:cNvSpPr/>
-          <p:nvPr/>
-        </p:nvSpPr>
-        <p:spPr>
-          <a:xfrm>
-            <a:off x="1333500" y="952500"/>
-            <a:ext cx="9525000" cy="381000"/>
-          </a:xfrm>
-          <a:prstGeom prst="rect">
-            <a:avLst/>
-          </a:prstGeom>
-          <a:solidFill>
-            <a:srgbClr val="1F2937"/>
-          </a:solidFill>
-          <a:ln>
-            <a:noFill/>
-          </a:ln>
-          <a:effectLst/>
-        </p:spPr>
-        <p:style>
-          <a:lnRef idx="1">
-            <a:schemeClr val="accent1"/>
-          </a:lnRef>
-          <a:fillRef idx="3">
-            <a:schemeClr val="accent1"/>
-          </a:fillRef>
-          <a:effectRef idx="2">
-            <a:schemeClr val="accent1"/>
-          </a:effectRef>
-          <a:fontRef idx="minor">
-            <a:schemeClr val="lt1"/>
-          </a:fontRef>
-        </p:style>
-        <p:txBody>
-          <a:bodyPr rtlCol="0" anchor="ctr"/>
-          <a:lstStyle/>
-          <a:p>
-            <a:pPr algn="ctr"/>
-          </a:p>
-        </p:txBody>
-      </p:sp>
-      <p:sp>
-        <p:nvSpPr>
-          <p:cNvPr id="8" name="Rounded Rectangle 7"/>
-          <p:cNvSpPr/>
-          <p:nvPr/>
-        </p:nvSpPr>
-        <p:spPr>
-          <a:xfrm>
-            <a:off x="1504950" y="1085850"/>
-            <a:ext cx="123825" cy="123825"/>
-          </a:xfrm>
-          <a:prstGeom prst="roundRect">
-            <a:avLst>
-              <a:gd name="adj" fmla="val 8000"/>
-            </a:avLst>
-          </a:prstGeom>
-          <a:solidFill>
-            <a:srgbClr val="F87171"/>
-          </a:solidFill>
-          <a:ln>
-            <a:noFill/>
-          </a:ln>
-          <a:effectLst/>
-        </p:spPr>
-        <p:style>
-          <a:lnRef idx="1">
-            <a:schemeClr val="accent1"/>
-          </a:lnRef>
-          <a:fillRef idx="3">
-            <a:schemeClr val="accent1"/>
-          </a:fillRef>
-          <a:effectRef idx="2">
-            <a:schemeClr val="accent1"/>
-          </a:effectRef>
-          <a:fontRef idx="minor">
-            <a:schemeClr val="lt1"/>
-          </a:fontRef>
-        </p:style>
-        <p:txBody>
-          <a:bodyPr rtlCol="0" anchor="ctr"/>
-          <a:lstStyle/>
-          <a:p>
-            <a:pPr algn="ctr"/>
-          </a:p>
-        </p:txBody>
-      </p:sp>
-      <p:sp>
-        <p:nvSpPr>
-          <p:cNvPr id="9" name="Rounded Rectangle 8"/>
-          <p:cNvSpPr/>
-          <p:nvPr/>
-        </p:nvSpPr>
-        <p:spPr>
-          <a:xfrm>
-            <a:off x="1752600" y="1085850"/>
-            <a:ext cx="123825" cy="123825"/>
-          </a:xfrm>
-          <a:prstGeom prst="roundRect">
-            <a:avLst>
-              <a:gd name="adj" fmla="val 8000"/>
-            </a:avLst>
-          </a:prstGeom>
-          <a:solidFill>
-            <a:srgbClr val="F59E0B"/>
-          </a:solidFill>
-          <a:ln>
-            <a:noFill/>
-          </a:ln>
-          <a:effectLst/>
-        </p:spPr>
-        <p:style>
-          <a:lnRef idx="1">
-            <a:schemeClr val="accent1"/>
-          </a:lnRef>
-          <a:fillRef idx="3">
-            <a:schemeClr val="accent1"/>
-          </a:fillRef>
-          <a:effectRef idx="2">
-            <a:schemeClr val="accent1"/>
-          </a:effectRef>
-          <a:fontRef idx="minor">
-            <a:schemeClr val="lt1"/>
-          </a:fontRef>
-        </p:style>
-        <p:txBody>
-          <a:bodyPr rtlCol="0" anchor="ctr"/>
-          <a:lstStyle/>
-          <a:p>
-            <a:pPr algn="ctr"/>
-          </a:p>
-        </p:txBody>
-      </p:sp>
-      <p:sp>
-        <p:nvSpPr>
-          <p:cNvPr id="10" name="Rounded Rectangle 9"/>
-          <p:cNvSpPr/>
-          <p:nvPr/>
-        </p:nvSpPr>
-        <p:spPr>
-          <a:xfrm>
-            <a:off x="2000250" y="1085850"/>
-            <a:ext cx="123825" cy="123825"/>
-          </a:xfrm>
-          <a:prstGeom prst="roundRect">
-            <a:avLst>
-              <a:gd name="adj" fmla="val 8000"/>
-            </a:avLst>
-          </a:prstGeom>
-          <a:solidFill>
-            <a:srgbClr val="34D399"/>
-          </a:solidFill>
-          <a:ln>
-            <a:noFill/>
-          </a:ln>
-          <a:effectLst/>
-        </p:spPr>
-        <p:style>
-          <a:lnRef idx="1">
-            <a:schemeClr val="accent1"/>
-          </a:lnRef>
-          <a:fillRef idx="3">
-            <a:schemeClr val="accent1"/>
-          </a:fillRef>
-          <a:effectRef idx="2">
-            <a:schemeClr val="accent1"/>
-          </a:effectRef>
-          <a:fontRef idx="minor">
-            <a:schemeClr val="lt1"/>
-          </a:fontRef>
-        </p:style>
-        <p:txBody>
-          <a:bodyPr rtlCol="0" anchor="ctr"/>
-          <a:lstStyle/>
-          <a:p>
-            <a:pPr algn="ctr"/>
-          </a:p>
-        </p:txBody>
-      </p:sp>
-      <p:sp>
-        <p:nvSpPr>
-          <p:cNvPr id="11" name="TextBox 10"/>
-          <p:cNvSpPr txBox="1"/>
-          <p:nvPr/>
-        </p:nvSpPr>
-        <p:spPr>
-          <a:xfrm>
-            <a:off x="2381250" y="952500"/>
-            <a:ext cx="8286750" cy="381000"/>
-          </a:xfrm>
-          <a:prstGeom prst="rect">
-            <a:avLst/>
-          </a:prstGeom>
-          <a:noFill/>
-        </p:spPr>
-        <p:txBody>
-          <a:bodyPr wrap="square" anchor="ctr">
-            <a:spAutoFit/>
-          </a:bodyPr>
-          <a:lstStyle/>
-          <a:p>
-            <a:pPr algn="l">
-              <a:lnSpc>
-                <a:spcPct val="100000"/>
-              </a:lnSpc>
-            </a:pPr>
-            <a:r>
-              <a:rPr sz="1100" b="0">
-                <a:solidFill>
-                  <a:srgbClr val="94A3B8"/>
-                </a:solidFill>
-                <a:latin typeface="PingFang SC"/>
-              </a:rPr>
-              <a:t>terminal — 平台实测</a:t>
-            </a:r>
-          </a:p>
-        </p:txBody>
-      </p:sp>
-      <p:sp>
-        <p:nvSpPr>
-          <p:cNvPr id="12" name="TextBox 11"/>
-          <p:cNvSpPr txBox="1"/>
-          <p:nvPr/>
-        </p:nvSpPr>
-        <p:spPr>
-          <a:xfrm>
-            <a:off x="1562100" y="1485900"/>
-            <a:ext cx="9067800" cy="4381500"/>
-          </a:xfrm>
-          <a:prstGeom prst="rect">
-            <a:avLst/>
-          </a:prstGeom>
-          <a:noFill/>
-        </p:spPr>
-        <p:txBody>
-          <a:bodyPr wrap="square">
-            <a:spAutoFit/>
-          </a:bodyPr>
-          <a:lstStyle/>
-          <a:p>
-            <a:pPr>
-              <a:lnSpc>
-                <a:spcPct val="115000"/>
-              </a:lnSpc>
-            </a:pPr>
-            <a:r>
-              <a:rPr sz="1300" b="1">
-                <a:solidFill>
-                  <a:srgbClr val="34D399"/>
-                </a:solidFill>
-                <a:latin typeface="Menlo"/>
-              </a:rPr>
-              <a:t>$ retriever.search("鉴权 登录 auth", k=2)</a:t>
-            </a:r>
-          </a:p>
-          <a:p>
-            <a:pPr>
-              <a:lnSpc>
-                <a:spcPct val="115000"/>
-              </a:lnSpc>
-            </a:pPr>
-            <a:r>
-              <a:rPr sz="1300">
-                <a:solidFill>
-                  <a:srgbClr val="CBD5E1"/>
-                </a:solidFill>
-                <a:latin typeface="Menlo"/>
-              </a:rPr>
-              <a:t>ScoredChunk(id='auth-1', score=0.031, via='both')</a:t>
-            </a:r>
-          </a:p>
-          <a:p>
-            <a:pPr>
-              <a:lnSpc>
-                <a:spcPct val="115000"/>
-              </a:lnSpc>
-            </a:pPr>
-            <a:r>
-              <a:rPr sz="1300">
-                <a:solidFill>
-                  <a:srgbClr val="CBD5E1"/>
-                </a:solidFill>
-                <a:latin typeface="Menlo"/>
-              </a:rPr>
-              <a:t>ScoredChunk(id='auth-2', score=0.019, via='bm25')</a:t>
-            </a:r>
-          </a:p>
-          <a:p>
-            <a:pPr>
-              <a:lnSpc>
-                <a:spcPct val="115000"/>
-              </a:lnSpc>
-            </a:pPr>
-            <a:r>
-              <a:rPr sz="1300">
-                <a:solidFill>
-                  <a:srgbClr val="94A3B8"/>
-                </a:solidFill>
-                <a:latin typeface="Menlo"/>
-              </a:rPr>
-              <a:t># via=both:双通道同时命中,排序第一</a:t>
-            </a:r>
-          </a:p>
-          <a:p>
-            <a:pPr>
-              <a:lnSpc>
-                <a:spcPct val="115000"/>
-              </a:lnSpc>
-            </a:pPr>
-            <a:r>
-              <a:rPr sz="1300">
-                <a:solidFill>
-                  <a:srgbClr val="94A3B8"/>
-                </a:solidFill>
-                <a:latin typeface="Menlo"/>
-              </a:rPr>
-              <a:t># 引用输出:auth.py + 行号</a:t>
-            </a:r>
-          </a:p>
-        </p:txBody>
-      </p:sp>
-      <p:sp>
-        <p:nvSpPr>
-          <p:cNvPr id="13" name="TextBox 12"/>
-          <p:cNvSpPr txBox="1"/>
-          <p:nvPr/>
-        </p:nvSpPr>
-        <p:spPr>
-          <a:xfrm>
-            <a:off x="10287000" y="6534150"/>
-            <a:ext cx="1619250" cy="266700"/>
-          </a:xfrm>
-          <a:prstGeom prst="rect">
-            <a:avLst/>
-          </a:prstGeom>
-          <a:noFill/>
-        </p:spPr>
-        <p:txBody>
-          <a:bodyPr wrap="square" anchor="ctr">
-            <a:spAutoFit/>
-          </a:bodyPr>
-          <a:lstStyle/>
-          <a:p>
-            <a:pPr algn="r">
-              <a:lnSpc>
-                <a:spcPct val="100000"/>
-              </a:lnSpc>
-            </a:pPr>
-            <a:r>
               <a:rPr sz="900" b="0">
                 <a:solidFill>
                   <a:srgbClr val="94A3B8"/>
@@ -23481,7 +23403,7 @@
       </p:sp>
       <p:sp>
         <p:nvSpPr>
-          <p:cNvPr id="14" name="TextBox 13"/>
+          <p:cNvPr id="13" name="TextBox 12"/>
           <p:cNvSpPr txBox="1"/>
           <p:nvPr/>
         </p:nvSpPr>
@@ -24575,14 +24497,230 @@
       </p:sp>
       <p:sp>
         <p:nvSpPr>
-          <p:cNvPr id="5" name="TextBox 4"/>
+          <p:cNvPr id="5" name="Rounded Rectangle 4"/>
+          <p:cNvSpPr/>
+          <p:nvPr/>
+        </p:nvSpPr>
+        <p:spPr>
+          <a:xfrm>
+            <a:off x="857250" y="2667000"/>
+            <a:ext cx="10477500" cy="1143000"/>
+          </a:xfrm>
+          <a:prstGeom prst="roundRect">
+            <a:avLst>
+              <a:gd name="adj" fmla="val 8000"/>
+            </a:avLst>
+          </a:prstGeom>
+          <a:solidFill>
+            <a:srgbClr val="FFFFFF"/>
+          </a:solidFill>
+          <a:ln w="12700">
+            <a:solidFill>
+              <a:srgbClr val="2563EB"/>
+            </a:solidFill>
+          </a:ln>
+          <a:effectLst/>
+        </p:spPr>
+        <p:style>
+          <a:lnRef idx="1">
+            <a:schemeClr val="accent1"/>
+          </a:lnRef>
+          <a:fillRef idx="3">
+            <a:schemeClr val="accent1"/>
+          </a:fillRef>
+          <a:effectRef idx="2">
+            <a:schemeClr val="accent1"/>
+          </a:effectRef>
+          <a:fontRef idx="minor">
+            <a:schemeClr val="lt1"/>
+          </a:fontRef>
+        </p:style>
+        <p:txBody>
+          <a:bodyPr rtlCol="0" anchor="ctr"/>
+          <a:lstStyle/>
+          <a:p>
+            <a:pPr algn="ctr"/>
+          </a:p>
+        </p:txBody>
+      </p:sp>
+      <p:sp>
+        <p:nvSpPr>
+          <p:cNvPr id="6" name="Rectangle 5"/>
+          <p:cNvSpPr/>
+          <p:nvPr/>
+        </p:nvSpPr>
+        <p:spPr>
+          <a:xfrm>
+            <a:off x="857250" y="2667000"/>
+            <a:ext cx="10477500" cy="57150"/>
+          </a:xfrm>
+          <a:prstGeom prst="rect">
+            <a:avLst/>
+          </a:prstGeom>
+          <a:solidFill>
+            <a:srgbClr val="2563EB"/>
+          </a:solidFill>
+          <a:ln>
+            <a:noFill/>
+          </a:ln>
+          <a:effectLst/>
+        </p:spPr>
+        <p:style>
+          <a:lnRef idx="1">
+            <a:schemeClr val="accent1"/>
+          </a:lnRef>
+          <a:fillRef idx="3">
+            <a:schemeClr val="accent1"/>
+          </a:fillRef>
+          <a:effectRef idx="2">
+            <a:schemeClr val="accent1"/>
+          </a:effectRef>
+          <a:fontRef idx="minor">
+            <a:schemeClr val="lt1"/>
+          </a:fontRef>
+        </p:style>
+        <p:txBody>
+          <a:bodyPr rtlCol="0" anchor="ctr"/>
+          <a:lstStyle/>
+          <a:p>
+            <a:pPr algn="ctr"/>
+          </a:p>
+        </p:txBody>
+      </p:sp>
+      <p:sp>
+        <p:nvSpPr>
+          <p:cNvPr id="7" name="Rounded Rectangle 6"/>
+          <p:cNvSpPr/>
+          <p:nvPr/>
+        </p:nvSpPr>
+        <p:spPr>
+          <a:xfrm>
+            <a:off x="5953125" y="2524125"/>
+            <a:ext cx="285750" cy="285750"/>
+          </a:xfrm>
+          <a:prstGeom prst="roundRect">
+            <a:avLst>
+              <a:gd name="adj" fmla="val 8000"/>
+            </a:avLst>
+          </a:prstGeom>
+          <a:solidFill>
+            <a:srgbClr val="2563EB"/>
+          </a:solidFill>
+          <a:ln>
+            <a:noFill/>
+          </a:ln>
+          <a:effectLst/>
+        </p:spPr>
+        <p:style>
+          <a:lnRef idx="1">
+            <a:schemeClr val="accent1"/>
+          </a:lnRef>
+          <a:fillRef idx="3">
+            <a:schemeClr val="accent1"/>
+          </a:fillRef>
+          <a:effectRef idx="2">
+            <a:schemeClr val="accent1"/>
+          </a:effectRef>
+          <a:fontRef idx="minor">
+            <a:schemeClr val="lt1"/>
+          </a:fontRef>
+        </p:style>
+        <p:txBody>
+          <a:bodyPr rtlCol="0" anchor="ctr"/>
+          <a:lstStyle/>
+          <a:p>
+            <a:pPr algn="ctr"/>
+          </a:p>
+        </p:txBody>
+      </p:sp>
+      <p:sp>
+        <p:nvSpPr>
+          <p:cNvPr id="8" name="TextBox 7"/>
           <p:cNvSpPr txBox="1"/>
           <p:nvPr/>
         </p:nvSpPr>
         <p:spPr>
           <a:xfrm>
-            <a:off x="9334500" y="0"/>
-            <a:ext cx="2667000" cy="704850"/>
+            <a:off x="5953125" y="2514600"/>
+            <a:ext cx="285750" cy="285750"/>
+          </a:xfrm>
+          <a:prstGeom prst="rect">
+            <a:avLst/>
+          </a:prstGeom>
+          <a:noFill/>
+        </p:spPr>
+        <p:txBody>
+          <a:bodyPr wrap="square" anchor="ctr">
+            <a:spAutoFit/>
+          </a:bodyPr>
+          <a:lstStyle/>
+          <a:p>
+            <a:pPr algn="ctr">
+              <a:lnSpc>
+                <a:spcPct val="100000"/>
+              </a:lnSpc>
+            </a:pPr>
+            <a:r>
+              <a:rPr sz="1300" b="1">
+                <a:solidFill>
+                  <a:srgbClr val="FFFFFF"/>
+                </a:solidFill>
+                <a:latin typeface="PingFang SC"/>
+              </a:rPr>
+              <a:t>1</a:t>
+            </a:r>
+          </a:p>
+        </p:txBody>
+      </p:sp>
+      <p:sp>
+        <p:nvSpPr>
+          <p:cNvPr id="9" name="TextBox 8"/>
+          <p:cNvSpPr txBox="1"/>
+          <p:nvPr/>
+        </p:nvSpPr>
+        <p:spPr>
+          <a:xfrm>
+            <a:off x="933450" y="2800350"/>
+            <a:ext cx="10325100" cy="952500"/>
+          </a:xfrm>
+          <a:prstGeom prst="rect">
+            <a:avLst/>
+          </a:prstGeom>
+          <a:noFill/>
+        </p:spPr>
+        <p:txBody>
+          <a:bodyPr wrap="square" anchor="ctr">
+            <a:spAutoFit/>
+          </a:bodyPr>
+          <a:lstStyle/>
+          <a:p>
+            <a:pPr algn="ctr">
+              <a:lnSpc>
+                <a:spcPct val="100000"/>
+              </a:lnSpc>
+            </a:pPr>
+            <a:r>
+              <a:rPr sz="1200" b="1">
+                <a:solidFill>
+                  <a:srgbClr val="475569"/>
+                </a:solidFill>
+                <a:latin typeface="PingFang SC"/>
+              </a:rPr>
+              <a:t>note=无证据的结论一律拦截</a:t>
+            </a:r>
+          </a:p>
+        </p:txBody>
+      </p:sp>
+      <p:sp>
+        <p:nvSpPr>
+          <p:cNvPr id="10" name="TextBox 9"/>
+          <p:cNvSpPr txBox="1"/>
+          <p:nvPr/>
+        </p:nvSpPr>
+        <p:spPr>
+          <a:xfrm>
+            <a:off x="10287000" y="6534150"/>
+            <a:ext cx="1619250" cy="266700"/>
           </a:xfrm>
           <a:prstGeom prst="rect">
             <a:avLst/>
@@ -24601,261 +24739,6 @@
               </a:lnSpc>
             </a:pPr>
             <a:r>
-              <a:rPr sz="1100" b="0">
-                <a:solidFill>
-                  <a:srgbClr val="94A3B8"/>
-                </a:solidFill>
-                <a:latin typeface="PingFang SC"/>
-              </a:rPr>
-              <a:t>Citation 红线的执行器</a:t>
-            </a:r>
-          </a:p>
-        </p:txBody>
-      </p:sp>
-      <p:sp>
-        <p:nvSpPr>
-          <p:cNvPr id="6" name="Rounded Rectangle 5"/>
-          <p:cNvSpPr/>
-          <p:nvPr/>
-        </p:nvSpPr>
-        <p:spPr>
-          <a:xfrm>
-            <a:off x="857250" y="2667000"/>
-            <a:ext cx="10477500" cy="1143000"/>
-          </a:xfrm>
-          <a:prstGeom prst="roundRect">
-            <a:avLst>
-              <a:gd name="adj" fmla="val 8000"/>
-            </a:avLst>
-          </a:prstGeom>
-          <a:solidFill>
-            <a:srgbClr val="FFFFFF"/>
-          </a:solidFill>
-          <a:ln w="12700">
-            <a:solidFill>
-              <a:srgbClr val="2563EB"/>
-            </a:solidFill>
-          </a:ln>
-          <a:effectLst/>
-        </p:spPr>
-        <p:style>
-          <a:lnRef idx="1">
-            <a:schemeClr val="accent1"/>
-          </a:lnRef>
-          <a:fillRef idx="3">
-            <a:schemeClr val="accent1"/>
-          </a:fillRef>
-          <a:effectRef idx="2">
-            <a:schemeClr val="accent1"/>
-          </a:effectRef>
-          <a:fontRef idx="minor">
-            <a:schemeClr val="lt1"/>
-          </a:fontRef>
-        </p:style>
-        <p:txBody>
-          <a:bodyPr rtlCol="0" anchor="ctr"/>
-          <a:lstStyle/>
-          <a:p>
-            <a:pPr algn="ctr"/>
-          </a:p>
-        </p:txBody>
-      </p:sp>
-      <p:sp>
-        <p:nvSpPr>
-          <p:cNvPr id="7" name="Rectangle 6"/>
-          <p:cNvSpPr/>
-          <p:nvPr/>
-        </p:nvSpPr>
-        <p:spPr>
-          <a:xfrm>
-            <a:off x="857250" y="2667000"/>
-            <a:ext cx="10477500" cy="57150"/>
-          </a:xfrm>
-          <a:prstGeom prst="rect">
-            <a:avLst/>
-          </a:prstGeom>
-          <a:solidFill>
-            <a:srgbClr val="2563EB"/>
-          </a:solidFill>
-          <a:ln>
-            <a:noFill/>
-          </a:ln>
-          <a:effectLst/>
-        </p:spPr>
-        <p:style>
-          <a:lnRef idx="1">
-            <a:schemeClr val="accent1"/>
-          </a:lnRef>
-          <a:fillRef idx="3">
-            <a:schemeClr val="accent1"/>
-          </a:fillRef>
-          <a:effectRef idx="2">
-            <a:schemeClr val="accent1"/>
-          </a:effectRef>
-          <a:fontRef idx="minor">
-            <a:schemeClr val="lt1"/>
-          </a:fontRef>
-        </p:style>
-        <p:txBody>
-          <a:bodyPr rtlCol="0" anchor="ctr"/>
-          <a:lstStyle/>
-          <a:p>
-            <a:pPr algn="ctr"/>
-          </a:p>
-        </p:txBody>
-      </p:sp>
-      <p:sp>
-        <p:nvSpPr>
-          <p:cNvPr id="8" name="Rounded Rectangle 7"/>
-          <p:cNvSpPr/>
-          <p:nvPr/>
-        </p:nvSpPr>
-        <p:spPr>
-          <a:xfrm>
-            <a:off x="5953125" y="2524125"/>
-            <a:ext cx="285750" cy="285750"/>
-          </a:xfrm>
-          <a:prstGeom prst="roundRect">
-            <a:avLst>
-              <a:gd name="adj" fmla="val 8000"/>
-            </a:avLst>
-          </a:prstGeom>
-          <a:solidFill>
-            <a:srgbClr val="2563EB"/>
-          </a:solidFill>
-          <a:ln>
-            <a:noFill/>
-          </a:ln>
-          <a:effectLst/>
-        </p:spPr>
-        <p:style>
-          <a:lnRef idx="1">
-            <a:schemeClr val="accent1"/>
-          </a:lnRef>
-          <a:fillRef idx="3">
-            <a:schemeClr val="accent1"/>
-          </a:fillRef>
-          <a:effectRef idx="2">
-            <a:schemeClr val="accent1"/>
-          </a:effectRef>
-          <a:fontRef idx="minor">
-            <a:schemeClr val="lt1"/>
-          </a:fontRef>
-        </p:style>
-        <p:txBody>
-          <a:bodyPr rtlCol="0" anchor="ctr"/>
-          <a:lstStyle/>
-          <a:p>
-            <a:pPr algn="ctr"/>
-          </a:p>
-        </p:txBody>
-      </p:sp>
-      <p:sp>
-        <p:nvSpPr>
-          <p:cNvPr id="9" name="TextBox 8"/>
-          <p:cNvSpPr txBox="1"/>
-          <p:nvPr/>
-        </p:nvSpPr>
-        <p:spPr>
-          <a:xfrm>
-            <a:off x="5953125" y="2514600"/>
-            <a:ext cx="285750" cy="285750"/>
-          </a:xfrm>
-          <a:prstGeom prst="rect">
-            <a:avLst/>
-          </a:prstGeom>
-          <a:noFill/>
-        </p:spPr>
-        <p:txBody>
-          <a:bodyPr wrap="square" anchor="ctr">
-            <a:spAutoFit/>
-          </a:bodyPr>
-          <a:lstStyle/>
-          <a:p>
-            <a:pPr algn="ctr">
-              <a:lnSpc>
-                <a:spcPct val="100000"/>
-              </a:lnSpc>
-            </a:pPr>
-            <a:r>
-              <a:rPr sz="1300" b="1">
-                <a:solidFill>
-                  <a:srgbClr val="FFFFFF"/>
-                </a:solidFill>
-                <a:latin typeface="PingFang SC"/>
-              </a:rPr>
-              <a:t>1</a:t>
-            </a:r>
-          </a:p>
-        </p:txBody>
-      </p:sp>
-      <p:sp>
-        <p:nvSpPr>
-          <p:cNvPr id="10" name="TextBox 9"/>
-          <p:cNvSpPr txBox="1"/>
-          <p:nvPr/>
-        </p:nvSpPr>
-        <p:spPr>
-          <a:xfrm>
-            <a:off x="933450" y="2800350"/>
-            <a:ext cx="10325100" cy="952500"/>
-          </a:xfrm>
-          <a:prstGeom prst="rect">
-            <a:avLst/>
-          </a:prstGeom>
-          <a:noFill/>
-        </p:spPr>
-        <p:txBody>
-          <a:bodyPr wrap="square" anchor="ctr">
-            <a:spAutoFit/>
-          </a:bodyPr>
-          <a:lstStyle/>
-          <a:p>
-            <a:pPr algn="ctr">
-              <a:lnSpc>
-                <a:spcPct val="100000"/>
-              </a:lnSpc>
-            </a:pPr>
-            <a:r>
-              <a:rPr sz="1200" b="1">
-                <a:solidFill>
-                  <a:srgbClr val="475569"/>
-                </a:solidFill>
-                <a:latin typeface="PingFang SC"/>
-              </a:rPr>
-              <a:t>note=无证据的结论一律拦截|Citation 红线的执行器</a:t>
-            </a:r>
-          </a:p>
-        </p:txBody>
-      </p:sp>
-      <p:sp>
-        <p:nvSpPr>
-          <p:cNvPr id="11" name="TextBox 10"/>
-          <p:cNvSpPr txBox="1"/>
-          <p:nvPr/>
-        </p:nvSpPr>
-        <p:spPr>
-          <a:xfrm>
-            <a:off x="10287000" y="6534150"/>
-            <a:ext cx="1619250" cy="266700"/>
-          </a:xfrm>
-          <a:prstGeom prst="rect">
-            <a:avLst/>
-          </a:prstGeom>
-          <a:noFill/>
-        </p:spPr>
-        <p:txBody>
-          <a:bodyPr wrap="square" anchor="ctr">
-            <a:spAutoFit/>
-          </a:bodyPr>
-          <a:lstStyle/>
-          <a:p>
-            <a:pPr algn="r">
-              <a:lnSpc>
-                <a:spcPct val="100000"/>
-              </a:lnSpc>
-            </a:pPr>
-            <a:r>
               <a:rPr sz="900" b="0">
                 <a:solidFill>
                   <a:srgbClr val="94A3B8"/>
@@ -24869,7 +24752,7 @@
       </p:sp>
       <p:sp>
         <p:nvSpPr>
-          <p:cNvPr id="12" name="TextBox 11"/>
+          <p:cNvPr id="11" name="TextBox 10"/>
           <p:cNvSpPr txBox="1"/>
           <p:nvPr/>
         </p:nvSpPr>
@@ -26531,7 +26414,7 @@
       </p:sp>
       <p:pic>
         <p:nvPicPr>
-          <p:cNvPr id="5" name="Picture 4" descr="chart_248663.png"/>
+          <p:cNvPr id="5" name="Picture 4" descr="chart_827513.png"/>
           <p:cNvPicPr>
             <a:picLocks noChangeAspect="1"/>
           </p:cNvPicPr>
@@ -29380,7 +29263,7 @@
                 </a:solidFill>
                 <a:latin typeface="PingFang SC"/>
               </a:rPr>
-              <a:t>成本仍 10x+|企业案例:百炼企业知识库</a:t>
+              <a:t>成本仍 10x+</a:t>
             </a:r>
           </a:p>
         </p:txBody>
@@ -29610,7 +29493,7 @@
       </p:sp>
       <p:pic>
         <p:nvPicPr>
-          <p:cNvPr id="5" name="Picture 4" descr="chart_357970.png"/>
+          <p:cNvPr id="5" name="Picture 4" descr="chart_705298.png"/>
           <p:cNvPicPr>
             <a:picLocks noChangeAspect="1"/>
           </p:cNvPicPr>
@@ -31950,14 +31833,2162 @@
       </p:sp>
       <p:sp>
         <p:nvSpPr>
-          <p:cNvPr id="5" name="TextBox 4"/>
+          <p:cNvPr id="5" name="Rounded Rectangle 4"/>
+          <p:cNvSpPr/>
+          <p:nvPr/>
+        </p:nvSpPr>
+        <p:spPr>
+          <a:xfrm>
+            <a:off x="1847850" y="914400"/>
+            <a:ext cx="8877300" cy="1100137"/>
+          </a:xfrm>
+          <a:prstGeom prst="roundRect">
+            <a:avLst>
+              <a:gd name="adj" fmla="val 8000"/>
+            </a:avLst>
+          </a:prstGeom>
+          <a:solidFill>
+            <a:srgbClr val="F1F5F9"/>
+          </a:solidFill>
+          <a:ln>
+            <a:noFill/>
+          </a:ln>
+          <a:effectLst/>
+        </p:spPr>
+        <p:style>
+          <a:lnRef idx="1">
+            <a:schemeClr val="accent1"/>
+          </a:lnRef>
+          <a:fillRef idx="3">
+            <a:schemeClr val="accent1"/>
+          </a:fillRef>
+          <a:effectRef idx="2">
+            <a:schemeClr val="accent1"/>
+          </a:effectRef>
+          <a:fontRef idx="minor">
+            <a:schemeClr val="lt1"/>
+          </a:fontRef>
+        </p:style>
+        <p:txBody>
+          <a:bodyPr rtlCol="0" anchor="ctr"/>
+          <a:lstStyle/>
+          <a:p>
+            <a:pPr algn="ctr"/>
+          </a:p>
+        </p:txBody>
+      </p:sp>
+      <p:sp>
+        <p:nvSpPr>
+          <p:cNvPr id="6" name="TextBox 5"/>
           <p:cNvSpPr txBox="1"/>
           <p:nvPr/>
         </p:nvSpPr>
         <p:spPr>
           <a:xfrm>
-            <a:off x="9334500" y="0"/>
-            <a:ext cx="2667000" cy="704850"/>
+            <a:off x="1962150" y="685800"/>
+            <a:ext cx="1905000" cy="209550"/>
+          </a:xfrm>
+          <a:prstGeom prst="rect">
+            <a:avLst/>
+          </a:prstGeom>
+          <a:noFill/>
+        </p:spPr>
+        <p:txBody>
+          <a:bodyPr wrap="square" anchor="ctr">
+            <a:spAutoFit/>
+          </a:bodyPr>
+          <a:lstStyle/>
+          <a:p>
+            <a:pPr algn="l">
+              <a:lnSpc>
+                <a:spcPct val="100000"/>
+              </a:lnSpc>
+            </a:pPr>
+            <a:r>
+              <a:rPr sz="1100" b="1">
+                <a:solidFill>
+                  <a:srgbClr val="2563EB"/>
+                </a:solidFill>
+                <a:latin typeface="PingFang SC"/>
+              </a:rPr>
+              <a:t>L1</a:t>
+            </a:r>
+          </a:p>
+        </p:txBody>
+      </p:sp>
+      <p:sp>
+        <p:nvSpPr>
+          <p:cNvPr id="7" name="Rounded Rectangle 6"/>
+          <p:cNvSpPr/>
+          <p:nvPr/>
+        </p:nvSpPr>
+        <p:spPr>
+          <a:xfrm>
+            <a:off x="1905000" y="952500"/>
+            <a:ext cx="2819400" cy="1023937"/>
+          </a:xfrm>
+          <a:prstGeom prst="roundRect">
+            <a:avLst>
+              <a:gd name="adj" fmla="val 8000"/>
+            </a:avLst>
+          </a:prstGeom>
+          <a:solidFill>
+            <a:srgbClr val="FFFFFF"/>
+          </a:solidFill>
+          <a:ln w="12700">
+            <a:solidFill>
+              <a:srgbClr val="2563EB"/>
+            </a:solidFill>
+          </a:ln>
+          <a:effectLst/>
+        </p:spPr>
+        <p:style>
+          <a:lnRef idx="1">
+            <a:schemeClr val="accent1"/>
+          </a:lnRef>
+          <a:fillRef idx="3">
+            <a:schemeClr val="accent1"/>
+          </a:fillRef>
+          <a:effectRef idx="2">
+            <a:schemeClr val="accent1"/>
+          </a:effectRef>
+          <a:fontRef idx="minor">
+            <a:schemeClr val="lt1"/>
+          </a:fontRef>
+        </p:style>
+        <p:txBody>
+          <a:bodyPr rtlCol="0" anchor="ctr"/>
+          <a:lstStyle/>
+          <a:p>
+            <a:pPr algn="ctr"/>
+          </a:p>
+        </p:txBody>
+      </p:sp>
+      <p:sp>
+        <p:nvSpPr>
+          <p:cNvPr id="8" name="Rectangle 7"/>
+          <p:cNvSpPr/>
+          <p:nvPr/>
+        </p:nvSpPr>
+        <p:spPr>
+          <a:xfrm>
+            <a:off x="1905000" y="952500"/>
+            <a:ext cx="47625" cy="1023937"/>
+          </a:xfrm>
+          <a:prstGeom prst="rect">
+            <a:avLst/>
+          </a:prstGeom>
+          <a:solidFill>
+            <a:srgbClr val="2563EB"/>
+          </a:solidFill>
+          <a:ln>
+            <a:noFill/>
+          </a:ln>
+          <a:effectLst/>
+        </p:spPr>
+        <p:style>
+          <a:lnRef idx="1">
+            <a:schemeClr val="accent1"/>
+          </a:lnRef>
+          <a:fillRef idx="3">
+            <a:schemeClr val="accent1"/>
+          </a:fillRef>
+          <a:effectRef idx="2">
+            <a:schemeClr val="accent1"/>
+          </a:effectRef>
+          <a:fontRef idx="minor">
+            <a:schemeClr val="lt1"/>
+          </a:fontRef>
+        </p:style>
+        <p:txBody>
+          <a:bodyPr rtlCol="0" anchor="ctr"/>
+          <a:lstStyle/>
+          <a:p>
+            <a:pPr algn="ctr"/>
+          </a:p>
+        </p:txBody>
+      </p:sp>
+      <p:sp>
+        <p:nvSpPr>
+          <p:cNvPr id="9" name="TextBox 8"/>
+          <p:cNvSpPr txBox="1"/>
+          <p:nvPr/>
+        </p:nvSpPr>
+        <p:spPr>
+          <a:xfrm>
+            <a:off x="2057400" y="952500"/>
+            <a:ext cx="2552700" cy="1023937"/>
+          </a:xfrm>
+          <a:prstGeom prst="rect">
+            <a:avLst/>
+          </a:prstGeom>
+          <a:noFill/>
+        </p:spPr>
+        <p:txBody>
+          <a:bodyPr wrap="none" anchor="ctr">
+            <a:spAutoFit/>
+          </a:bodyPr>
+          <a:lstStyle/>
+          <a:p>
+            <a:pPr algn="l">
+              <a:lnSpc>
+                <a:spcPct val="115000"/>
+              </a:lnSpc>
+            </a:pPr>
+            <a:r>
+              <a:rPr sz="900" b="1">
+                <a:solidFill>
+                  <a:srgbClr val="0B1D3A"/>
+                </a:solidFill>
+                <a:latin typeface="PingFang SC"/>
+              </a:rPr>
+              <a:t>ingest:解析(PDF/MD/代码)</a:t>
+            </a:r>
+          </a:p>
+        </p:txBody>
+      </p:sp>
+      <p:sp>
+        <p:nvSpPr>
+          <p:cNvPr id="10" name="Rounded Rectangle 9"/>
+          <p:cNvSpPr/>
+          <p:nvPr/>
+        </p:nvSpPr>
+        <p:spPr>
+          <a:xfrm>
+            <a:off x="4876800" y="952500"/>
+            <a:ext cx="2819400" cy="1023937"/>
+          </a:xfrm>
+          <a:prstGeom prst="roundRect">
+            <a:avLst>
+              <a:gd name="adj" fmla="val 8000"/>
+            </a:avLst>
+          </a:prstGeom>
+          <a:solidFill>
+            <a:srgbClr val="FFFFFF"/>
+          </a:solidFill>
+          <a:ln w="12700">
+            <a:solidFill>
+              <a:srgbClr val="2563EB"/>
+            </a:solidFill>
+          </a:ln>
+          <a:effectLst/>
+        </p:spPr>
+        <p:style>
+          <a:lnRef idx="1">
+            <a:schemeClr val="accent1"/>
+          </a:lnRef>
+          <a:fillRef idx="3">
+            <a:schemeClr val="accent1"/>
+          </a:fillRef>
+          <a:effectRef idx="2">
+            <a:schemeClr val="accent1"/>
+          </a:effectRef>
+          <a:fontRef idx="minor">
+            <a:schemeClr val="lt1"/>
+          </a:fontRef>
+        </p:style>
+        <p:txBody>
+          <a:bodyPr rtlCol="0" anchor="ctr"/>
+          <a:lstStyle/>
+          <a:p>
+            <a:pPr algn="ctr"/>
+          </a:p>
+        </p:txBody>
+      </p:sp>
+      <p:sp>
+        <p:nvSpPr>
+          <p:cNvPr id="11" name="Rectangle 10"/>
+          <p:cNvSpPr/>
+          <p:nvPr/>
+        </p:nvSpPr>
+        <p:spPr>
+          <a:xfrm>
+            <a:off x="4876800" y="952500"/>
+            <a:ext cx="47625" cy="1023937"/>
+          </a:xfrm>
+          <a:prstGeom prst="rect">
+            <a:avLst/>
+          </a:prstGeom>
+          <a:solidFill>
+            <a:srgbClr val="2563EB"/>
+          </a:solidFill>
+          <a:ln>
+            <a:noFill/>
+          </a:ln>
+          <a:effectLst/>
+        </p:spPr>
+        <p:style>
+          <a:lnRef idx="1">
+            <a:schemeClr val="accent1"/>
+          </a:lnRef>
+          <a:fillRef idx="3">
+            <a:schemeClr val="accent1"/>
+          </a:fillRef>
+          <a:effectRef idx="2">
+            <a:schemeClr val="accent1"/>
+          </a:effectRef>
+          <a:fontRef idx="minor">
+            <a:schemeClr val="lt1"/>
+          </a:fontRef>
+        </p:style>
+        <p:txBody>
+          <a:bodyPr rtlCol="0" anchor="ctr"/>
+          <a:lstStyle/>
+          <a:p>
+            <a:pPr algn="ctr"/>
+          </a:p>
+        </p:txBody>
+      </p:sp>
+      <p:sp>
+        <p:nvSpPr>
+          <p:cNvPr id="12" name="TextBox 11"/>
+          <p:cNvSpPr txBox="1"/>
+          <p:nvPr/>
+        </p:nvSpPr>
+        <p:spPr>
+          <a:xfrm>
+            <a:off x="5029200" y="952500"/>
+            <a:ext cx="2552700" cy="1023937"/>
+          </a:xfrm>
+          <a:prstGeom prst="rect">
+            <a:avLst/>
+          </a:prstGeom>
+          <a:noFill/>
+        </p:spPr>
+        <p:txBody>
+          <a:bodyPr wrap="none" anchor="ctr">
+            <a:spAutoFit/>
+          </a:bodyPr>
+          <a:lstStyle/>
+          <a:p>
+            <a:pPr algn="l">
+              <a:lnSpc>
+                <a:spcPct val="115000"/>
+              </a:lnSpc>
+            </a:pPr>
+            <a:r>
+              <a:rPr sz="1300" b="1">
+                <a:solidFill>
+                  <a:srgbClr val="0B1D3A"/>
+                </a:solidFill>
+                <a:latin typeface="PingFang SC"/>
+              </a:rPr>
+              <a:t>AST 分块</a:t>
+            </a:r>
+          </a:p>
+        </p:txBody>
+      </p:sp>
+      <p:sp>
+        <p:nvSpPr>
+          <p:cNvPr id="13" name="Rounded Rectangle 12"/>
+          <p:cNvSpPr/>
+          <p:nvPr/>
+        </p:nvSpPr>
+        <p:spPr>
+          <a:xfrm>
+            <a:off x="7848600" y="952500"/>
+            <a:ext cx="2819400" cy="1023937"/>
+          </a:xfrm>
+          <a:prstGeom prst="roundRect">
+            <a:avLst>
+              <a:gd name="adj" fmla="val 8000"/>
+            </a:avLst>
+          </a:prstGeom>
+          <a:solidFill>
+            <a:srgbClr val="FFFFFF"/>
+          </a:solidFill>
+          <a:ln w="12700">
+            <a:solidFill>
+              <a:srgbClr val="2563EB"/>
+            </a:solidFill>
+          </a:ln>
+          <a:effectLst/>
+        </p:spPr>
+        <p:style>
+          <a:lnRef idx="1">
+            <a:schemeClr val="accent1"/>
+          </a:lnRef>
+          <a:fillRef idx="3">
+            <a:schemeClr val="accent1"/>
+          </a:fillRef>
+          <a:effectRef idx="2">
+            <a:schemeClr val="accent1"/>
+          </a:effectRef>
+          <a:fontRef idx="minor">
+            <a:schemeClr val="lt1"/>
+          </a:fontRef>
+        </p:style>
+        <p:txBody>
+          <a:bodyPr rtlCol="0" anchor="ctr"/>
+          <a:lstStyle/>
+          <a:p>
+            <a:pPr algn="ctr"/>
+          </a:p>
+        </p:txBody>
+      </p:sp>
+      <p:sp>
+        <p:nvSpPr>
+          <p:cNvPr id="14" name="Rectangle 13"/>
+          <p:cNvSpPr/>
+          <p:nvPr/>
+        </p:nvSpPr>
+        <p:spPr>
+          <a:xfrm>
+            <a:off x="7848600" y="952500"/>
+            <a:ext cx="47625" cy="1023937"/>
+          </a:xfrm>
+          <a:prstGeom prst="rect">
+            <a:avLst/>
+          </a:prstGeom>
+          <a:solidFill>
+            <a:srgbClr val="2563EB"/>
+          </a:solidFill>
+          <a:ln>
+            <a:noFill/>
+          </a:ln>
+          <a:effectLst/>
+        </p:spPr>
+        <p:style>
+          <a:lnRef idx="1">
+            <a:schemeClr val="accent1"/>
+          </a:lnRef>
+          <a:fillRef idx="3">
+            <a:schemeClr val="accent1"/>
+          </a:fillRef>
+          <a:effectRef idx="2">
+            <a:schemeClr val="accent1"/>
+          </a:effectRef>
+          <a:fontRef idx="minor">
+            <a:schemeClr val="lt1"/>
+          </a:fontRef>
+        </p:style>
+        <p:txBody>
+          <a:bodyPr rtlCol="0" anchor="ctr"/>
+          <a:lstStyle/>
+          <a:p>
+            <a:pPr algn="ctr"/>
+          </a:p>
+        </p:txBody>
+      </p:sp>
+      <p:sp>
+        <p:nvSpPr>
+          <p:cNvPr id="15" name="TextBox 14"/>
+          <p:cNvSpPr txBox="1"/>
+          <p:nvPr/>
+        </p:nvSpPr>
+        <p:spPr>
+          <a:xfrm>
+            <a:off x="8001000" y="952500"/>
+            <a:ext cx="2552700" cy="1023937"/>
+          </a:xfrm>
+          <a:prstGeom prst="rect">
+            <a:avLst/>
+          </a:prstGeom>
+          <a:noFill/>
+        </p:spPr>
+        <p:txBody>
+          <a:bodyPr wrap="none" anchor="ctr">
+            <a:spAutoFit/>
+          </a:bodyPr>
+          <a:lstStyle/>
+          <a:p>
+            <a:pPr algn="l">
+              <a:lnSpc>
+                <a:spcPct val="115000"/>
+              </a:lnSpc>
+            </a:pPr>
+            <a:r>
+              <a:rPr sz="1300" b="1">
+                <a:solidFill>
+                  <a:srgbClr val="0B1D3A"/>
+                </a:solidFill>
+                <a:latin typeface="PingFang SC"/>
+              </a:rPr>
+              <a:t>Embedding</a:t>
+            </a:r>
+          </a:p>
+        </p:txBody>
+      </p:sp>
+      <p:cxnSp>
+        <p:nvCxnSpPr>
+          <p:cNvPr id="16" name="Connector 15"/>
+          <p:cNvCxnSpPr/>
+          <p:nvPr/>
+        </p:nvCxnSpPr>
+        <p:spPr>
+          <a:xfrm>
+            <a:off x="6096000" y="2033587"/>
+            <a:ext cx="0" cy="152400"/>
+          </a:xfrm>
+          <a:prstGeom prst="line">
+            <a:avLst/>
+          </a:prstGeom>
+          <a:ln w="17780">
+            <a:solidFill>
+              <a:srgbClr val="475569"/>
+            </a:solidFill>
+          </a:ln>
+        </p:spPr>
+        <p:style>
+          <a:lnRef idx="2">
+            <a:schemeClr val="accent1"/>
+          </a:lnRef>
+          <a:fillRef idx="0">
+            <a:schemeClr val="accent1"/>
+          </a:fillRef>
+          <a:effectRef idx="1">
+            <a:schemeClr val="accent1"/>
+          </a:effectRef>
+          <a:fontRef idx="minor">
+            <a:schemeClr val="tx1"/>
+          </a:fontRef>
+        </p:style>
+      </p:cxnSp>
+      <p:sp>
+        <p:nvSpPr>
+          <p:cNvPr id="17" name="Isosceles Triangle 16"/>
+          <p:cNvSpPr/>
+          <p:nvPr/>
+        </p:nvSpPr>
+        <p:spPr>
+          <a:xfrm rot="10800000">
+            <a:off x="6053138" y="2100263"/>
+            <a:ext cx="85725" cy="85725"/>
+          </a:xfrm>
+          <a:prstGeom prst="triangle">
+            <a:avLst/>
+          </a:prstGeom>
+          <a:solidFill>
+            <a:srgbClr val="475569"/>
+          </a:solidFill>
+          <a:ln>
+            <a:noFill/>
+          </a:ln>
+          <a:effectLst/>
+        </p:spPr>
+        <p:style>
+          <a:lnRef idx="1">
+            <a:schemeClr val="accent1"/>
+          </a:lnRef>
+          <a:fillRef idx="3">
+            <a:schemeClr val="accent1"/>
+          </a:fillRef>
+          <a:effectRef idx="2">
+            <a:schemeClr val="accent1"/>
+          </a:effectRef>
+          <a:fontRef idx="minor">
+            <a:schemeClr val="lt1"/>
+          </a:fontRef>
+        </p:style>
+        <p:txBody>
+          <a:bodyPr rtlCol="0" anchor="ctr"/>
+          <a:lstStyle/>
+          <a:p>
+            <a:pPr algn="ctr"/>
+          </a:p>
+        </p:txBody>
+      </p:sp>
+      <p:sp>
+        <p:nvSpPr>
+          <p:cNvPr id="18" name="Rounded Rectangle 17"/>
+          <p:cNvSpPr/>
+          <p:nvPr/>
+        </p:nvSpPr>
+        <p:spPr>
+          <a:xfrm>
+            <a:off x="5743575" y="2014537"/>
+            <a:ext cx="704850" cy="171450"/>
+          </a:xfrm>
+          <a:prstGeom prst="roundRect">
+            <a:avLst>
+              <a:gd name="adj" fmla="val 8000"/>
+            </a:avLst>
+          </a:prstGeom>
+          <a:solidFill>
+            <a:srgbClr val="FFFFFF"/>
+          </a:solidFill>
+          <a:ln w="12700">
+            <a:solidFill>
+              <a:srgbClr val="DDE5EE"/>
+            </a:solidFill>
+          </a:ln>
+          <a:effectLst/>
+        </p:spPr>
+        <p:style>
+          <a:lnRef idx="1">
+            <a:schemeClr val="accent1"/>
+          </a:lnRef>
+          <a:fillRef idx="3">
+            <a:schemeClr val="accent1"/>
+          </a:fillRef>
+          <a:effectRef idx="2">
+            <a:schemeClr val="accent1"/>
+          </a:effectRef>
+          <a:fontRef idx="minor">
+            <a:schemeClr val="lt1"/>
+          </a:fontRef>
+        </p:style>
+        <p:txBody>
+          <a:bodyPr rtlCol="0" anchor="ctr"/>
+          <a:lstStyle/>
+          <a:p>
+            <a:pPr algn="ctr"/>
+          </a:p>
+        </p:txBody>
+      </p:sp>
+      <p:sp>
+        <p:nvSpPr>
+          <p:cNvPr id="19" name="TextBox 18"/>
+          <p:cNvSpPr txBox="1"/>
+          <p:nvPr/>
+        </p:nvSpPr>
+        <p:spPr>
+          <a:xfrm>
+            <a:off x="5743575" y="2014537"/>
+            <a:ext cx="704850" cy="171450"/>
+          </a:xfrm>
+          <a:prstGeom prst="rect">
+            <a:avLst/>
+          </a:prstGeom>
+          <a:noFill/>
+        </p:spPr>
+        <p:txBody>
+          <a:bodyPr wrap="square" anchor="ctr">
+            <a:spAutoFit/>
+          </a:bodyPr>
+          <a:lstStyle/>
+          <a:p>
+            <a:pPr algn="ctr">
+              <a:lnSpc>
+                <a:spcPct val="100000"/>
+              </a:lnSpc>
+            </a:pPr>
+            <a:r>
+              <a:rPr sz="1100" b="1">
+                <a:solidFill>
+                  <a:srgbClr val="0B1D3A"/>
+                </a:solidFill>
+                <a:latin typeface="PingFang SC"/>
+              </a:rPr>
+              <a:t>入库</a:t>
+            </a:r>
+          </a:p>
+        </p:txBody>
+      </p:sp>
+      <p:sp>
+        <p:nvSpPr>
+          <p:cNvPr id="20" name="Rounded Rectangle 19"/>
+          <p:cNvSpPr/>
+          <p:nvPr/>
+        </p:nvSpPr>
+        <p:spPr>
+          <a:xfrm>
+            <a:off x="1847850" y="2185987"/>
+            <a:ext cx="8877300" cy="1100137"/>
+          </a:xfrm>
+          <a:prstGeom prst="roundRect">
+            <a:avLst>
+              <a:gd name="adj" fmla="val 8000"/>
+            </a:avLst>
+          </a:prstGeom>
+          <a:solidFill>
+            <a:srgbClr val="F1F5F9"/>
+          </a:solidFill>
+          <a:ln>
+            <a:noFill/>
+          </a:ln>
+          <a:effectLst/>
+        </p:spPr>
+        <p:style>
+          <a:lnRef idx="1">
+            <a:schemeClr val="accent1"/>
+          </a:lnRef>
+          <a:fillRef idx="3">
+            <a:schemeClr val="accent1"/>
+          </a:fillRef>
+          <a:effectRef idx="2">
+            <a:schemeClr val="accent1"/>
+          </a:effectRef>
+          <a:fontRef idx="minor">
+            <a:schemeClr val="lt1"/>
+          </a:fontRef>
+        </p:style>
+        <p:txBody>
+          <a:bodyPr rtlCol="0" anchor="ctr"/>
+          <a:lstStyle/>
+          <a:p>
+            <a:pPr algn="ctr"/>
+          </a:p>
+        </p:txBody>
+      </p:sp>
+      <p:sp>
+        <p:nvSpPr>
+          <p:cNvPr id="21" name="TextBox 20"/>
+          <p:cNvSpPr txBox="1"/>
+          <p:nvPr/>
+        </p:nvSpPr>
+        <p:spPr>
+          <a:xfrm>
+            <a:off x="1962150" y="1957387"/>
+            <a:ext cx="1905000" cy="209550"/>
+          </a:xfrm>
+          <a:prstGeom prst="rect">
+            <a:avLst/>
+          </a:prstGeom>
+          <a:noFill/>
+        </p:spPr>
+        <p:txBody>
+          <a:bodyPr wrap="square" anchor="ctr">
+            <a:spAutoFit/>
+          </a:bodyPr>
+          <a:lstStyle/>
+          <a:p>
+            <a:pPr algn="l">
+              <a:lnSpc>
+                <a:spcPct val="100000"/>
+              </a:lnSpc>
+            </a:pPr>
+            <a:r>
+              <a:rPr sz="1100" b="1">
+                <a:solidFill>
+                  <a:srgbClr val="14B8A6"/>
+                </a:solidFill>
+                <a:latin typeface="PingFang SC"/>
+              </a:rPr>
+              <a:t>L2</a:t>
+            </a:r>
+          </a:p>
+        </p:txBody>
+      </p:sp>
+      <p:sp>
+        <p:nvSpPr>
+          <p:cNvPr id="22" name="Rounded Rectangle 21"/>
+          <p:cNvSpPr/>
+          <p:nvPr/>
+        </p:nvSpPr>
+        <p:spPr>
+          <a:xfrm>
+            <a:off x="1905000" y="2224087"/>
+            <a:ext cx="2819400" cy="1023937"/>
+          </a:xfrm>
+          <a:prstGeom prst="roundRect">
+            <a:avLst>
+              <a:gd name="adj" fmla="val 8000"/>
+            </a:avLst>
+          </a:prstGeom>
+          <a:solidFill>
+            <a:srgbClr val="FFFFFF"/>
+          </a:solidFill>
+          <a:ln w="12700">
+            <a:solidFill>
+              <a:srgbClr val="14B8A6"/>
+            </a:solidFill>
+          </a:ln>
+          <a:effectLst/>
+        </p:spPr>
+        <p:style>
+          <a:lnRef idx="1">
+            <a:schemeClr val="accent1"/>
+          </a:lnRef>
+          <a:fillRef idx="3">
+            <a:schemeClr val="accent1"/>
+          </a:fillRef>
+          <a:effectRef idx="2">
+            <a:schemeClr val="accent1"/>
+          </a:effectRef>
+          <a:fontRef idx="minor">
+            <a:schemeClr val="lt1"/>
+          </a:fontRef>
+        </p:style>
+        <p:txBody>
+          <a:bodyPr rtlCol="0" anchor="ctr"/>
+          <a:lstStyle/>
+          <a:p>
+            <a:pPr algn="ctr"/>
+          </a:p>
+        </p:txBody>
+      </p:sp>
+      <p:sp>
+        <p:nvSpPr>
+          <p:cNvPr id="23" name="Rectangle 22"/>
+          <p:cNvSpPr/>
+          <p:nvPr/>
+        </p:nvSpPr>
+        <p:spPr>
+          <a:xfrm>
+            <a:off x="1905000" y="2224087"/>
+            <a:ext cx="47625" cy="1023937"/>
+          </a:xfrm>
+          <a:prstGeom prst="rect">
+            <a:avLst/>
+          </a:prstGeom>
+          <a:solidFill>
+            <a:srgbClr val="14B8A6"/>
+          </a:solidFill>
+          <a:ln>
+            <a:noFill/>
+          </a:ln>
+          <a:effectLst/>
+        </p:spPr>
+        <p:style>
+          <a:lnRef idx="1">
+            <a:schemeClr val="accent1"/>
+          </a:lnRef>
+          <a:fillRef idx="3">
+            <a:schemeClr val="accent1"/>
+          </a:fillRef>
+          <a:effectRef idx="2">
+            <a:schemeClr val="accent1"/>
+          </a:effectRef>
+          <a:fontRef idx="minor">
+            <a:schemeClr val="lt1"/>
+          </a:fontRef>
+        </p:style>
+        <p:txBody>
+          <a:bodyPr rtlCol="0" anchor="ctr"/>
+          <a:lstStyle/>
+          <a:p>
+            <a:pPr algn="ctr"/>
+          </a:p>
+        </p:txBody>
+      </p:sp>
+      <p:sp>
+        <p:nvSpPr>
+          <p:cNvPr id="24" name="TextBox 23"/>
+          <p:cNvSpPr txBox="1"/>
+          <p:nvPr/>
+        </p:nvSpPr>
+        <p:spPr>
+          <a:xfrm>
+            <a:off x="2057400" y="2224087"/>
+            <a:ext cx="2552700" cy="1023937"/>
+          </a:xfrm>
+          <a:prstGeom prst="rect">
+            <a:avLst/>
+          </a:prstGeom>
+          <a:noFill/>
+        </p:spPr>
+        <p:txBody>
+          <a:bodyPr wrap="none" anchor="ctr">
+            <a:spAutoFit/>
+          </a:bodyPr>
+          <a:lstStyle/>
+          <a:p>
+            <a:pPr algn="l">
+              <a:lnSpc>
+                <a:spcPct val="115000"/>
+              </a:lnSpc>
+            </a:pPr>
+            <a:r>
+              <a:rPr sz="1300" b="1">
+                <a:solidFill>
+                  <a:srgbClr val="0B1D3A"/>
+                </a:solidFill>
+                <a:latin typeface="PingFang SC"/>
+              </a:rPr>
+              <a:t>存储:Milvus 向量</a:t>
+            </a:r>
+          </a:p>
+        </p:txBody>
+      </p:sp>
+      <p:sp>
+        <p:nvSpPr>
+          <p:cNvPr id="25" name="Rounded Rectangle 24"/>
+          <p:cNvSpPr/>
+          <p:nvPr/>
+        </p:nvSpPr>
+        <p:spPr>
+          <a:xfrm>
+            <a:off x="4876800" y="2224087"/>
+            <a:ext cx="2819400" cy="1023937"/>
+          </a:xfrm>
+          <a:prstGeom prst="roundRect">
+            <a:avLst>
+              <a:gd name="adj" fmla="val 8000"/>
+            </a:avLst>
+          </a:prstGeom>
+          <a:solidFill>
+            <a:srgbClr val="FFFFFF"/>
+          </a:solidFill>
+          <a:ln w="12700">
+            <a:solidFill>
+              <a:srgbClr val="14B8A6"/>
+            </a:solidFill>
+          </a:ln>
+          <a:effectLst/>
+        </p:spPr>
+        <p:style>
+          <a:lnRef idx="1">
+            <a:schemeClr val="accent1"/>
+          </a:lnRef>
+          <a:fillRef idx="3">
+            <a:schemeClr val="accent1"/>
+          </a:fillRef>
+          <a:effectRef idx="2">
+            <a:schemeClr val="accent1"/>
+          </a:effectRef>
+          <a:fontRef idx="minor">
+            <a:schemeClr val="lt1"/>
+          </a:fontRef>
+        </p:style>
+        <p:txBody>
+          <a:bodyPr rtlCol="0" anchor="ctr"/>
+          <a:lstStyle/>
+          <a:p>
+            <a:pPr algn="ctr"/>
+          </a:p>
+        </p:txBody>
+      </p:sp>
+      <p:sp>
+        <p:nvSpPr>
+          <p:cNvPr id="26" name="Rectangle 25"/>
+          <p:cNvSpPr/>
+          <p:nvPr/>
+        </p:nvSpPr>
+        <p:spPr>
+          <a:xfrm>
+            <a:off x="4876800" y="2224087"/>
+            <a:ext cx="47625" cy="1023937"/>
+          </a:xfrm>
+          <a:prstGeom prst="rect">
+            <a:avLst/>
+          </a:prstGeom>
+          <a:solidFill>
+            <a:srgbClr val="14B8A6"/>
+          </a:solidFill>
+          <a:ln>
+            <a:noFill/>
+          </a:ln>
+          <a:effectLst/>
+        </p:spPr>
+        <p:style>
+          <a:lnRef idx="1">
+            <a:schemeClr val="accent1"/>
+          </a:lnRef>
+          <a:fillRef idx="3">
+            <a:schemeClr val="accent1"/>
+          </a:fillRef>
+          <a:effectRef idx="2">
+            <a:schemeClr val="accent1"/>
+          </a:effectRef>
+          <a:fontRef idx="minor">
+            <a:schemeClr val="lt1"/>
+          </a:fontRef>
+        </p:style>
+        <p:txBody>
+          <a:bodyPr rtlCol="0" anchor="ctr"/>
+          <a:lstStyle/>
+          <a:p>
+            <a:pPr algn="ctr"/>
+          </a:p>
+        </p:txBody>
+      </p:sp>
+      <p:sp>
+        <p:nvSpPr>
+          <p:cNvPr id="27" name="TextBox 26"/>
+          <p:cNvSpPr txBox="1"/>
+          <p:nvPr/>
+        </p:nvSpPr>
+        <p:spPr>
+          <a:xfrm>
+            <a:off x="5029200" y="2224087"/>
+            <a:ext cx="2552700" cy="1023937"/>
+          </a:xfrm>
+          <a:prstGeom prst="rect">
+            <a:avLst/>
+          </a:prstGeom>
+          <a:noFill/>
+        </p:spPr>
+        <p:txBody>
+          <a:bodyPr wrap="none" anchor="ctr">
+            <a:spAutoFit/>
+          </a:bodyPr>
+          <a:lstStyle/>
+          <a:p>
+            <a:pPr algn="l">
+              <a:lnSpc>
+                <a:spcPct val="115000"/>
+              </a:lnSpc>
+            </a:pPr>
+            <a:r>
+              <a:rPr sz="1300" b="1">
+                <a:solidFill>
+                  <a:srgbClr val="0B1D3A"/>
+                </a:solidFill>
+                <a:latin typeface="PingFang SC"/>
+              </a:rPr>
+              <a:t>BM25 索引</a:t>
+            </a:r>
+          </a:p>
+        </p:txBody>
+      </p:sp>
+      <p:sp>
+        <p:nvSpPr>
+          <p:cNvPr id="28" name="Rounded Rectangle 27"/>
+          <p:cNvSpPr/>
+          <p:nvPr/>
+        </p:nvSpPr>
+        <p:spPr>
+          <a:xfrm>
+            <a:off x="7848600" y="2224087"/>
+            <a:ext cx="2819400" cy="1023937"/>
+          </a:xfrm>
+          <a:prstGeom prst="roundRect">
+            <a:avLst>
+              <a:gd name="adj" fmla="val 8000"/>
+            </a:avLst>
+          </a:prstGeom>
+          <a:solidFill>
+            <a:srgbClr val="FFFFFF"/>
+          </a:solidFill>
+          <a:ln w="12700">
+            <a:solidFill>
+              <a:srgbClr val="14B8A6"/>
+            </a:solidFill>
+          </a:ln>
+          <a:effectLst/>
+        </p:spPr>
+        <p:style>
+          <a:lnRef idx="1">
+            <a:schemeClr val="accent1"/>
+          </a:lnRef>
+          <a:fillRef idx="3">
+            <a:schemeClr val="accent1"/>
+          </a:fillRef>
+          <a:effectRef idx="2">
+            <a:schemeClr val="accent1"/>
+          </a:effectRef>
+          <a:fontRef idx="minor">
+            <a:schemeClr val="lt1"/>
+          </a:fontRef>
+        </p:style>
+        <p:txBody>
+          <a:bodyPr rtlCol="0" anchor="ctr"/>
+          <a:lstStyle/>
+          <a:p>
+            <a:pPr algn="ctr"/>
+          </a:p>
+        </p:txBody>
+      </p:sp>
+      <p:sp>
+        <p:nvSpPr>
+          <p:cNvPr id="29" name="Rectangle 28"/>
+          <p:cNvSpPr/>
+          <p:nvPr/>
+        </p:nvSpPr>
+        <p:spPr>
+          <a:xfrm>
+            <a:off x="7848600" y="2224087"/>
+            <a:ext cx="47625" cy="1023937"/>
+          </a:xfrm>
+          <a:prstGeom prst="rect">
+            <a:avLst/>
+          </a:prstGeom>
+          <a:solidFill>
+            <a:srgbClr val="14B8A6"/>
+          </a:solidFill>
+          <a:ln>
+            <a:noFill/>
+          </a:ln>
+          <a:effectLst/>
+        </p:spPr>
+        <p:style>
+          <a:lnRef idx="1">
+            <a:schemeClr val="accent1"/>
+          </a:lnRef>
+          <a:fillRef idx="3">
+            <a:schemeClr val="accent1"/>
+          </a:fillRef>
+          <a:effectRef idx="2">
+            <a:schemeClr val="accent1"/>
+          </a:effectRef>
+          <a:fontRef idx="minor">
+            <a:schemeClr val="lt1"/>
+          </a:fontRef>
+        </p:style>
+        <p:txBody>
+          <a:bodyPr rtlCol="0" anchor="ctr"/>
+          <a:lstStyle/>
+          <a:p>
+            <a:pPr algn="ctr"/>
+          </a:p>
+        </p:txBody>
+      </p:sp>
+      <p:sp>
+        <p:nvSpPr>
+          <p:cNvPr id="30" name="TextBox 29"/>
+          <p:cNvSpPr txBox="1"/>
+          <p:nvPr/>
+        </p:nvSpPr>
+        <p:spPr>
+          <a:xfrm>
+            <a:off x="8001000" y="2224087"/>
+            <a:ext cx="2552700" cy="1023937"/>
+          </a:xfrm>
+          <a:prstGeom prst="rect">
+            <a:avLst/>
+          </a:prstGeom>
+          <a:noFill/>
+        </p:spPr>
+        <p:txBody>
+          <a:bodyPr wrap="none" anchor="ctr">
+            <a:spAutoFit/>
+          </a:bodyPr>
+          <a:lstStyle/>
+          <a:p>
+            <a:pPr algn="l">
+              <a:lnSpc>
+                <a:spcPct val="115000"/>
+              </a:lnSpc>
+            </a:pPr>
+            <a:r>
+              <a:rPr sz="1300" b="1">
+                <a:solidFill>
+                  <a:srgbClr val="0B1D3A"/>
+                </a:solidFill>
+                <a:latin typeface="PingFang SC"/>
+              </a:rPr>
+              <a:t>元数据</a:t>
+            </a:r>
+          </a:p>
+        </p:txBody>
+      </p:sp>
+      <p:cxnSp>
+        <p:nvCxnSpPr>
+          <p:cNvPr id="31" name="Connector 30"/>
+          <p:cNvCxnSpPr/>
+          <p:nvPr/>
+        </p:nvCxnSpPr>
+        <p:spPr>
+          <a:xfrm>
+            <a:off x="6096000" y="3305174"/>
+            <a:ext cx="0" cy="152400"/>
+          </a:xfrm>
+          <a:prstGeom prst="line">
+            <a:avLst/>
+          </a:prstGeom>
+          <a:ln w="17780">
+            <a:solidFill>
+              <a:srgbClr val="475569"/>
+            </a:solidFill>
+          </a:ln>
+        </p:spPr>
+        <p:style>
+          <a:lnRef idx="2">
+            <a:schemeClr val="accent1"/>
+          </a:lnRef>
+          <a:fillRef idx="0">
+            <a:schemeClr val="accent1"/>
+          </a:fillRef>
+          <a:effectRef idx="1">
+            <a:schemeClr val="accent1"/>
+          </a:effectRef>
+          <a:fontRef idx="minor">
+            <a:schemeClr val="tx1"/>
+          </a:fontRef>
+        </p:style>
+      </p:cxnSp>
+      <p:sp>
+        <p:nvSpPr>
+          <p:cNvPr id="32" name="Isosceles Triangle 31"/>
+          <p:cNvSpPr/>
+          <p:nvPr/>
+        </p:nvSpPr>
+        <p:spPr>
+          <a:xfrm rot="10800000">
+            <a:off x="6053138" y="3371850"/>
+            <a:ext cx="85725" cy="85725"/>
+          </a:xfrm>
+          <a:prstGeom prst="triangle">
+            <a:avLst/>
+          </a:prstGeom>
+          <a:solidFill>
+            <a:srgbClr val="475569"/>
+          </a:solidFill>
+          <a:ln>
+            <a:noFill/>
+          </a:ln>
+          <a:effectLst/>
+        </p:spPr>
+        <p:style>
+          <a:lnRef idx="1">
+            <a:schemeClr val="accent1"/>
+          </a:lnRef>
+          <a:fillRef idx="3">
+            <a:schemeClr val="accent1"/>
+          </a:fillRef>
+          <a:effectRef idx="2">
+            <a:schemeClr val="accent1"/>
+          </a:effectRef>
+          <a:fontRef idx="minor">
+            <a:schemeClr val="lt1"/>
+          </a:fontRef>
+        </p:style>
+        <p:txBody>
+          <a:bodyPr rtlCol="0" anchor="ctr"/>
+          <a:lstStyle/>
+          <a:p>
+            <a:pPr algn="ctr"/>
+          </a:p>
+        </p:txBody>
+      </p:sp>
+      <p:sp>
+        <p:nvSpPr>
+          <p:cNvPr id="33" name="Rounded Rectangle 32"/>
+          <p:cNvSpPr/>
+          <p:nvPr/>
+        </p:nvSpPr>
+        <p:spPr>
+          <a:xfrm>
+            <a:off x="5743575" y="3286124"/>
+            <a:ext cx="704850" cy="171450"/>
+          </a:xfrm>
+          <a:prstGeom prst="roundRect">
+            <a:avLst>
+              <a:gd name="adj" fmla="val 8000"/>
+            </a:avLst>
+          </a:prstGeom>
+          <a:solidFill>
+            <a:srgbClr val="FFFFFF"/>
+          </a:solidFill>
+          <a:ln w="12700">
+            <a:solidFill>
+              <a:srgbClr val="DDE5EE"/>
+            </a:solidFill>
+          </a:ln>
+          <a:effectLst/>
+        </p:spPr>
+        <p:style>
+          <a:lnRef idx="1">
+            <a:schemeClr val="accent1"/>
+          </a:lnRef>
+          <a:fillRef idx="3">
+            <a:schemeClr val="accent1"/>
+          </a:fillRef>
+          <a:effectRef idx="2">
+            <a:schemeClr val="accent1"/>
+          </a:effectRef>
+          <a:fontRef idx="minor">
+            <a:schemeClr val="lt1"/>
+          </a:fontRef>
+        </p:style>
+        <p:txBody>
+          <a:bodyPr rtlCol="0" anchor="ctr"/>
+          <a:lstStyle/>
+          <a:p>
+            <a:pPr algn="ctr"/>
+          </a:p>
+        </p:txBody>
+      </p:sp>
+      <p:sp>
+        <p:nvSpPr>
+          <p:cNvPr id="34" name="TextBox 33"/>
+          <p:cNvSpPr txBox="1"/>
+          <p:nvPr/>
+        </p:nvSpPr>
+        <p:spPr>
+          <a:xfrm>
+            <a:off x="5743575" y="3286124"/>
+            <a:ext cx="704850" cy="171450"/>
+          </a:xfrm>
+          <a:prstGeom prst="rect">
+            <a:avLst/>
+          </a:prstGeom>
+          <a:noFill/>
+        </p:spPr>
+        <p:txBody>
+          <a:bodyPr wrap="square" anchor="ctr">
+            <a:spAutoFit/>
+          </a:bodyPr>
+          <a:lstStyle/>
+          <a:p>
+            <a:pPr algn="ctr">
+              <a:lnSpc>
+                <a:spcPct val="100000"/>
+              </a:lnSpc>
+            </a:pPr>
+            <a:r>
+              <a:rPr sz="1100" b="1">
+                <a:solidFill>
+                  <a:srgbClr val="0B1D3A"/>
+                </a:solidFill>
+                <a:latin typeface="PingFang SC"/>
+              </a:rPr>
+              <a:t>查询</a:t>
+            </a:r>
+          </a:p>
+        </p:txBody>
+      </p:sp>
+      <p:sp>
+        <p:nvSpPr>
+          <p:cNvPr id="35" name="Rounded Rectangle 34"/>
+          <p:cNvSpPr/>
+          <p:nvPr/>
+        </p:nvSpPr>
+        <p:spPr>
+          <a:xfrm>
+            <a:off x="1847850" y="3457574"/>
+            <a:ext cx="8877300" cy="1100137"/>
+          </a:xfrm>
+          <a:prstGeom prst="roundRect">
+            <a:avLst>
+              <a:gd name="adj" fmla="val 8000"/>
+            </a:avLst>
+          </a:prstGeom>
+          <a:solidFill>
+            <a:srgbClr val="F1F5F9"/>
+          </a:solidFill>
+          <a:ln>
+            <a:noFill/>
+          </a:ln>
+          <a:effectLst/>
+        </p:spPr>
+        <p:style>
+          <a:lnRef idx="1">
+            <a:schemeClr val="accent1"/>
+          </a:lnRef>
+          <a:fillRef idx="3">
+            <a:schemeClr val="accent1"/>
+          </a:fillRef>
+          <a:effectRef idx="2">
+            <a:schemeClr val="accent1"/>
+          </a:effectRef>
+          <a:fontRef idx="minor">
+            <a:schemeClr val="lt1"/>
+          </a:fontRef>
+        </p:style>
+        <p:txBody>
+          <a:bodyPr rtlCol="0" anchor="ctr"/>
+          <a:lstStyle/>
+          <a:p>
+            <a:pPr algn="ctr"/>
+          </a:p>
+        </p:txBody>
+      </p:sp>
+      <p:sp>
+        <p:nvSpPr>
+          <p:cNvPr id="36" name="TextBox 35"/>
+          <p:cNvSpPr txBox="1"/>
+          <p:nvPr/>
+        </p:nvSpPr>
+        <p:spPr>
+          <a:xfrm>
+            <a:off x="1962150" y="3228974"/>
+            <a:ext cx="1905000" cy="209550"/>
+          </a:xfrm>
+          <a:prstGeom prst="rect">
+            <a:avLst/>
+          </a:prstGeom>
+          <a:noFill/>
+        </p:spPr>
+        <p:txBody>
+          <a:bodyPr wrap="square" anchor="ctr">
+            <a:spAutoFit/>
+          </a:bodyPr>
+          <a:lstStyle/>
+          <a:p>
+            <a:pPr algn="l">
+              <a:lnSpc>
+                <a:spcPct val="100000"/>
+              </a:lnSpc>
+            </a:pPr>
+            <a:r>
+              <a:rPr sz="1100" b="1">
+                <a:solidFill>
+                  <a:srgbClr val="8B5CF6"/>
+                </a:solidFill>
+                <a:latin typeface="PingFang SC"/>
+              </a:rPr>
+              <a:t>L3</a:t>
+            </a:r>
+          </a:p>
+        </p:txBody>
+      </p:sp>
+      <p:sp>
+        <p:nvSpPr>
+          <p:cNvPr id="37" name="Rounded Rectangle 36"/>
+          <p:cNvSpPr/>
+          <p:nvPr/>
+        </p:nvSpPr>
+        <p:spPr>
+          <a:xfrm>
+            <a:off x="1905000" y="3495674"/>
+            <a:ext cx="4305300" cy="1023937"/>
+          </a:xfrm>
+          <a:prstGeom prst="roundRect">
+            <a:avLst>
+              <a:gd name="adj" fmla="val 8000"/>
+            </a:avLst>
+          </a:prstGeom>
+          <a:solidFill>
+            <a:srgbClr val="FFFFFF"/>
+          </a:solidFill>
+          <a:ln w="12700">
+            <a:solidFill>
+              <a:srgbClr val="8B5CF6"/>
+            </a:solidFill>
+          </a:ln>
+          <a:effectLst/>
+        </p:spPr>
+        <p:style>
+          <a:lnRef idx="1">
+            <a:schemeClr val="accent1"/>
+          </a:lnRef>
+          <a:fillRef idx="3">
+            <a:schemeClr val="accent1"/>
+          </a:fillRef>
+          <a:effectRef idx="2">
+            <a:schemeClr val="accent1"/>
+          </a:effectRef>
+          <a:fontRef idx="minor">
+            <a:schemeClr val="lt1"/>
+          </a:fontRef>
+        </p:style>
+        <p:txBody>
+          <a:bodyPr rtlCol="0" anchor="ctr"/>
+          <a:lstStyle/>
+          <a:p>
+            <a:pPr algn="ctr"/>
+          </a:p>
+        </p:txBody>
+      </p:sp>
+      <p:sp>
+        <p:nvSpPr>
+          <p:cNvPr id="38" name="Rectangle 37"/>
+          <p:cNvSpPr/>
+          <p:nvPr/>
+        </p:nvSpPr>
+        <p:spPr>
+          <a:xfrm>
+            <a:off x="1905000" y="3495674"/>
+            <a:ext cx="47625" cy="1023937"/>
+          </a:xfrm>
+          <a:prstGeom prst="rect">
+            <a:avLst/>
+          </a:prstGeom>
+          <a:solidFill>
+            <a:srgbClr val="8B5CF6"/>
+          </a:solidFill>
+          <a:ln>
+            <a:noFill/>
+          </a:ln>
+          <a:effectLst/>
+        </p:spPr>
+        <p:style>
+          <a:lnRef idx="1">
+            <a:schemeClr val="accent1"/>
+          </a:lnRef>
+          <a:fillRef idx="3">
+            <a:schemeClr val="accent1"/>
+          </a:fillRef>
+          <a:effectRef idx="2">
+            <a:schemeClr val="accent1"/>
+          </a:effectRef>
+          <a:fontRef idx="minor">
+            <a:schemeClr val="lt1"/>
+          </a:fontRef>
+        </p:style>
+        <p:txBody>
+          <a:bodyPr rtlCol="0" anchor="ctr"/>
+          <a:lstStyle/>
+          <a:p>
+            <a:pPr algn="ctr"/>
+          </a:p>
+        </p:txBody>
+      </p:sp>
+      <p:sp>
+        <p:nvSpPr>
+          <p:cNvPr id="39" name="TextBox 38"/>
+          <p:cNvSpPr txBox="1"/>
+          <p:nvPr/>
+        </p:nvSpPr>
+        <p:spPr>
+          <a:xfrm>
+            <a:off x="2057400" y="3495674"/>
+            <a:ext cx="4038600" cy="1023937"/>
+          </a:xfrm>
+          <a:prstGeom prst="rect">
+            <a:avLst/>
+          </a:prstGeom>
+          <a:noFill/>
+        </p:spPr>
+        <p:txBody>
+          <a:bodyPr wrap="none" anchor="ctr">
+            <a:spAutoFit/>
+          </a:bodyPr>
+          <a:lstStyle/>
+          <a:p>
+            <a:pPr algn="l">
+              <a:lnSpc>
+                <a:spcPct val="115000"/>
+              </a:lnSpc>
+            </a:pPr>
+            <a:r>
+              <a:rPr sz="1100" b="1">
+                <a:solidFill>
+                  <a:srgbClr val="0B1D3A"/>
+                </a:solidFill>
+                <a:latin typeface="PingFang SC"/>
+              </a:rPr>
+              <a:t>检索:Hybrid 双通道</a:t>
+            </a:r>
+          </a:p>
+        </p:txBody>
+      </p:sp>
+      <p:sp>
+        <p:nvSpPr>
+          <p:cNvPr id="40" name="Rounded Rectangle 39"/>
+          <p:cNvSpPr/>
+          <p:nvPr/>
+        </p:nvSpPr>
+        <p:spPr>
+          <a:xfrm>
+            <a:off x="6362700" y="3495674"/>
+            <a:ext cx="4305300" cy="1023937"/>
+          </a:xfrm>
+          <a:prstGeom prst="roundRect">
+            <a:avLst>
+              <a:gd name="adj" fmla="val 8000"/>
+            </a:avLst>
+          </a:prstGeom>
+          <a:solidFill>
+            <a:srgbClr val="FFFFFF"/>
+          </a:solidFill>
+          <a:ln w="12700">
+            <a:solidFill>
+              <a:srgbClr val="8B5CF6"/>
+            </a:solidFill>
+          </a:ln>
+          <a:effectLst/>
+        </p:spPr>
+        <p:style>
+          <a:lnRef idx="1">
+            <a:schemeClr val="accent1"/>
+          </a:lnRef>
+          <a:fillRef idx="3">
+            <a:schemeClr val="accent1"/>
+          </a:fillRef>
+          <a:effectRef idx="2">
+            <a:schemeClr val="accent1"/>
+          </a:effectRef>
+          <a:fontRef idx="minor">
+            <a:schemeClr val="lt1"/>
+          </a:fontRef>
+        </p:style>
+        <p:txBody>
+          <a:bodyPr rtlCol="0" anchor="ctr"/>
+          <a:lstStyle/>
+          <a:p>
+            <a:pPr algn="ctr"/>
+          </a:p>
+        </p:txBody>
+      </p:sp>
+      <p:sp>
+        <p:nvSpPr>
+          <p:cNvPr id="41" name="Rectangle 40"/>
+          <p:cNvSpPr/>
+          <p:nvPr/>
+        </p:nvSpPr>
+        <p:spPr>
+          <a:xfrm>
+            <a:off x="6362700" y="3495674"/>
+            <a:ext cx="47625" cy="1023937"/>
+          </a:xfrm>
+          <a:prstGeom prst="rect">
+            <a:avLst/>
+          </a:prstGeom>
+          <a:solidFill>
+            <a:srgbClr val="8B5CF6"/>
+          </a:solidFill>
+          <a:ln>
+            <a:noFill/>
+          </a:ln>
+          <a:effectLst/>
+        </p:spPr>
+        <p:style>
+          <a:lnRef idx="1">
+            <a:schemeClr val="accent1"/>
+          </a:lnRef>
+          <a:fillRef idx="3">
+            <a:schemeClr val="accent1"/>
+          </a:fillRef>
+          <a:effectRef idx="2">
+            <a:schemeClr val="accent1"/>
+          </a:effectRef>
+          <a:fontRef idx="minor">
+            <a:schemeClr val="lt1"/>
+          </a:fontRef>
+        </p:style>
+        <p:txBody>
+          <a:bodyPr rtlCol="0" anchor="ctr"/>
+          <a:lstStyle/>
+          <a:p>
+            <a:pPr algn="ctr"/>
+          </a:p>
+        </p:txBody>
+      </p:sp>
+      <p:sp>
+        <p:nvSpPr>
+          <p:cNvPr id="42" name="TextBox 41"/>
+          <p:cNvSpPr txBox="1"/>
+          <p:nvPr/>
+        </p:nvSpPr>
+        <p:spPr>
+          <a:xfrm>
+            <a:off x="6515100" y="3495674"/>
+            <a:ext cx="4038600" cy="1023937"/>
+          </a:xfrm>
+          <a:prstGeom prst="rect">
+            <a:avLst/>
+          </a:prstGeom>
+          <a:noFill/>
+        </p:spPr>
+        <p:txBody>
+          <a:bodyPr wrap="none" anchor="ctr">
+            <a:spAutoFit/>
+          </a:bodyPr>
+          <a:lstStyle/>
+          <a:p>
+            <a:pPr algn="l">
+              <a:lnSpc>
+                <a:spcPct val="115000"/>
+              </a:lnSpc>
+            </a:pPr>
+            <a:r>
+              <a:rPr sz="1300" b="1">
+                <a:solidFill>
+                  <a:srgbClr val="0B1D3A"/>
+                </a:solidFill>
+                <a:latin typeface="PingFang SC"/>
+              </a:rPr>
+              <a:t>RRF 融合</a:t>
+            </a:r>
+          </a:p>
+        </p:txBody>
+      </p:sp>
+      <p:cxnSp>
+        <p:nvCxnSpPr>
+          <p:cNvPr id="43" name="Connector 42"/>
+          <p:cNvCxnSpPr/>
+          <p:nvPr/>
+        </p:nvCxnSpPr>
+        <p:spPr>
+          <a:xfrm>
+            <a:off x="6096000" y="4576761"/>
+            <a:ext cx="0" cy="152400"/>
+          </a:xfrm>
+          <a:prstGeom prst="line">
+            <a:avLst/>
+          </a:prstGeom>
+          <a:ln w="17780">
+            <a:solidFill>
+              <a:srgbClr val="475569"/>
+            </a:solidFill>
+          </a:ln>
+        </p:spPr>
+        <p:style>
+          <a:lnRef idx="2">
+            <a:schemeClr val="accent1"/>
+          </a:lnRef>
+          <a:fillRef idx="0">
+            <a:schemeClr val="accent1"/>
+          </a:fillRef>
+          <a:effectRef idx="1">
+            <a:schemeClr val="accent1"/>
+          </a:effectRef>
+          <a:fontRef idx="minor">
+            <a:schemeClr val="tx1"/>
+          </a:fontRef>
+        </p:style>
+      </p:cxnSp>
+      <p:sp>
+        <p:nvSpPr>
+          <p:cNvPr id="44" name="Isosceles Triangle 43"/>
+          <p:cNvSpPr/>
+          <p:nvPr/>
+        </p:nvSpPr>
+        <p:spPr>
+          <a:xfrm rot="10800000">
+            <a:off x="6053138" y="4643437"/>
+            <a:ext cx="85725" cy="85725"/>
+          </a:xfrm>
+          <a:prstGeom prst="triangle">
+            <a:avLst/>
+          </a:prstGeom>
+          <a:solidFill>
+            <a:srgbClr val="475569"/>
+          </a:solidFill>
+          <a:ln>
+            <a:noFill/>
+          </a:ln>
+          <a:effectLst/>
+        </p:spPr>
+        <p:style>
+          <a:lnRef idx="1">
+            <a:schemeClr val="accent1"/>
+          </a:lnRef>
+          <a:fillRef idx="3">
+            <a:schemeClr val="accent1"/>
+          </a:fillRef>
+          <a:effectRef idx="2">
+            <a:schemeClr val="accent1"/>
+          </a:effectRef>
+          <a:fontRef idx="minor">
+            <a:schemeClr val="lt1"/>
+          </a:fontRef>
+        </p:style>
+        <p:txBody>
+          <a:bodyPr rtlCol="0" anchor="ctr"/>
+          <a:lstStyle/>
+          <a:p>
+            <a:pPr algn="ctr"/>
+          </a:p>
+        </p:txBody>
+      </p:sp>
+      <p:sp>
+        <p:nvSpPr>
+          <p:cNvPr id="45" name="Rounded Rectangle 44"/>
+          <p:cNvSpPr/>
+          <p:nvPr/>
+        </p:nvSpPr>
+        <p:spPr>
+          <a:xfrm>
+            <a:off x="5743575" y="4557711"/>
+            <a:ext cx="704850" cy="171450"/>
+          </a:xfrm>
+          <a:prstGeom prst="roundRect">
+            <a:avLst>
+              <a:gd name="adj" fmla="val 8000"/>
+            </a:avLst>
+          </a:prstGeom>
+          <a:solidFill>
+            <a:srgbClr val="FFFFFF"/>
+          </a:solidFill>
+          <a:ln w="12700">
+            <a:solidFill>
+              <a:srgbClr val="DDE5EE"/>
+            </a:solidFill>
+          </a:ln>
+          <a:effectLst/>
+        </p:spPr>
+        <p:style>
+          <a:lnRef idx="1">
+            <a:schemeClr val="accent1"/>
+          </a:lnRef>
+          <a:fillRef idx="3">
+            <a:schemeClr val="accent1"/>
+          </a:fillRef>
+          <a:effectRef idx="2">
+            <a:schemeClr val="accent1"/>
+          </a:effectRef>
+          <a:fontRef idx="minor">
+            <a:schemeClr val="lt1"/>
+          </a:fontRef>
+        </p:style>
+        <p:txBody>
+          <a:bodyPr rtlCol="0" anchor="ctr"/>
+          <a:lstStyle/>
+          <a:p>
+            <a:pPr algn="ctr"/>
+          </a:p>
+        </p:txBody>
+      </p:sp>
+      <p:sp>
+        <p:nvSpPr>
+          <p:cNvPr id="46" name="TextBox 45"/>
+          <p:cNvSpPr txBox="1"/>
+          <p:nvPr/>
+        </p:nvSpPr>
+        <p:spPr>
+          <a:xfrm>
+            <a:off x="5743575" y="4557711"/>
+            <a:ext cx="704850" cy="171450"/>
+          </a:xfrm>
+          <a:prstGeom prst="rect">
+            <a:avLst/>
+          </a:prstGeom>
+          <a:noFill/>
+        </p:spPr>
+        <p:txBody>
+          <a:bodyPr wrap="square" anchor="ctr">
+            <a:spAutoFit/>
+          </a:bodyPr>
+          <a:lstStyle/>
+          <a:p>
+            <a:pPr algn="ctr">
+              <a:lnSpc>
+                <a:spcPct val="100000"/>
+              </a:lnSpc>
+            </a:pPr>
+            <a:r>
+              <a:rPr sz="1100" b="1">
+                <a:solidFill>
+                  <a:srgbClr val="0B1D3A"/>
+                </a:solidFill>
+                <a:latin typeface="PingFang SC"/>
+              </a:rPr>
+              <a:t>溯源</a:t>
+            </a:r>
+          </a:p>
+        </p:txBody>
+      </p:sp>
+      <p:sp>
+        <p:nvSpPr>
+          <p:cNvPr id="47" name="Rounded Rectangle 46"/>
+          <p:cNvSpPr/>
+          <p:nvPr/>
+        </p:nvSpPr>
+        <p:spPr>
+          <a:xfrm>
+            <a:off x="1847850" y="4729161"/>
+            <a:ext cx="8877300" cy="1100137"/>
+          </a:xfrm>
+          <a:prstGeom prst="roundRect">
+            <a:avLst>
+              <a:gd name="adj" fmla="val 8000"/>
+            </a:avLst>
+          </a:prstGeom>
+          <a:solidFill>
+            <a:srgbClr val="F1F5F9"/>
+          </a:solidFill>
+          <a:ln>
+            <a:noFill/>
+          </a:ln>
+          <a:effectLst/>
+        </p:spPr>
+        <p:style>
+          <a:lnRef idx="1">
+            <a:schemeClr val="accent1"/>
+          </a:lnRef>
+          <a:fillRef idx="3">
+            <a:schemeClr val="accent1"/>
+          </a:fillRef>
+          <a:effectRef idx="2">
+            <a:schemeClr val="accent1"/>
+          </a:effectRef>
+          <a:fontRef idx="minor">
+            <a:schemeClr val="lt1"/>
+          </a:fontRef>
+        </p:style>
+        <p:txBody>
+          <a:bodyPr rtlCol="0" anchor="ctr"/>
+          <a:lstStyle/>
+          <a:p>
+            <a:pPr algn="ctr"/>
+          </a:p>
+        </p:txBody>
+      </p:sp>
+      <p:sp>
+        <p:nvSpPr>
+          <p:cNvPr id="48" name="TextBox 47"/>
+          <p:cNvSpPr txBox="1"/>
+          <p:nvPr/>
+        </p:nvSpPr>
+        <p:spPr>
+          <a:xfrm>
+            <a:off x="1962150" y="4500561"/>
+            <a:ext cx="1905000" cy="209550"/>
+          </a:xfrm>
+          <a:prstGeom prst="rect">
+            <a:avLst/>
+          </a:prstGeom>
+          <a:noFill/>
+        </p:spPr>
+        <p:txBody>
+          <a:bodyPr wrap="square" anchor="ctr">
+            <a:spAutoFit/>
+          </a:bodyPr>
+          <a:lstStyle/>
+          <a:p>
+            <a:pPr algn="l">
+              <a:lnSpc>
+                <a:spcPct val="100000"/>
+              </a:lnSpc>
+            </a:pPr>
+            <a:r>
+              <a:rPr sz="1100" b="1">
+                <a:solidFill>
+                  <a:srgbClr val="F59E0B"/>
+                </a:solidFill>
+                <a:latin typeface="PingFang SC"/>
+              </a:rPr>
+              <a:t>L4</a:t>
+            </a:r>
+          </a:p>
+        </p:txBody>
+      </p:sp>
+      <p:sp>
+        <p:nvSpPr>
+          <p:cNvPr id="49" name="Rounded Rectangle 48"/>
+          <p:cNvSpPr/>
+          <p:nvPr/>
+        </p:nvSpPr>
+        <p:spPr>
+          <a:xfrm>
+            <a:off x="1905000" y="4767261"/>
+            <a:ext cx="4305300" cy="1023937"/>
+          </a:xfrm>
+          <a:prstGeom prst="roundRect">
+            <a:avLst>
+              <a:gd name="adj" fmla="val 8000"/>
+            </a:avLst>
+          </a:prstGeom>
+          <a:solidFill>
+            <a:srgbClr val="FFFFFF"/>
+          </a:solidFill>
+          <a:ln w="12700">
+            <a:solidFill>
+              <a:srgbClr val="F59E0B"/>
+            </a:solidFill>
+          </a:ln>
+          <a:effectLst/>
+        </p:spPr>
+        <p:style>
+          <a:lnRef idx="1">
+            <a:schemeClr val="accent1"/>
+          </a:lnRef>
+          <a:fillRef idx="3">
+            <a:schemeClr val="accent1"/>
+          </a:fillRef>
+          <a:effectRef idx="2">
+            <a:schemeClr val="accent1"/>
+          </a:effectRef>
+          <a:fontRef idx="minor">
+            <a:schemeClr val="lt1"/>
+          </a:fontRef>
+        </p:style>
+        <p:txBody>
+          <a:bodyPr rtlCol="0" anchor="ctr"/>
+          <a:lstStyle/>
+          <a:p>
+            <a:pPr algn="ctr"/>
+          </a:p>
+        </p:txBody>
+      </p:sp>
+      <p:sp>
+        <p:nvSpPr>
+          <p:cNvPr id="50" name="Rectangle 49"/>
+          <p:cNvSpPr/>
+          <p:nvPr/>
+        </p:nvSpPr>
+        <p:spPr>
+          <a:xfrm>
+            <a:off x="1905000" y="4767261"/>
+            <a:ext cx="47625" cy="1023937"/>
+          </a:xfrm>
+          <a:prstGeom prst="rect">
+            <a:avLst/>
+          </a:prstGeom>
+          <a:solidFill>
+            <a:srgbClr val="F59E0B"/>
+          </a:solidFill>
+          <a:ln>
+            <a:noFill/>
+          </a:ln>
+          <a:effectLst/>
+        </p:spPr>
+        <p:style>
+          <a:lnRef idx="1">
+            <a:schemeClr val="accent1"/>
+          </a:lnRef>
+          <a:fillRef idx="3">
+            <a:schemeClr val="accent1"/>
+          </a:fillRef>
+          <a:effectRef idx="2">
+            <a:schemeClr val="accent1"/>
+          </a:effectRef>
+          <a:fontRef idx="minor">
+            <a:schemeClr val="lt1"/>
+          </a:fontRef>
+        </p:style>
+        <p:txBody>
+          <a:bodyPr rtlCol="0" anchor="ctr"/>
+          <a:lstStyle/>
+          <a:p>
+            <a:pPr algn="ctr"/>
+          </a:p>
+        </p:txBody>
+      </p:sp>
+      <p:sp>
+        <p:nvSpPr>
+          <p:cNvPr id="51" name="TextBox 50"/>
+          <p:cNvSpPr txBox="1"/>
+          <p:nvPr/>
+        </p:nvSpPr>
+        <p:spPr>
+          <a:xfrm>
+            <a:off x="2057400" y="4767261"/>
+            <a:ext cx="4038600" cy="1023937"/>
+          </a:xfrm>
+          <a:prstGeom prst="rect">
+            <a:avLst/>
+          </a:prstGeom>
+          <a:noFill/>
+        </p:spPr>
+        <p:txBody>
+          <a:bodyPr wrap="none" anchor="ctr">
+            <a:spAutoFit/>
+          </a:bodyPr>
+          <a:lstStyle/>
+          <a:p>
+            <a:pPr algn="l">
+              <a:lnSpc>
+                <a:spcPct val="115000"/>
+              </a:lnSpc>
+            </a:pPr>
+            <a:r>
+              <a:rPr sz="1300" b="1">
+                <a:solidFill>
+                  <a:srgbClr val="0B1D3A"/>
+                </a:solidFill>
+                <a:latin typeface="PingFang SC"/>
+              </a:rPr>
+              <a:t>后处理:Rerank</a:t>
+            </a:r>
+          </a:p>
+        </p:txBody>
+      </p:sp>
+      <p:sp>
+        <p:nvSpPr>
+          <p:cNvPr id="52" name="Rounded Rectangle 51"/>
+          <p:cNvSpPr/>
+          <p:nvPr/>
+        </p:nvSpPr>
+        <p:spPr>
+          <a:xfrm>
+            <a:off x="6362700" y="4767261"/>
+            <a:ext cx="4305300" cy="1023937"/>
+          </a:xfrm>
+          <a:prstGeom prst="roundRect">
+            <a:avLst>
+              <a:gd name="adj" fmla="val 8000"/>
+            </a:avLst>
+          </a:prstGeom>
+          <a:solidFill>
+            <a:srgbClr val="FFFFFF"/>
+          </a:solidFill>
+          <a:ln w="12700">
+            <a:solidFill>
+              <a:srgbClr val="F59E0B"/>
+            </a:solidFill>
+          </a:ln>
+          <a:effectLst/>
+        </p:spPr>
+        <p:style>
+          <a:lnRef idx="1">
+            <a:schemeClr val="accent1"/>
+          </a:lnRef>
+          <a:fillRef idx="3">
+            <a:schemeClr val="accent1"/>
+          </a:fillRef>
+          <a:effectRef idx="2">
+            <a:schemeClr val="accent1"/>
+          </a:effectRef>
+          <a:fontRef idx="minor">
+            <a:schemeClr val="lt1"/>
+          </a:fontRef>
+        </p:style>
+        <p:txBody>
+          <a:bodyPr rtlCol="0" anchor="ctr"/>
+          <a:lstStyle/>
+          <a:p>
+            <a:pPr algn="ctr"/>
+          </a:p>
+        </p:txBody>
+      </p:sp>
+      <p:sp>
+        <p:nvSpPr>
+          <p:cNvPr id="53" name="Rectangle 52"/>
+          <p:cNvSpPr/>
+          <p:nvPr/>
+        </p:nvSpPr>
+        <p:spPr>
+          <a:xfrm>
+            <a:off x="6362700" y="4767261"/>
+            <a:ext cx="47625" cy="1023937"/>
+          </a:xfrm>
+          <a:prstGeom prst="rect">
+            <a:avLst/>
+          </a:prstGeom>
+          <a:solidFill>
+            <a:srgbClr val="F59E0B"/>
+          </a:solidFill>
+          <a:ln>
+            <a:noFill/>
+          </a:ln>
+          <a:effectLst/>
+        </p:spPr>
+        <p:style>
+          <a:lnRef idx="1">
+            <a:schemeClr val="accent1"/>
+          </a:lnRef>
+          <a:fillRef idx="3">
+            <a:schemeClr val="accent1"/>
+          </a:fillRef>
+          <a:effectRef idx="2">
+            <a:schemeClr val="accent1"/>
+          </a:effectRef>
+          <a:fontRef idx="minor">
+            <a:schemeClr val="lt1"/>
+          </a:fontRef>
+        </p:style>
+        <p:txBody>
+          <a:bodyPr rtlCol="0" anchor="ctr"/>
+          <a:lstStyle/>
+          <a:p>
+            <a:pPr algn="ctr"/>
+          </a:p>
+        </p:txBody>
+      </p:sp>
+      <p:sp>
+        <p:nvSpPr>
+          <p:cNvPr id="54" name="TextBox 53"/>
+          <p:cNvSpPr txBox="1"/>
+          <p:nvPr/>
+        </p:nvSpPr>
+        <p:spPr>
+          <a:xfrm>
+            <a:off x="6515100" y="4767261"/>
+            <a:ext cx="4038600" cy="1023937"/>
+          </a:xfrm>
+          <a:prstGeom prst="rect">
+            <a:avLst/>
+          </a:prstGeom>
+          <a:noFill/>
+        </p:spPr>
+        <p:txBody>
+          <a:bodyPr wrap="none" anchor="ctr">
+            <a:spAutoFit/>
+          </a:bodyPr>
+          <a:lstStyle/>
+          <a:p>
+            <a:pPr algn="l">
+              <a:lnSpc>
+                <a:spcPct val="115000"/>
+              </a:lnSpc>
+            </a:pPr>
+            <a:r>
+              <a:rPr sz="1300" b="1">
+                <a:solidFill>
+                  <a:srgbClr val="0B1D3A"/>
+                </a:solidFill>
+                <a:latin typeface="PingFang SC"/>
+              </a:rPr>
+              <a:t>Citation 引用</a:t>
+            </a:r>
+          </a:p>
+        </p:txBody>
+      </p:sp>
+      <p:sp>
+        <p:nvSpPr>
+          <p:cNvPr id="55" name="TextBox 54"/>
+          <p:cNvSpPr txBox="1"/>
+          <p:nvPr/>
+        </p:nvSpPr>
+        <p:spPr>
+          <a:xfrm>
+            <a:off x="10287000" y="6534150"/>
+            <a:ext cx="1619250" cy="266700"/>
           </a:xfrm>
           <a:prstGeom prst="rect">
             <a:avLst/>
@@ -31976,1893 +34007,6 @@
               </a:lnSpc>
             </a:pPr>
             <a:r>
-              <a:rPr sz="1100" b="0">
-                <a:solidFill>
-                  <a:srgbClr val="94A3B8"/>
-                </a:solidFill>
-                <a:latin typeface="PingFang SC"/>
-              </a:rPr>
-              <a:t>平台 HybridRetriever 已实现</a:t>
-            </a:r>
-          </a:p>
-        </p:txBody>
-      </p:sp>
-      <p:sp>
-        <p:nvSpPr>
-          <p:cNvPr id="6" name="Rounded Rectangle 5"/>
-          <p:cNvSpPr/>
-          <p:nvPr/>
-        </p:nvSpPr>
-        <p:spPr>
-          <a:xfrm>
-            <a:off x="1847850" y="914400"/>
-            <a:ext cx="8877300" cy="1100137"/>
-          </a:xfrm>
-          <a:prstGeom prst="roundRect">
-            <a:avLst>
-              <a:gd name="adj" fmla="val 8000"/>
-            </a:avLst>
-          </a:prstGeom>
-          <a:solidFill>
-            <a:srgbClr val="F1F5F9"/>
-          </a:solidFill>
-          <a:ln>
-            <a:noFill/>
-          </a:ln>
-          <a:effectLst/>
-        </p:spPr>
-        <p:style>
-          <a:lnRef idx="1">
-            <a:schemeClr val="accent1"/>
-          </a:lnRef>
-          <a:fillRef idx="3">
-            <a:schemeClr val="accent1"/>
-          </a:fillRef>
-          <a:effectRef idx="2">
-            <a:schemeClr val="accent1"/>
-          </a:effectRef>
-          <a:fontRef idx="minor">
-            <a:schemeClr val="lt1"/>
-          </a:fontRef>
-        </p:style>
-        <p:txBody>
-          <a:bodyPr rtlCol="0" anchor="ctr"/>
-          <a:lstStyle/>
-          <a:p>
-            <a:pPr algn="ctr"/>
-          </a:p>
-        </p:txBody>
-      </p:sp>
-      <p:sp>
-        <p:nvSpPr>
-          <p:cNvPr id="7" name="Rounded Rectangle 6"/>
-          <p:cNvSpPr/>
-          <p:nvPr/>
-        </p:nvSpPr>
-        <p:spPr>
-          <a:xfrm>
-            <a:off x="1905000" y="952500"/>
-            <a:ext cx="2819400" cy="1023937"/>
-          </a:xfrm>
-          <a:prstGeom prst="roundRect">
-            <a:avLst>
-              <a:gd name="adj" fmla="val 8000"/>
-            </a:avLst>
-          </a:prstGeom>
-          <a:solidFill>
-            <a:srgbClr val="FFFFFF"/>
-          </a:solidFill>
-          <a:ln w="12700">
-            <a:solidFill>
-              <a:srgbClr val="2563EB"/>
-            </a:solidFill>
-          </a:ln>
-          <a:effectLst/>
-        </p:spPr>
-        <p:style>
-          <a:lnRef idx="1">
-            <a:schemeClr val="accent1"/>
-          </a:lnRef>
-          <a:fillRef idx="3">
-            <a:schemeClr val="accent1"/>
-          </a:fillRef>
-          <a:effectRef idx="2">
-            <a:schemeClr val="accent1"/>
-          </a:effectRef>
-          <a:fontRef idx="minor">
-            <a:schemeClr val="lt1"/>
-          </a:fontRef>
-        </p:style>
-        <p:txBody>
-          <a:bodyPr rtlCol="0" anchor="ctr"/>
-          <a:lstStyle/>
-          <a:p>
-            <a:pPr algn="ctr"/>
-          </a:p>
-        </p:txBody>
-      </p:sp>
-      <p:sp>
-        <p:nvSpPr>
-          <p:cNvPr id="8" name="Rectangle 7"/>
-          <p:cNvSpPr/>
-          <p:nvPr/>
-        </p:nvSpPr>
-        <p:spPr>
-          <a:xfrm>
-            <a:off x="1905000" y="952500"/>
-            <a:ext cx="47625" cy="1023937"/>
-          </a:xfrm>
-          <a:prstGeom prst="rect">
-            <a:avLst/>
-          </a:prstGeom>
-          <a:solidFill>
-            <a:srgbClr val="2563EB"/>
-          </a:solidFill>
-          <a:ln>
-            <a:noFill/>
-          </a:ln>
-          <a:effectLst/>
-        </p:spPr>
-        <p:style>
-          <a:lnRef idx="1">
-            <a:schemeClr val="accent1"/>
-          </a:lnRef>
-          <a:fillRef idx="3">
-            <a:schemeClr val="accent1"/>
-          </a:fillRef>
-          <a:effectRef idx="2">
-            <a:schemeClr val="accent1"/>
-          </a:effectRef>
-          <a:fontRef idx="minor">
-            <a:schemeClr val="lt1"/>
-          </a:fontRef>
-        </p:style>
-        <p:txBody>
-          <a:bodyPr rtlCol="0" anchor="ctr"/>
-          <a:lstStyle/>
-          <a:p>
-            <a:pPr algn="ctr"/>
-          </a:p>
-        </p:txBody>
-      </p:sp>
-      <p:sp>
-        <p:nvSpPr>
-          <p:cNvPr id="9" name="TextBox 8"/>
-          <p:cNvSpPr txBox="1"/>
-          <p:nvPr/>
-        </p:nvSpPr>
-        <p:spPr>
-          <a:xfrm>
-            <a:off x="2038350" y="952500"/>
-            <a:ext cx="2590800" cy="1023937"/>
-          </a:xfrm>
-          <a:prstGeom prst="rect">
-            <a:avLst/>
-          </a:prstGeom>
-          <a:noFill/>
-        </p:spPr>
-        <p:txBody>
-          <a:bodyPr wrap="square" anchor="ctr">
-            <a:spAutoFit/>
-          </a:bodyPr>
-          <a:lstStyle/>
-          <a:p>
-            <a:pPr algn="l">
-              <a:lnSpc>
-                <a:spcPct val="100000"/>
-              </a:lnSpc>
-            </a:pPr>
-            <a:r>
-              <a:rPr sz="1200" b="1">
-                <a:solidFill>
-                  <a:srgbClr val="475569"/>
-                </a:solidFill>
-                <a:latin typeface="PingFang SC"/>
-              </a:rPr>
-              <a:t>ingest:解析(PDF/MD/代码)</a:t>
-            </a:r>
-          </a:p>
-        </p:txBody>
-      </p:sp>
-      <p:sp>
-        <p:nvSpPr>
-          <p:cNvPr id="10" name="Rounded Rectangle 9"/>
-          <p:cNvSpPr/>
-          <p:nvPr/>
-        </p:nvSpPr>
-        <p:spPr>
-          <a:xfrm>
-            <a:off x="4876800" y="952500"/>
-            <a:ext cx="2819400" cy="1023937"/>
-          </a:xfrm>
-          <a:prstGeom prst="roundRect">
-            <a:avLst>
-              <a:gd name="adj" fmla="val 8000"/>
-            </a:avLst>
-          </a:prstGeom>
-          <a:solidFill>
-            <a:srgbClr val="FFFFFF"/>
-          </a:solidFill>
-          <a:ln w="12700">
-            <a:solidFill>
-              <a:srgbClr val="2563EB"/>
-            </a:solidFill>
-          </a:ln>
-          <a:effectLst/>
-        </p:spPr>
-        <p:style>
-          <a:lnRef idx="1">
-            <a:schemeClr val="accent1"/>
-          </a:lnRef>
-          <a:fillRef idx="3">
-            <a:schemeClr val="accent1"/>
-          </a:fillRef>
-          <a:effectRef idx="2">
-            <a:schemeClr val="accent1"/>
-          </a:effectRef>
-          <a:fontRef idx="minor">
-            <a:schemeClr val="lt1"/>
-          </a:fontRef>
-        </p:style>
-        <p:txBody>
-          <a:bodyPr rtlCol="0" anchor="ctr"/>
-          <a:lstStyle/>
-          <a:p>
-            <a:pPr algn="ctr"/>
-          </a:p>
-        </p:txBody>
-      </p:sp>
-      <p:sp>
-        <p:nvSpPr>
-          <p:cNvPr id="11" name="Rectangle 10"/>
-          <p:cNvSpPr/>
-          <p:nvPr/>
-        </p:nvSpPr>
-        <p:spPr>
-          <a:xfrm>
-            <a:off x="4876800" y="952500"/>
-            <a:ext cx="47625" cy="1023937"/>
-          </a:xfrm>
-          <a:prstGeom prst="rect">
-            <a:avLst/>
-          </a:prstGeom>
-          <a:solidFill>
-            <a:srgbClr val="2563EB"/>
-          </a:solidFill>
-          <a:ln>
-            <a:noFill/>
-          </a:ln>
-          <a:effectLst/>
-        </p:spPr>
-        <p:style>
-          <a:lnRef idx="1">
-            <a:schemeClr val="accent1"/>
-          </a:lnRef>
-          <a:fillRef idx="3">
-            <a:schemeClr val="accent1"/>
-          </a:fillRef>
-          <a:effectRef idx="2">
-            <a:schemeClr val="accent1"/>
-          </a:effectRef>
-          <a:fontRef idx="minor">
-            <a:schemeClr val="lt1"/>
-          </a:fontRef>
-        </p:style>
-        <p:txBody>
-          <a:bodyPr rtlCol="0" anchor="ctr"/>
-          <a:lstStyle/>
-          <a:p>
-            <a:pPr algn="ctr"/>
-          </a:p>
-        </p:txBody>
-      </p:sp>
-      <p:sp>
-        <p:nvSpPr>
-          <p:cNvPr id="12" name="TextBox 11"/>
-          <p:cNvSpPr txBox="1"/>
-          <p:nvPr/>
-        </p:nvSpPr>
-        <p:spPr>
-          <a:xfrm>
-            <a:off x="5010150" y="952500"/>
-            <a:ext cx="2590800" cy="1023937"/>
-          </a:xfrm>
-          <a:prstGeom prst="rect">
-            <a:avLst/>
-          </a:prstGeom>
-          <a:noFill/>
-        </p:spPr>
-        <p:txBody>
-          <a:bodyPr wrap="square" anchor="ctr">
-            <a:spAutoFit/>
-          </a:bodyPr>
-          <a:lstStyle/>
-          <a:p>
-            <a:pPr algn="l">
-              <a:lnSpc>
-                <a:spcPct val="100000"/>
-              </a:lnSpc>
-            </a:pPr>
-            <a:r>
-              <a:rPr sz="1200" b="1">
-                <a:solidFill>
-                  <a:srgbClr val="475569"/>
-                </a:solidFill>
-                <a:latin typeface="PingFang SC"/>
-              </a:rPr>
-              <a:t>AST 分块</a:t>
-            </a:r>
-          </a:p>
-        </p:txBody>
-      </p:sp>
-      <p:sp>
-        <p:nvSpPr>
-          <p:cNvPr id="13" name="Rounded Rectangle 12"/>
-          <p:cNvSpPr/>
-          <p:nvPr/>
-        </p:nvSpPr>
-        <p:spPr>
-          <a:xfrm>
-            <a:off x="7848600" y="952500"/>
-            <a:ext cx="2819400" cy="1023937"/>
-          </a:xfrm>
-          <a:prstGeom prst="roundRect">
-            <a:avLst>
-              <a:gd name="adj" fmla="val 8000"/>
-            </a:avLst>
-          </a:prstGeom>
-          <a:solidFill>
-            <a:srgbClr val="FFFFFF"/>
-          </a:solidFill>
-          <a:ln w="12700">
-            <a:solidFill>
-              <a:srgbClr val="2563EB"/>
-            </a:solidFill>
-          </a:ln>
-          <a:effectLst/>
-        </p:spPr>
-        <p:style>
-          <a:lnRef idx="1">
-            <a:schemeClr val="accent1"/>
-          </a:lnRef>
-          <a:fillRef idx="3">
-            <a:schemeClr val="accent1"/>
-          </a:fillRef>
-          <a:effectRef idx="2">
-            <a:schemeClr val="accent1"/>
-          </a:effectRef>
-          <a:fontRef idx="minor">
-            <a:schemeClr val="lt1"/>
-          </a:fontRef>
-        </p:style>
-        <p:txBody>
-          <a:bodyPr rtlCol="0" anchor="ctr"/>
-          <a:lstStyle/>
-          <a:p>
-            <a:pPr algn="ctr"/>
-          </a:p>
-        </p:txBody>
-      </p:sp>
-      <p:sp>
-        <p:nvSpPr>
-          <p:cNvPr id="14" name="Rectangle 13"/>
-          <p:cNvSpPr/>
-          <p:nvPr/>
-        </p:nvSpPr>
-        <p:spPr>
-          <a:xfrm>
-            <a:off x="7848600" y="952500"/>
-            <a:ext cx="47625" cy="1023937"/>
-          </a:xfrm>
-          <a:prstGeom prst="rect">
-            <a:avLst/>
-          </a:prstGeom>
-          <a:solidFill>
-            <a:srgbClr val="2563EB"/>
-          </a:solidFill>
-          <a:ln>
-            <a:noFill/>
-          </a:ln>
-          <a:effectLst/>
-        </p:spPr>
-        <p:style>
-          <a:lnRef idx="1">
-            <a:schemeClr val="accent1"/>
-          </a:lnRef>
-          <a:fillRef idx="3">
-            <a:schemeClr val="accent1"/>
-          </a:fillRef>
-          <a:effectRef idx="2">
-            <a:schemeClr val="accent1"/>
-          </a:effectRef>
-          <a:fontRef idx="minor">
-            <a:schemeClr val="lt1"/>
-          </a:fontRef>
-        </p:style>
-        <p:txBody>
-          <a:bodyPr rtlCol="0" anchor="ctr"/>
-          <a:lstStyle/>
-          <a:p>
-            <a:pPr algn="ctr"/>
-          </a:p>
-        </p:txBody>
-      </p:sp>
-      <p:sp>
-        <p:nvSpPr>
-          <p:cNvPr id="15" name="TextBox 14"/>
-          <p:cNvSpPr txBox="1"/>
-          <p:nvPr/>
-        </p:nvSpPr>
-        <p:spPr>
-          <a:xfrm>
-            <a:off x="7981950" y="952500"/>
-            <a:ext cx="2590800" cy="1023937"/>
-          </a:xfrm>
-          <a:prstGeom prst="rect">
-            <a:avLst/>
-          </a:prstGeom>
-          <a:noFill/>
-        </p:spPr>
-        <p:txBody>
-          <a:bodyPr wrap="square" anchor="ctr">
-            <a:spAutoFit/>
-          </a:bodyPr>
-          <a:lstStyle/>
-          <a:p>
-            <a:pPr algn="l">
-              <a:lnSpc>
-                <a:spcPct val="100000"/>
-              </a:lnSpc>
-            </a:pPr>
-            <a:r>
-              <a:rPr sz="1200" b="1">
-                <a:solidFill>
-                  <a:srgbClr val="475569"/>
-                </a:solidFill>
-                <a:latin typeface="PingFang SC"/>
-              </a:rPr>
-              <a:t>Embedding</a:t>
-            </a:r>
-          </a:p>
-        </p:txBody>
-      </p:sp>
-      <p:cxnSp>
-        <p:nvCxnSpPr>
-          <p:cNvPr id="16" name="Connector 15"/>
-          <p:cNvCxnSpPr/>
-          <p:nvPr/>
-        </p:nvCxnSpPr>
-        <p:spPr>
-          <a:xfrm>
-            <a:off x="6096000" y="2033587"/>
-            <a:ext cx="0" cy="152400"/>
-          </a:xfrm>
-          <a:prstGeom prst="line">
-            <a:avLst/>
-          </a:prstGeom>
-          <a:ln w="15240">
-            <a:solidFill>
-              <a:srgbClr val="94A3B8"/>
-            </a:solidFill>
-          </a:ln>
-        </p:spPr>
-        <p:style>
-          <a:lnRef idx="2">
-            <a:schemeClr val="accent1"/>
-          </a:lnRef>
-          <a:fillRef idx="0">
-            <a:schemeClr val="accent1"/>
-          </a:fillRef>
-          <a:effectRef idx="1">
-            <a:schemeClr val="accent1"/>
-          </a:effectRef>
-          <a:fontRef idx="minor">
-            <a:schemeClr val="tx1"/>
-          </a:fontRef>
-        </p:style>
-      </p:cxnSp>
-      <p:sp>
-        <p:nvSpPr>
-          <p:cNvPr id="17" name="Isosceles Triangle 16"/>
-          <p:cNvSpPr/>
-          <p:nvPr/>
-        </p:nvSpPr>
-        <p:spPr>
-          <a:xfrm rot="10800000">
-            <a:off x="6053138" y="2100263"/>
-            <a:ext cx="85725" cy="85725"/>
-          </a:xfrm>
-          <a:prstGeom prst="triangle">
-            <a:avLst/>
-          </a:prstGeom>
-          <a:solidFill>
-            <a:srgbClr val="94A3B8"/>
-          </a:solidFill>
-          <a:ln>
-            <a:noFill/>
-          </a:ln>
-          <a:effectLst/>
-        </p:spPr>
-        <p:style>
-          <a:lnRef idx="1">
-            <a:schemeClr val="accent1"/>
-          </a:lnRef>
-          <a:fillRef idx="3">
-            <a:schemeClr val="accent1"/>
-          </a:fillRef>
-          <a:effectRef idx="2">
-            <a:schemeClr val="accent1"/>
-          </a:effectRef>
-          <a:fontRef idx="minor">
-            <a:schemeClr val="lt1"/>
-          </a:fontRef>
-        </p:style>
-        <p:txBody>
-          <a:bodyPr rtlCol="0" anchor="ctr"/>
-          <a:lstStyle/>
-          <a:p>
-            <a:pPr algn="ctr"/>
-          </a:p>
-        </p:txBody>
-      </p:sp>
-      <p:sp>
-        <p:nvSpPr>
-          <p:cNvPr id="18" name="TextBox 17"/>
-          <p:cNvSpPr txBox="1"/>
-          <p:nvPr/>
-        </p:nvSpPr>
-        <p:spPr>
-          <a:xfrm>
-            <a:off x="6248400" y="1976437"/>
-            <a:ext cx="2095500" cy="247650"/>
-          </a:xfrm>
-          <a:prstGeom prst="rect">
-            <a:avLst/>
-          </a:prstGeom>
-          <a:noFill/>
-        </p:spPr>
-        <p:txBody>
-          <a:bodyPr wrap="square" anchor="ctr">
-            <a:spAutoFit/>
-          </a:bodyPr>
-          <a:lstStyle/>
-          <a:p>
-            <a:pPr algn="l">
-              <a:lnSpc>
-                <a:spcPct val="100000"/>
-              </a:lnSpc>
-            </a:pPr>
-            <a:r>
-              <a:rPr sz="1000" b="0">
-                <a:solidFill>
-                  <a:srgbClr val="94A3B8"/>
-                </a:solidFill>
-                <a:latin typeface="PingFang SC"/>
-              </a:rPr>
-              <a:t>入库</a:t>
-            </a:r>
-          </a:p>
-        </p:txBody>
-      </p:sp>
-      <p:sp>
-        <p:nvSpPr>
-          <p:cNvPr id="19" name="Rounded Rectangle 18"/>
-          <p:cNvSpPr/>
-          <p:nvPr/>
-        </p:nvSpPr>
-        <p:spPr>
-          <a:xfrm>
-            <a:off x="1847850" y="2185987"/>
-            <a:ext cx="8877300" cy="1100137"/>
-          </a:xfrm>
-          <a:prstGeom prst="roundRect">
-            <a:avLst>
-              <a:gd name="adj" fmla="val 8000"/>
-            </a:avLst>
-          </a:prstGeom>
-          <a:solidFill>
-            <a:srgbClr val="F1F5F9"/>
-          </a:solidFill>
-          <a:ln>
-            <a:noFill/>
-          </a:ln>
-          <a:effectLst/>
-        </p:spPr>
-        <p:style>
-          <a:lnRef idx="1">
-            <a:schemeClr val="accent1"/>
-          </a:lnRef>
-          <a:fillRef idx="3">
-            <a:schemeClr val="accent1"/>
-          </a:fillRef>
-          <a:effectRef idx="2">
-            <a:schemeClr val="accent1"/>
-          </a:effectRef>
-          <a:fontRef idx="minor">
-            <a:schemeClr val="lt1"/>
-          </a:fontRef>
-        </p:style>
-        <p:txBody>
-          <a:bodyPr rtlCol="0" anchor="ctr"/>
-          <a:lstStyle/>
-          <a:p>
-            <a:pPr algn="ctr"/>
-          </a:p>
-        </p:txBody>
-      </p:sp>
-      <p:sp>
-        <p:nvSpPr>
-          <p:cNvPr id="20" name="Rounded Rectangle 19"/>
-          <p:cNvSpPr/>
-          <p:nvPr/>
-        </p:nvSpPr>
-        <p:spPr>
-          <a:xfrm>
-            <a:off x="1905000" y="2224087"/>
-            <a:ext cx="2819400" cy="1023937"/>
-          </a:xfrm>
-          <a:prstGeom prst="roundRect">
-            <a:avLst>
-              <a:gd name="adj" fmla="val 8000"/>
-            </a:avLst>
-          </a:prstGeom>
-          <a:solidFill>
-            <a:srgbClr val="FFFFFF"/>
-          </a:solidFill>
-          <a:ln w="12700">
-            <a:solidFill>
-              <a:srgbClr val="14B8A6"/>
-            </a:solidFill>
-          </a:ln>
-          <a:effectLst/>
-        </p:spPr>
-        <p:style>
-          <a:lnRef idx="1">
-            <a:schemeClr val="accent1"/>
-          </a:lnRef>
-          <a:fillRef idx="3">
-            <a:schemeClr val="accent1"/>
-          </a:fillRef>
-          <a:effectRef idx="2">
-            <a:schemeClr val="accent1"/>
-          </a:effectRef>
-          <a:fontRef idx="minor">
-            <a:schemeClr val="lt1"/>
-          </a:fontRef>
-        </p:style>
-        <p:txBody>
-          <a:bodyPr rtlCol="0" anchor="ctr"/>
-          <a:lstStyle/>
-          <a:p>
-            <a:pPr algn="ctr"/>
-          </a:p>
-        </p:txBody>
-      </p:sp>
-      <p:sp>
-        <p:nvSpPr>
-          <p:cNvPr id="21" name="Rectangle 20"/>
-          <p:cNvSpPr/>
-          <p:nvPr/>
-        </p:nvSpPr>
-        <p:spPr>
-          <a:xfrm>
-            <a:off x="1905000" y="2224087"/>
-            <a:ext cx="47625" cy="1023937"/>
-          </a:xfrm>
-          <a:prstGeom prst="rect">
-            <a:avLst/>
-          </a:prstGeom>
-          <a:solidFill>
-            <a:srgbClr val="14B8A6"/>
-          </a:solidFill>
-          <a:ln>
-            <a:noFill/>
-          </a:ln>
-          <a:effectLst/>
-        </p:spPr>
-        <p:style>
-          <a:lnRef idx="1">
-            <a:schemeClr val="accent1"/>
-          </a:lnRef>
-          <a:fillRef idx="3">
-            <a:schemeClr val="accent1"/>
-          </a:fillRef>
-          <a:effectRef idx="2">
-            <a:schemeClr val="accent1"/>
-          </a:effectRef>
-          <a:fontRef idx="minor">
-            <a:schemeClr val="lt1"/>
-          </a:fontRef>
-        </p:style>
-        <p:txBody>
-          <a:bodyPr rtlCol="0" anchor="ctr"/>
-          <a:lstStyle/>
-          <a:p>
-            <a:pPr algn="ctr"/>
-          </a:p>
-        </p:txBody>
-      </p:sp>
-      <p:sp>
-        <p:nvSpPr>
-          <p:cNvPr id="22" name="TextBox 21"/>
-          <p:cNvSpPr txBox="1"/>
-          <p:nvPr/>
-        </p:nvSpPr>
-        <p:spPr>
-          <a:xfrm>
-            <a:off x="2038350" y="2224087"/>
-            <a:ext cx="2590800" cy="1023937"/>
-          </a:xfrm>
-          <a:prstGeom prst="rect">
-            <a:avLst/>
-          </a:prstGeom>
-          <a:noFill/>
-        </p:spPr>
-        <p:txBody>
-          <a:bodyPr wrap="square" anchor="ctr">
-            <a:spAutoFit/>
-          </a:bodyPr>
-          <a:lstStyle/>
-          <a:p>
-            <a:pPr algn="l">
-              <a:lnSpc>
-                <a:spcPct val="100000"/>
-              </a:lnSpc>
-            </a:pPr>
-            <a:r>
-              <a:rPr sz="1200" b="1">
-                <a:solidFill>
-                  <a:srgbClr val="475569"/>
-                </a:solidFill>
-                <a:latin typeface="PingFang SC"/>
-              </a:rPr>
-              <a:t>存储:Milvus 向量</a:t>
-            </a:r>
-          </a:p>
-        </p:txBody>
-      </p:sp>
-      <p:sp>
-        <p:nvSpPr>
-          <p:cNvPr id="23" name="Rounded Rectangle 22"/>
-          <p:cNvSpPr/>
-          <p:nvPr/>
-        </p:nvSpPr>
-        <p:spPr>
-          <a:xfrm>
-            <a:off x="4876800" y="2224087"/>
-            <a:ext cx="2819400" cy="1023937"/>
-          </a:xfrm>
-          <a:prstGeom prst="roundRect">
-            <a:avLst>
-              <a:gd name="adj" fmla="val 8000"/>
-            </a:avLst>
-          </a:prstGeom>
-          <a:solidFill>
-            <a:srgbClr val="FFFFFF"/>
-          </a:solidFill>
-          <a:ln w="12700">
-            <a:solidFill>
-              <a:srgbClr val="14B8A6"/>
-            </a:solidFill>
-          </a:ln>
-          <a:effectLst/>
-        </p:spPr>
-        <p:style>
-          <a:lnRef idx="1">
-            <a:schemeClr val="accent1"/>
-          </a:lnRef>
-          <a:fillRef idx="3">
-            <a:schemeClr val="accent1"/>
-          </a:fillRef>
-          <a:effectRef idx="2">
-            <a:schemeClr val="accent1"/>
-          </a:effectRef>
-          <a:fontRef idx="minor">
-            <a:schemeClr val="lt1"/>
-          </a:fontRef>
-        </p:style>
-        <p:txBody>
-          <a:bodyPr rtlCol="0" anchor="ctr"/>
-          <a:lstStyle/>
-          <a:p>
-            <a:pPr algn="ctr"/>
-          </a:p>
-        </p:txBody>
-      </p:sp>
-      <p:sp>
-        <p:nvSpPr>
-          <p:cNvPr id="24" name="Rectangle 23"/>
-          <p:cNvSpPr/>
-          <p:nvPr/>
-        </p:nvSpPr>
-        <p:spPr>
-          <a:xfrm>
-            <a:off x="4876800" y="2224087"/>
-            <a:ext cx="47625" cy="1023937"/>
-          </a:xfrm>
-          <a:prstGeom prst="rect">
-            <a:avLst/>
-          </a:prstGeom>
-          <a:solidFill>
-            <a:srgbClr val="14B8A6"/>
-          </a:solidFill>
-          <a:ln>
-            <a:noFill/>
-          </a:ln>
-          <a:effectLst/>
-        </p:spPr>
-        <p:style>
-          <a:lnRef idx="1">
-            <a:schemeClr val="accent1"/>
-          </a:lnRef>
-          <a:fillRef idx="3">
-            <a:schemeClr val="accent1"/>
-          </a:fillRef>
-          <a:effectRef idx="2">
-            <a:schemeClr val="accent1"/>
-          </a:effectRef>
-          <a:fontRef idx="minor">
-            <a:schemeClr val="lt1"/>
-          </a:fontRef>
-        </p:style>
-        <p:txBody>
-          <a:bodyPr rtlCol="0" anchor="ctr"/>
-          <a:lstStyle/>
-          <a:p>
-            <a:pPr algn="ctr"/>
-          </a:p>
-        </p:txBody>
-      </p:sp>
-      <p:sp>
-        <p:nvSpPr>
-          <p:cNvPr id="25" name="TextBox 24"/>
-          <p:cNvSpPr txBox="1"/>
-          <p:nvPr/>
-        </p:nvSpPr>
-        <p:spPr>
-          <a:xfrm>
-            <a:off x="5010150" y="2224087"/>
-            <a:ext cx="2590800" cy="1023937"/>
-          </a:xfrm>
-          <a:prstGeom prst="rect">
-            <a:avLst/>
-          </a:prstGeom>
-          <a:noFill/>
-        </p:spPr>
-        <p:txBody>
-          <a:bodyPr wrap="square" anchor="ctr">
-            <a:spAutoFit/>
-          </a:bodyPr>
-          <a:lstStyle/>
-          <a:p>
-            <a:pPr algn="l">
-              <a:lnSpc>
-                <a:spcPct val="100000"/>
-              </a:lnSpc>
-            </a:pPr>
-            <a:r>
-              <a:rPr sz="1200" b="1">
-                <a:solidFill>
-                  <a:srgbClr val="475569"/>
-                </a:solidFill>
-                <a:latin typeface="PingFang SC"/>
-              </a:rPr>
-              <a:t>BM25 索引</a:t>
-            </a:r>
-          </a:p>
-        </p:txBody>
-      </p:sp>
-      <p:sp>
-        <p:nvSpPr>
-          <p:cNvPr id="26" name="Rounded Rectangle 25"/>
-          <p:cNvSpPr/>
-          <p:nvPr/>
-        </p:nvSpPr>
-        <p:spPr>
-          <a:xfrm>
-            <a:off x="7848600" y="2224087"/>
-            <a:ext cx="2819400" cy="1023937"/>
-          </a:xfrm>
-          <a:prstGeom prst="roundRect">
-            <a:avLst>
-              <a:gd name="adj" fmla="val 8000"/>
-            </a:avLst>
-          </a:prstGeom>
-          <a:solidFill>
-            <a:srgbClr val="FFFFFF"/>
-          </a:solidFill>
-          <a:ln w="12700">
-            <a:solidFill>
-              <a:srgbClr val="14B8A6"/>
-            </a:solidFill>
-          </a:ln>
-          <a:effectLst/>
-        </p:spPr>
-        <p:style>
-          <a:lnRef idx="1">
-            <a:schemeClr val="accent1"/>
-          </a:lnRef>
-          <a:fillRef idx="3">
-            <a:schemeClr val="accent1"/>
-          </a:fillRef>
-          <a:effectRef idx="2">
-            <a:schemeClr val="accent1"/>
-          </a:effectRef>
-          <a:fontRef idx="minor">
-            <a:schemeClr val="lt1"/>
-          </a:fontRef>
-        </p:style>
-        <p:txBody>
-          <a:bodyPr rtlCol="0" anchor="ctr"/>
-          <a:lstStyle/>
-          <a:p>
-            <a:pPr algn="ctr"/>
-          </a:p>
-        </p:txBody>
-      </p:sp>
-      <p:sp>
-        <p:nvSpPr>
-          <p:cNvPr id="27" name="Rectangle 26"/>
-          <p:cNvSpPr/>
-          <p:nvPr/>
-        </p:nvSpPr>
-        <p:spPr>
-          <a:xfrm>
-            <a:off x="7848600" y="2224087"/>
-            <a:ext cx="47625" cy="1023937"/>
-          </a:xfrm>
-          <a:prstGeom prst="rect">
-            <a:avLst/>
-          </a:prstGeom>
-          <a:solidFill>
-            <a:srgbClr val="14B8A6"/>
-          </a:solidFill>
-          <a:ln>
-            <a:noFill/>
-          </a:ln>
-          <a:effectLst/>
-        </p:spPr>
-        <p:style>
-          <a:lnRef idx="1">
-            <a:schemeClr val="accent1"/>
-          </a:lnRef>
-          <a:fillRef idx="3">
-            <a:schemeClr val="accent1"/>
-          </a:fillRef>
-          <a:effectRef idx="2">
-            <a:schemeClr val="accent1"/>
-          </a:effectRef>
-          <a:fontRef idx="minor">
-            <a:schemeClr val="lt1"/>
-          </a:fontRef>
-        </p:style>
-        <p:txBody>
-          <a:bodyPr rtlCol="0" anchor="ctr"/>
-          <a:lstStyle/>
-          <a:p>
-            <a:pPr algn="ctr"/>
-          </a:p>
-        </p:txBody>
-      </p:sp>
-      <p:sp>
-        <p:nvSpPr>
-          <p:cNvPr id="28" name="TextBox 27"/>
-          <p:cNvSpPr txBox="1"/>
-          <p:nvPr/>
-        </p:nvSpPr>
-        <p:spPr>
-          <a:xfrm>
-            <a:off x="7981950" y="2224087"/>
-            <a:ext cx="2590800" cy="1023937"/>
-          </a:xfrm>
-          <a:prstGeom prst="rect">
-            <a:avLst/>
-          </a:prstGeom>
-          <a:noFill/>
-        </p:spPr>
-        <p:txBody>
-          <a:bodyPr wrap="square" anchor="ctr">
-            <a:spAutoFit/>
-          </a:bodyPr>
-          <a:lstStyle/>
-          <a:p>
-            <a:pPr algn="l">
-              <a:lnSpc>
-                <a:spcPct val="100000"/>
-              </a:lnSpc>
-            </a:pPr>
-            <a:r>
-              <a:rPr sz="1200" b="1">
-                <a:solidFill>
-                  <a:srgbClr val="475569"/>
-                </a:solidFill>
-                <a:latin typeface="PingFang SC"/>
-              </a:rPr>
-              <a:t>元数据</a:t>
-            </a:r>
-          </a:p>
-        </p:txBody>
-      </p:sp>
-      <p:cxnSp>
-        <p:nvCxnSpPr>
-          <p:cNvPr id="29" name="Connector 28"/>
-          <p:cNvCxnSpPr/>
-          <p:nvPr/>
-        </p:nvCxnSpPr>
-        <p:spPr>
-          <a:xfrm>
-            <a:off x="6096000" y="3305174"/>
-            <a:ext cx="0" cy="152400"/>
-          </a:xfrm>
-          <a:prstGeom prst="line">
-            <a:avLst/>
-          </a:prstGeom>
-          <a:ln w="15240">
-            <a:solidFill>
-              <a:srgbClr val="94A3B8"/>
-            </a:solidFill>
-          </a:ln>
-        </p:spPr>
-        <p:style>
-          <a:lnRef idx="2">
-            <a:schemeClr val="accent1"/>
-          </a:lnRef>
-          <a:fillRef idx="0">
-            <a:schemeClr val="accent1"/>
-          </a:fillRef>
-          <a:effectRef idx="1">
-            <a:schemeClr val="accent1"/>
-          </a:effectRef>
-          <a:fontRef idx="minor">
-            <a:schemeClr val="tx1"/>
-          </a:fontRef>
-        </p:style>
-      </p:cxnSp>
-      <p:sp>
-        <p:nvSpPr>
-          <p:cNvPr id="30" name="Isosceles Triangle 29"/>
-          <p:cNvSpPr/>
-          <p:nvPr/>
-        </p:nvSpPr>
-        <p:spPr>
-          <a:xfrm rot="10800000">
-            <a:off x="6053138" y="3371850"/>
-            <a:ext cx="85725" cy="85725"/>
-          </a:xfrm>
-          <a:prstGeom prst="triangle">
-            <a:avLst/>
-          </a:prstGeom>
-          <a:solidFill>
-            <a:srgbClr val="94A3B8"/>
-          </a:solidFill>
-          <a:ln>
-            <a:noFill/>
-          </a:ln>
-          <a:effectLst/>
-        </p:spPr>
-        <p:style>
-          <a:lnRef idx="1">
-            <a:schemeClr val="accent1"/>
-          </a:lnRef>
-          <a:fillRef idx="3">
-            <a:schemeClr val="accent1"/>
-          </a:fillRef>
-          <a:effectRef idx="2">
-            <a:schemeClr val="accent1"/>
-          </a:effectRef>
-          <a:fontRef idx="minor">
-            <a:schemeClr val="lt1"/>
-          </a:fontRef>
-        </p:style>
-        <p:txBody>
-          <a:bodyPr rtlCol="0" anchor="ctr"/>
-          <a:lstStyle/>
-          <a:p>
-            <a:pPr algn="ctr"/>
-          </a:p>
-        </p:txBody>
-      </p:sp>
-      <p:sp>
-        <p:nvSpPr>
-          <p:cNvPr id="31" name="TextBox 30"/>
-          <p:cNvSpPr txBox="1"/>
-          <p:nvPr/>
-        </p:nvSpPr>
-        <p:spPr>
-          <a:xfrm>
-            <a:off x="6248400" y="3248024"/>
-            <a:ext cx="2095500" cy="247650"/>
-          </a:xfrm>
-          <a:prstGeom prst="rect">
-            <a:avLst/>
-          </a:prstGeom>
-          <a:noFill/>
-        </p:spPr>
-        <p:txBody>
-          <a:bodyPr wrap="square" anchor="ctr">
-            <a:spAutoFit/>
-          </a:bodyPr>
-          <a:lstStyle/>
-          <a:p>
-            <a:pPr algn="l">
-              <a:lnSpc>
-                <a:spcPct val="100000"/>
-              </a:lnSpc>
-            </a:pPr>
-            <a:r>
-              <a:rPr sz="1000" b="0">
-                <a:solidFill>
-                  <a:srgbClr val="94A3B8"/>
-                </a:solidFill>
-                <a:latin typeface="PingFang SC"/>
-              </a:rPr>
-              <a:t>查询</a:t>
-            </a:r>
-          </a:p>
-        </p:txBody>
-      </p:sp>
-      <p:sp>
-        <p:nvSpPr>
-          <p:cNvPr id="32" name="Rounded Rectangle 31"/>
-          <p:cNvSpPr/>
-          <p:nvPr/>
-        </p:nvSpPr>
-        <p:spPr>
-          <a:xfrm>
-            <a:off x="1847850" y="3457574"/>
-            <a:ext cx="8877300" cy="1100137"/>
-          </a:xfrm>
-          <a:prstGeom prst="roundRect">
-            <a:avLst>
-              <a:gd name="adj" fmla="val 8000"/>
-            </a:avLst>
-          </a:prstGeom>
-          <a:solidFill>
-            <a:srgbClr val="F1F5F9"/>
-          </a:solidFill>
-          <a:ln>
-            <a:noFill/>
-          </a:ln>
-          <a:effectLst/>
-        </p:spPr>
-        <p:style>
-          <a:lnRef idx="1">
-            <a:schemeClr val="accent1"/>
-          </a:lnRef>
-          <a:fillRef idx="3">
-            <a:schemeClr val="accent1"/>
-          </a:fillRef>
-          <a:effectRef idx="2">
-            <a:schemeClr val="accent1"/>
-          </a:effectRef>
-          <a:fontRef idx="minor">
-            <a:schemeClr val="lt1"/>
-          </a:fontRef>
-        </p:style>
-        <p:txBody>
-          <a:bodyPr rtlCol="0" anchor="ctr"/>
-          <a:lstStyle/>
-          <a:p>
-            <a:pPr algn="ctr"/>
-          </a:p>
-        </p:txBody>
-      </p:sp>
-      <p:sp>
-        <p:nvSpPr>
-          <p:cNvPr id="33" name="Rounded Rectangle 32"/>
-          <p:cNvSpPr/>
-          <p:nvPr/>
-        </p:nvSpPr>
-        <p:spPr>
-          <a:xfrm>
-            <a:off x="1905000" y="3495674"/>
-            <a:ext cx="4305300" cy="1023937"/>
-          </a:xfrm>
-          <a:prstGeom prst="roundRect">
-            <a:avLst>
-              <a:gd name="adj" fmla="val 8000"/>
-            </a:avLst>
-          </a:prstGeom>
-          <a:solidFill>
-            <a:srgbClr val="FFFFFF"/>
-          </a:solidFill>
-          <a:ln w="12700">
-            <a:solidFill>
-              <a:srgbClr val="8B5CF6"/>
-            </a:solidFill>
-          </a:ln>
-          <a:effectLst/>
-        </p:spPr>
-        <p:style>
-          <a:lnRef idx="1">
-            <a:schemeClr val="accent1"/>
-          </a:lnRef>
-          <a:fillRef idx="3">
-            <a:schemeClr val="accent1"/>
-          </a:fillRef>
-          <a:effectRef idx="2">
-            <a:schemeClr val="accent1"/>
-          </a:effectRef>
-          <a:fontRef idx="minor">
-            <a:schemeClr val="lt1"/>
-          </a:fontRef>
-        </p:style>
-        <p:txBody>
-          <a:bodyPr rtlCol="0" anchor="ctr"/>
-          <a:lstStyle/>
-          <a:p>
-            <a:pPr algn="ctr"/>
-          </a:p>
-        </p:txBody>
-      </p:sp>
-      <p:sp>
-        <p:nvSpPr>
-          <p:cNvPr id="34" name="Rectangle 33"/>
-          <p:cNvSpPr/>
-          <p:nvPr/>
-        </p:nvSpPr>
-        <p:spPr>
-          <a:xfrm>
-            <a:off x="1905000" y="3495674"/>
-            <a:ext cx="47625" cy="1023937"/>
-          </a:xfrm>
-          <a:prstGeom prst="rect">
-            <a:avLst/>
-          </a:prstGeom>
-          <a:solidFill>
-            <a:srgbClr val="8B5CF6"/>
-          </a:solidFill>
-          <a:ln>
-            <a:noFill/>
-          </a:ln>
-          <a:effectLst/>
-        </p:spPr>
-        <p:style>
-          <a:lnRef idx="1">
-            <a:schemeClr val="accent1"/>
-          </a:lnRef>
-          <a:fillRef idx="3">
-            <a:schemeClr val="accent1"/>
-          </a:fillRef>
-          <a:effectRef idx="2">
-            <a:schemeClr val="accent1"/>
-          </a:effectRef>
-          <a:fontRef idx="minor">
-            <a:schemeClr val="lt1"/>
-          </a:fontRef>
-        </p:style>
-        <p:txBody>
-          <a:bodyPr rtlCol="0" anchor="ctr"/>
-          <a:lstStyle/>
-          <a:p>
-            <a:pPr algn="ctr"/>
-          </a:p>
-        </p:txBody>
-      </p:sp>
-      <p:sp>
-        <p:nvSpPr>
-          <p:cNvPr id="35" name="TextBox 34"/>
-          <p:cNvSpPr txBox="1"/>
-          <p:nvPr/>
-        </p:nvSpPr>
-        <p:spPr>
-          <a:xfrm>
-            <a:off x="2038350" y="3495674"/>
-            <a:ext cx="4076700" cy="1023937"/>
-          </a:xfrm>
-          <a:prstGeom prst="rect">
-            <a:avLst/>
-          </a:prstGeom>
-          <a:noFill/>
-        </p:spPr>
-        <p:txBody>
-          <a:bodyPr wrap="square" anchor="ctr">
-            <a:spAutoFit/>
-          </a:bodyPr>
-          <a:lstStyle/>
-          <a:p>
-            <a:pPr algn="l">
-              <a:lnSpc>
-                <a:spcPct val="100000"/>
-              </a:lnSpc>
-            </a:pPr>
-            <a:r>
-              <a:rPr sz="1200" b="1">
-                <a:solidFill>
-                  <a:srgbClr val="475569"/>
-                </a:solidFill>
-                <a:latin typeface="PingFang SC"/>
-              </a:rPr>
-              <a:t>检索:Hybrid 双通道</a:t>
-            </a:r>
-          </a:p>
-        </p:txBody>
-      </p:sp>
-      <p:sp>
-        <p:nvSpPr>
-          <p:cNvPr id="36" name="Rounded Rectangle 35"/>
-          <p:cNvSpPr/>
-          <p:nvPr/>
-        </p:nvSpPr>
-        <p:spPr>
-          <a:xfrm>
-            <a:off x="6362700" y="3495674"/>
-            <a:ext cx="4305300" cy="1023937"/>
-          </a:xfrm>
-          <a:prstGeom prst="roundRect">
-            <a:avLst>
-              <a:gd name="adj" fmla="val 8000"/>
-            </a:avLst>
-          </a:prstGeom>
-          <a:solidFill>
-            <a:srgbClr val="FFFFFF"/>
-          </a:solidFill>
-          <a:ln w="12700">
-            <a:solidFill>
-              <a:srgbClr val="8B5CF6"/>
-            </a:solidFill>
-          </a:ln>
-          <a:effectLst/>
-        </p:spPr>
-        <p:style>
-          <a:lnRef idx="1">
-            <a:schemeClr val="accent1"/>
-          </a:lnRef>
-          <a:fillRef idx="3">
-            <a:schemeClr val="accent1"/>
-          </a:fillRef>
-          <a:effectRef idx="2">
-            <a:schemeClr val="accent1"/>
-          </a:effectRef>
-          <a:fontRef idx="minor">
-            <a:schemeClr val="lt1"/>
-          </a:fontRef>
-        </p:style>
-        <p:txBody>
-          <a:bodyPr rtlCol="0" anchor="ctr"/>
-          <a:lstStyle/>
-          <a:p>
-            <a:pPr algn="ctr"/>
-          </a:p>
-        </p:txBody>
-      </p:sp>
-      <p:sp>
-        <p:nvSpPr>
-          <p:cNvPr id="37" name="Rectangle 36"/>
-          <p:cNvSpPr/>
-          <p:nvPr/>
-        </p:nvSpPr>
-        <p:spPr>
-          <a:xfrm>
-            <a:off x="6362700" y="3495674"/>
-            <a:ext cx="47625" cy="1023937"/>
-          </a:xfrm>
-          <a:prstGeom prst="rect">
-            <a:avLst/>
-          </a:prstGeom>
-          <a:solidFill>
-            <a:srgbClr val="8B5CF6"/>
-          </a:solidFill>
-          <a:ln>
-            <a:noFill/>
-          </a:ln>
-          <a:effectLst/>
-        </p:spPr>
-        <p:style>
-          <a:lnRef idx="1">
-            <a:schemeClr val="accent1"/>
-          </a:lnRef>
-          <a:fillRef idx="3">
-            <a:schemeClr val="accent1"/>
-          </a:fillRef>
-          <a:effectRef idx="2">
-            <a:schemeClr val="accent1"/>
-          </a:effectRef>
-          <a:fontRef idx="minor">
-            <a:schemeClr val="lt1"/>
-          </a:fontRef>
-        </p:style>
-        <p:txBody>
-          <a:bodyPr rtlCol="0" anchor="ctr"/>
-          <a:lstStyle/>
-          <a:p>
-            <a:pPr algn="ctr"/>
-          </a:p>
-        </p:txBody>
-      </p:sp>
-      <p:sp>
-        <p:nvSpPr>
-          <p:cNvPr id="38" name="TextBox 37"/>
-          <p:cNvSpPr txBox="1"/>
-          <p:nvPr/>
-        </p:nvSpPr>
-        <p:spPr>
-          <a:xfrm>
-            <a:off x="6496050" y="3495674"/>
-            <a:ext cx="4076700" cy="1023937"/>
-          </a:xfrm>
-          <a:prstGeom prst="rect">
-            <a:avLst/>
-          </a:prstGeom>
-          <a:noFill/>
-        </p:spPr>
-        <p:txBody>
-          <a:bodyPr wrap="square" anchor="ctr">
-            <a:spAutoFit/>
-          </a:bodyPr>
-          <a:lstStyle/>
-          <a:p>
-            <a:pPr algn="l">
-              <a:lnSpc>
-                <a:spcPct val="100000"/>
-              </a:lnSpc>
-            </a:pPr>
-            <a:r>
-              <a:rPr sz="1200" b="1">
-                <a:solidFill>
-                  <a:srgbClr val="475569"/>
-                </a:solidFill>
-                <a:latin typeface="PingFang SC"/>
-              </a:rPr>
-              <a:t>RRF 融合</a:t>
-            </a:r>
-          </a:p>
-        </p:txBody>
-      </p:sp>
-      <p:cxnSp>
-        <p:nvCxnSpPr>
-          <p:cNvPr id="39" name="Connector 38"/>
-          <p:cNvCxnSpPr/>
-          <p:nvPr/>
-        </p:nvCxnSpPr>
-        <p:spPr>
-          <a:xfrm>
-            <a:off x="6096000" y="4576761"/>
-            <a:ext cx="0" cy="152400"/>
-          </a:xfrm>
-          <a:prstGeom prst="line">
-            <a:avLst/>
-          </a:prstGeom>
-          <a:ln w="15240">
-            <a:solidFill>
-              <a:srgbClr val="94A3B8"/>
-            </a:solidFill>
-          </a:ln>
-        </p:spPr>
-        <p:style>
-          <a:lnRef idx="2">
-            <a:schemeClr val="accent1"/>
-          </a:lnRef>
-          <a:fillRef idx="0">
-            <a:schemeClr val="accent1"/>
-          </a:fillRef>
-          <a:effectRef idx="1">
-            <a:schemeClr val="accent1"/>
-          </a:effectRef>
-          <a:fontRef idx="minor">
-            <a:schemeClr val="tx1"/>
-          </a:fontRef>
-        </p:style>
-      </p:cxnSp>
-      <p:sp>
-        <p:nvSpPr>
-          <p:cNvPr id="40" name="Isosceles Triangle 39"/>
-          <p:cNvSpPr/>
-          <p:nvPr/>
-        </p:nvSpPr>
-        <p:spPr>
-          <a:xfrm rot="10800000">
-            <a:off x="6053138" y="4643437"/>
-            <a:ext cx="85725" cy="85725"/>
-          </a:xfrm>
-          <a:prstGeom prst="triangle">
-            <a:avLst/>
-          </a:prstGeom>
-          <a:solidFill>
-            <a:srgbClr val="94A3B8"/>
-          </a:solidFill>
-          <a:ln>
-            <a:noFill/>
-          </a:ln>
-          <a:effectLst/>
-        </p:spPr>
-        <p:style>
-          <a:lnRef idx="1">
-            <a:schemeClr val="accent1"/>
-          </a:lnRef>
-          <a:fillRef idx="3">
-            <a:schemeClr val="accent1"/>
-          </a:fillRef>
-          <a:effectRef idx="2">
-            <a:schemeClr val="accent1"/>
-          </a:effectRef>
-          <a:fontRef idx="minor">
-            <a:schemeClr val="lt1"/>
-          </a:fontRef>
-        </p:style>
-        <p:txBody>
-          <a:bodyPr rtlCol="0" anchor="ctr"/>
-          <a:lstStyle/>
-          <a:p>
-            <a:pPr algn="ctr"/>
-          </a:p>
-        </p:txBody>
-      </p:sp>
-      <p:sp>
-        <p:nvSpPr>
-          <p:cNvPr id="41" name="TextBox 40"/>
-          <p:cNvSpPr txBox="1"/>
-          <p:nvPr/>
-        </p:nvSpPr>
-        <p:spPr>
-          <a:xfrm>
-            <a:off x="6248400" y="4519611"/>
-            <a:ext cx="2095500" cy="247650"/>
-          </a:xfrm>
-          <a:prstGeom prst="rect">
-            <a:avLst/>
-          </a:prstGeom>
-          <a:noFill/>
-        </p:spPr>
-        <p:txBody>
-          <a:bodyPr wrap="square" anchor="ctr">
-            <a:spAutoFit/>
-          </a:bodyPr>
-          <a:lstStyle/>
-          <a:p>
-            <a:pPr algn="l">
-              <a:lnSpc>
-                <a:spcPct val="100000"/>
-              </a:lnSpc>
-            </a:pPr>
-            <a:r>
-              <a:rPr sz="1000" b="0">
-                <a:solidFill>
-                  <a:srgbClr val="94A3B8"/>
-                </a:solidFill>
-                <a:latin typeface="PingFang SC"/>
-              </a:rPr>
-              <a:t>溯源</a:t>
-            </a:r>
-          </a:p>
-        </p:txBody>
-      </p:sp>
-      <p:sp>
-        <p:nvSpPr>
-          <p:cNvPr id="42" name="Rounded Rectangle 41"/>
-          <p:cNvSpPr/>
-          <p:nvPr/>
-        </p:nvSpPr>
-        <p:spPr>
-          <a:xfrm>
-            <a:off x="1847850" y="4729161"/>
-            <a:ext cx="8877300" cy="1100137"/>
-          </a:xfrm>
-          <a:prstGeom prst="roundRect">
-            <a:avLst>
-              <a:gd name="adj" fmla="val 8000"/>
-            </a:avLst>
-          </a:prstGeom>
-          <a:solidFill>
-            <a:srgbClr val="F1F5F9"/>
-          </a:solidFill>
-          <a:ln>
-            <a:noFill/>
-          </a:ln>
-          <a:effectLst/>
-        </p:spPr>
-        <p:style>
-          <a:lnRef idx="1">
-            <a:schemeClr val="accent1"/>
-          </a:lnRef>
-          <a:fillRef idx="3">
-            <a:schemeClr val="accent1"/>
-          </a:fillRef>
-          <a:effectRef idx="2">
-            <a:schemeClr val="accent1"/>
-          </a:effectRef>
-          <a:fontRef idx="minor">
-            <a:schemeClr val="lt1"/>
-          </a:fontRef>
-        </p:style>
-        <p:txBody>
-          <a:bodyPr rtlCol="0" anchor="ctr"/>
-          <a:lstStyle/>
-          <a:p>
-            <a:pPr algn="ctr"/>
-          </a:p>
-        </p:txBody>
-      </p:sp>
-      <p:sp>
-        <p:nvSpPr>
-          <p:cNvPr id="43" name="Rounded Rectangle 42"/>
-          <p:cNvSpPr/>
-          <p:nvPr/>
-        </p:nvSpPr>
-        <p:spPr>
-          <a:xfrm>
-            <a:off x="1905000" y="4767261"/>
-            <a:ext cx="4305300" cy="1023937"/>
-          </a:xfrm>
-          <a:prstGeom prst="roundRect">
-            <a:avLst>
-              <a:gd name="adj" fmla="val 8000"/>
-            </a:avLst>
-          </a:prstGeom>
-          <a:solidFill>
-            <a:srgbClr val="FFFFFF"/>
-          </a:solidFill>
-          <a:ln w="12700">
-            <a:solidFill>
-              <a:srgbClr val="F59E0B"/>
-            </a:solidFill>
-          </a:ln>
-          <a:effectLst/>
-        </p:spPr>
-        <p:style>
-          <a:lnRef idx="1">
-            <a:schemeClr val="accent1"/>
-          </a:lnRef>
-          <a:fillRef idx="3">
-            <a:schemeClr val="accent1"/>
-          </a:fillRef>
-          <a:effectRef idx="2">
-            <a:schemeClr val="accent1"/>
-          </a:effectRef>
-          <a:fontRef idx="minor">
-            <a:schemeClr val="lt1"/>
-          </a:fontRef>
-        </p:style>
-        <p:txBody>
-          <a:bodyPr rtlCol="0" anchor="ctr"/>
-          <a:lstStyle/>
-          <a:p>
-            <a:pPr algn="ctr"/>
-          </a:p>
-        </p:txBody>
-      </p:sp>
-      <p:sp>
-        <p:nvSpPr>
-          <p:cNvPr id="44" name="Rectangle 43"/>
-          <p:cNvSpPr/>
-          <p:nvPr/>
-        </p:nvSpPr>
-        <p:spPr>
-          <a:xfrm>
-            <a:off x="1905000" y="4767261"/>
-            <a:ext cx="47625" cy="1023937"/>
-          </a:xfrm>
-          <a:prstGeom prst="rect">
-            <a:avLst/>
-          </a:prstGeom>
-          <a:solidFill>
-            <a:srgbClr val="F59E0B"/>
-          </a:solidFill>
-          <a:ln>
-            <a:noFill/>
-          </a:ln>
-          <a:effectLst/>
-        </p:spPr>
-        <p:style>
-          <a:lnRef idx="1">
-            <a:schemeClr val="accent1"/>
-          </a:lnRef>
-          <a:fillRef idx="3">
-            <a:schemeClr val="accent1"/>
-          </a:fillRef>
-          <a:effectRef idx="2">
-            <a:schemeClr val="accent1"/>
-          </a:effectRef>
-          <a:fontRef idx="minor">
-            <a:schemeClr val="lt1"/>
-          </a:fontRef>
-        </p:style>
-        <p:txBody>
-          <a:bodyPr rtlCol="0" anchor="ctr"/>
-          <a:lstStyle/>
-          <a:p>
-            <a:pPr algn="ctr"/>
-          </a:p>
-        </p:txBody>
-      </p:sp>
-      <p:sp>
-        <p:nvSpPr>
-          <p:cNvPr id="45" name="TextBox 44"/>
-          <p:cNvSpPr txBox="1"/>
-          <p:nvPr/>
-        </p:nvSpPr>
-        <p:spPr>
-          <a:xfrm>
-            <a:off x="2038350" y="4767261"/>
-            <a:ext cx="4076700" cy="1023937"/>
-          </a:xfrm>
-          <a:prstGeom prst="rect">
-            <a:avLst/>
-          </a:prstGeom>
-          <a:noFill/>
-        </p:spPr>
-        <p:txBody>
-          <a:bodyPr wrap="square" anchor="ctr">
-            <a:spAutoFit/>
-          </a:bodyPr>
-          <a:lstStyle/>
-          <a:p>
-            <a:pPr algn="l">
-              <a:lnSpc>
-                <a:spcPct val="100000"/>
-              </a:lnSpc>
-            </a:pPr>
-            <a:r>
-              <a:rPr sz="1200" b="1">
-                <a:solidFill>
-                  <a:srgbClr val="475569"/>
-                </a:solidFill>
-                <a:latin typeface="PingFang SC"/>
-              </a:rPr>
-              <a:t>后处理:Rerank</a:t>
-            </a:r>
-          </a:p>
-        </p:txBody>
-      </p:sp>
-      <p:sp>
-        <p:nvSpPr>
-          <p:cNvPr id="46" name="Rounded Rectangle 45"/>
-          <p:cNvSpPr/>
-          <p:nvPr/>
-        </p:nvSpPr>
-        <p:spPr>
-          <a:xfrm>
-            <a:off x="6362700" y="4767261"/>
-            <a:ext cx="4305300" cy="1023937"/>
-          </a:xfrm>
-          <a:prstGeom prst="roundRect">
-            <a:avLst>
-              <a:gd name="adj" fmla="val 8000"/>
-            </a:avLst>
-          </a:prstGeom>
-          <a:solidFill>
-            <a:srgbClr val="FFFFFF"/>
-          </a:solidFill>
-          <a:ln w="12700">
-            <a:solidFill>
-              <a:srgbClr val="F59E0B"/>
-            </a:solidFill>
-          </a:ln>
-          <a:effectLst/>
-        </p:spPr>
-        <p:style>
-          <a:lnRef idx="1">
-            <a:schemeClr val="accent1"/>
-          </a:lnRef>
-          <a:fillRef idx="3">
-            <a:schemeClr val="accent1"/>
-          </a:fillRef>
-          <a:effectRef idx="2">
-            <a:schemeClr val="accent1"/>
-          </a:effectRef>
-          <a:fontRef idx="minor">
-            <a:schemeClr val="lt1"/>
-          </a:fontRef>
-        </p:style>
-        <p:txBody>
-          <a:bodyPr rtlCol="0" anchor="ctr"/>
-          <a:lstStyle/>
-          <a:p>
-            <a:pPr algn="ctr"/>
-          </a:p>
-        </p:txBody>
-      </p:sp>
-      <p:sp>
-        <p:nvSpPr>
-          <p:cNvPr id="47" name="Rectangle 46"/>
-          <p:cNvSpPr/>
-          <p:nvPr/>
-        </p:nvSpPr>
-        <p:spPr>
-          <a:xfrm>
-            <a:off x="6362700" y="4767261"/>
-            <a:ext cx="47625" cy="1023937"/>
-          </a:xfrm>
-          <a:prstGeom prst="rect">
-            <a:avLst/>
-          </a:prstGeom>
-          <a:solidFill>
-            <a:srgbClr val="F59E0B"/>
-          </a:solidFill>
-          <a:ln>
-            <a:noFill/>
-          </a:ln>
-          <a:effectLst/>
-        </p:spPr>
-        <p:style>
-          <a:lnRef idx="1">
-            <a:schemeClr val="accent1"/>
-          </a:lnRef>
-          <a:fillRef idx="3">
-            <a:schemeClr val="accent1"/>
-          </a:fillRef>
-          <a:effectRef idx="2">
-            <a:schemeClr val="accent1"/>
-          </a:effectRef>
-          <a:fontRef idx="minor">
-            <a:schemeClr val="lt1"/>
-          </a:fontRef>
-        </p:style>
-        <p:txBody>
-          <a:bodyPr rtlCol="0" anchor="ctr"/>
-          <a:lstStyle/>
-          <a:p>
-            <a:pPr algn="ctr"/>
-          </a:p>
-        </p:txBody>
-      </p:sp>
-      <p:sp>
-        <p:nvSpPr>
-          <p:cNvPr id="48" name="TextBox 47"/>
-          <p:cNvSpPr txBox="1"/>
-          <p:nvPr/>
-        </p:nvSpPr>
-        <p:spPr>
-          <a:xfrm>
-            <a:off x="6496050" y="4767261"/>
-            <a:ext cx="4076700" cy="1023937"/>
-          </a:xfrm>
-          <a:prstGeom prst="rect">
-            <a:avLst/>
-          </a:prstGeom>
-          <a:noFill/>
-        </p:spPr>
-        <p:txBody>
-          <a:bodyPr wrap="square" anchor="ctr">
-            <a:spAutoFit/>
-          </a:bodyPr>
-          <a:lstStyle/>
-          <a:p>
-            <a:pPr algn="l">
-              <a:lnSpc>
-                <a:spcPct val="100000"/>
-              </a:lnSpc>
-            </a:pPr>
-            <a:r>
-              <a:rPr sz="1200" b="1">
-                <a:solidFill>
-                  <a:srgbClr val="475569"/>
-                </a:solidFill>
-                <a:latin typeface="PingFang SC"/>
-              </a:rPr>
-              <a:t>Citation 引用|平台 HybridRetriever 已实现</a:t>
-            </a:r>
-          </a:p>
-        </p:txBody>
-      </p:sp>
-      <p:sp>
-        <p:nvSpPr>
-          <p:cNvPr id="49" name="TextBox 48"/>
-          <p:cNvSpPr txBox="1"/>
-          <p:nvPr/>
-        </p:nvSpPr>
-        <p:spPr>
-          <a:xfrm>
-            <a:off x="10287000" y="6534150"/>
-            <a:ext cx="1619250" cy="266700"/>
-          </a:xfrm>
-          <a:prstGeom prst="rect">
-            <a:avLst/>
-          </a:prstGeom>
-          <a:noFill/>
-        </p:spPr>
-        <p:txBody>
-          <a:bodyPr wrap="square" anchor="ctr">
-            <a:spAutoFit/>
-          </a:bodyPr>
-          <a:lstStyle/>
-          <a:p>
-            <a:pPr algn="r">
-              <a:lnSpc>
-                <a:spcPct val="100000"/>
-              </a:lnSpc>
-            </a:pPr>
-            <a:r>
               <a:rPr sz="900" b="0">
                 <a:solidFill>
                   <a:srgbClr val="94A3B8"/>
@@ -33876,7 +34020,7 @@
       </p:sp>
       <p:sp>
         <p:nvSpPr>
-          <p:cNvPr id="50" name="TextBox 49"/>
+          <p:cNvPr id="56" name="TextBox 55"/>
           <p:cNvSpPr txBox="1"/>
           <p:nvPr/>
         </p:nvSpPr>
@@ -37704,7 +37848,7 @@
                 </a:solidFill>
                 <a:latin typeface="PingFang SC"/>
               </a:rPr>
-              <a:t>边界保双份|代码语料必须 AST</a:t>
+              <a:t>边界保双份</a:t>
             </a:r>
           </a:p>
         </p:txBody>

--- a/03-课件PPT/讲次版/第4章-4-讲次 4-4 · 现代 RAG 全链路.pptx
+++ b/03-课件PPT/讲次版/第4章-4-讲次 4-4 · 现代 RAG 全链路.pptx
@@ -26414,7 +26414,7 @@
       </p:sp>
       <p:pic>
         <p:nvPicPr>
-          <p:cNvPr id="5" name="Picture 4" descr="chart_827513.png"/>
+          <p:cNvPr id="5" name="Picture 4" descr="chart_864427.png"/>
           <p:cNvPicPr>
             <a:picLocks noChangeAspect="1"/>
           </p:cNvPicPr>
@@ -29493,7 +29493,7 @@
       </p:sp>
       <p:pic>
         <p:nvPicPr>
-          <p:cNvPr id="5" name="Picture 4" descr="chart_705298.png"/>
+          <p:cNvPr id="5" name="Picture 4" descr="chart_575989.png"/>
           <p:cNvPicPr>
             <a:picLocks noChangeAspect="1"/>
           </p:cNvPicPr>
@@ -32025,7 +32025,7 @@
           <a:noFill/>
         </p:spPr>
         <p:txBody>
-          <a:bodyPr wrap="none" anchor="ctr">
+          <a:bodyPr wrap="square" anchor="ctr">
             <a:spAutoFit/>
           </a:bodyPr>
           <a:lstStyle/>
@@ -32036,7 +32036,7 @@
               </a:lnSpc>
             </a:pPr>
             <a:r>
-              <a:rPr sz="900" b="1">
+              <a:rPr sz="1300" b="1">
                 <a:solidFill>
                   <a:srgbClr val="0B1D3A"/>
                 </a:solidFill>
@@ -32156,7 +32156,7 @@
           <a:noFill/>
         </p:spPr>
         <p:txBody>
-          <a:bodyPr wrap="none" anchor="ctr">
+          <a:bodyPr wrap="square" anchor="ctr">
             <a:spAutoFit/>
           </a:bodyPr>
           <a:lstStyle/>
@@ -32287,7 +32287,7 @@
           <a:noFill/>
         </p:spPr>
         <p:txBody>
-          <a:bodyPr wrap="none" anchor="ctr">
+          <a:bodyPr wrap="square" anchor="ctr">
             <a:spAutoFit/>
           </a:bodyPr>
           <a:lstStyle/>
@@ -32669,7 +32669,7 @@
           <a:noFill/>
         </p:spPr>
         <p:txBody>
-          <a:bodyPr wrap="none" anchor="ctr">
+          <a:bodyPr wrap="square" anchor="ctr">
             <a:spAutoFit/>
           </a:bodyPr>
           <a:lstStyle/>
@@ -32800,7 +32800,7 @@
           <a:noFill/>
         </p:spPr>
         <p:txBody>
-          <a:bodyPr wrap="none" anchor="ctr">
+          <a:bodyPr wrap="square" anchor="ctr">
             <a:spAutoFit/>
           </a:bodyPr>
           <a:lstStyle/>
@@ -32931,7 +32931,7 @@
           <a:noFill/>
         </p:spPr>
         <p:txBody>
-          <a:bodyPr wrap="none" anchor="ctr">
+          <a:bodyPr wrap="square" anchor="ctr">
             <a:spAutoFit/>
           </a:bodyPr>
           <a:lstStyle/>
@@ -33313,7 +33313,7 @@
           <a:noFill/>
         </p:spPr>
         <p:txBody>
-          <a:bodyPr wrap="none" anchor="ctr">
+          <a:bodyPr wrap="square" anchor="ctr">
             <a:spAutoFit/>
           </a:bodyPr>
           <a:lstStyle/>
@@ -33324,7 +33324,7 @@
               </a:lnSpc>
             </a:pPr>
             <a:r>
-              <a:rPr sz="1100" b="1">
+              <a:rPr sz="1300" b="1">
                 <a:solidFill>
                   <a:srgbClr val="0B1D3A"/>
                 </a:solidFill>
@@ -33444,7 +33444,7 @@
           <a:noFill/>
         </p:spPr>
         <p:txBody>
-          <a:bodyPr wrap="none" anchor="ctr">
+          <a:bodyPr wrap="square" anchor="ctr">
             <a:spAutoFit/>
           </a:bodyPr>
           <a:lstStyle/>
@@ -33826,7 +33826,7 @@
           <a:noFill/>
         </p:spPr>
         <p:txBody>
-          <a:bodyPr wrap="none" anchor="ctr">
+          <a:bodyPr wrap="square" anchor="ctr">
             <a:spAutoFit/>
           </a:bodyPr>
           <a:lstStyle/>
@@ -33957,7 +33957,7 @@
           <a:noFill/>
         </p:spPr>
         <p:txBody>
-          <a:bodyPr wrap="none" anchor="ctr">
+          <a:bodyPr wrap="square" anchor="ctr">
             <a:spAutoFit/>
           </a:bodyPr>
           <a:lstStyle/>
